--- a/docs/presentation/WKS10_Presentation.pptx
+++ b/docs/presentation/WKS10_Presentation.pptx
@@ -4,6 +4,9 @@
   <p:sldMasterIdLst>
     <p:sldMasterId id="2147483648" r:id="rId1"/>
   </p:sldMasterIdLst>
+  <p:notesMasterIdLst>
+    <p:notesMasterId r:id="rId27"/>
+  </p:notesMasterIdLst>
   <p:sldIdLst>
     <p:sldId id="256" r:id="rId2"/>
     <p:sldId id="257" r:id="rId3"/>
@@ -31,9 +34,6 @@
     <p:sldId id="279" r:id="rId25"/>
     <p:sldId id="280" r:id="rId26"/>
   </p:sldIdLst>
-  <p:notesMasterIdLst>
-    <p:notesMasterId r:id="rId27"/>
-  </p:notesMasterIdLst>
   <p:sldSz cx="12192000" cy="6858000"/>
   <p:notesSz cx="6858000" cy="12192000"/>
   <p:defaultTextStyle>
@@ -128,6 +128,11 @@
       </a:defRPr>
     </a:lvl9pPr>
   </p:defaultTextStyle>
+  <p:extLst>
+    <p:ext uri="{EFAFB233-063F-42B5-8137-9DF3F51BA10A}">
+      <p15:sldGuideLst xmlns:p15="http://schemas.microsoft.com/office/powerpoint/2012/main"/>
+    </p:ext>
+  </p:extLst>
 </p:presentation>
 </file>
 
@@ -153,234 +158,10 @@
           <a:chExt cx="0" cy="0"/>
         </a:xfrm>
       </p:grpSpPr>
-      <p:sp>
-        <p:nvSpPr>
-          <p:cNvPr id="2" name="Header Placeholder 1"/>
-          <p:cNvSpPr>
-            <a:spLocks noGrp="1"/>
-          </p:cNvSpPr>
-          <p:nvPr>
-            <p:ph type="hdr" sz="quarter"/>
-          </p:nvPr>
-        </p:nvSpPr>
-        <p:spPr>
-          <a:xfrm>
-            <a:off x="0" y="0"/>
-            <a:ext cx="2971800" cy="458788"/>
-          </a:xfrm>
-          <a:prstGeom prst="rect">
-            <a:avLst/>
-          </a:prstGeom>
-        </p:spPr>
-        <p:txBody>
-          <a:bodyPr vert="horz" lIns="91440" tIns="45720" rIns="91440" bIns="45720" rtlCol="0"/>
-          <a:lstStyle>
-            <a:lvl1pPr algn="l">
-              <a:defRPr sz="1200"/>
-            </a:lvl1pPr>
-          </a:lstStyle>
-          <a:p>
-            <a:endParaRPr lang="en-US"/>
-          </a:p>
-        </p:txBody>
-      </p:sp>
-      <p:sp>
-        <p:nvSpPr>
-          <p:cNvPr id="3" name="Date Placeholder 2"/>
-          <p:cNvSpPr>
-            <a:spLocks noGrp="1"/>
-          </p:cNvSpPr>
-          <p:nvPr>
-            <p:ph type="dt" idx="1"/>
-          </p:nvPr>
-        </p:nvSpPr>
-        <p:spPr>
-          <a:xfrm>
-            <a:off x="3884613" y="0"/>
-            <a:ext cx="2971800" cy="458788"/>
-          </a:xfrm>
-          <a:prstGeom prst="rect">
-            <a:avLst/>
-          </a:prstGeom>
-        </p:spPr>
-        <p:txBody>
-          <a:bodyPr vert="horz" lIns="91440" tIns="45720" rIns="91440" bIns="45720" rtlCol="0"/>
-          <a:lstStyle>
-            <a:lvl1pPr algn="r">
-              <a:defRPr sz="1200"/>
-            </a:lvl1pPr>
-          </a:lstStyle>
-          <a:p>
-            <a:fld id="{5282F153-3F37-0F45-9E97-73ACFA13230C}" type="datetimeFigureOut">
-              <a:rPr lang="en-US"/>
-              <a:t>7/23/19</a:t>
-            </a:fld>
-            <a:endParaRPr lang="en-US"/>
-          </a:p>
-        </p:txBody>
-      </p:sp>
-      <p:sp>
-        <p:nvSpPr>
-          <p:cNvPr id="4" name="Slide Image Placeholder 3"/>
-          <p:cNvSpPr>
-            <a:spLocks noGrp="1" noRot="1" noChangeAspect="1"/>
-          </p:cNvSpPr>
-          <p:nvPr>
-            <p:ph type="sldImg" idx="2"/>
-          </p:nvPr>
-        </p:nvSpPr>
-        <p:spPr>
-          <a:xfrm>
-            <a:off x="685800" y="1143000"/>
-            <a:ext cx="5486400" cy="3086100"/>
-          </a:xfrm>
-          <a:prstGeom prst="rect">
-            <a:avLst/>
-          </a:prstGeom>
-          <a:noFill/>
-          <a:ln w="12700">
-            <a:solidFill>
-              <a:prstClr val="black"/>
-            </a:solidFill>
-          </a:ln>
-        </p:spPr>
-        <p:txBody>
-          <a:bodyPr vert="horz" lIns="91440" tIns="45720" rIns="91440" bIns="45720" rtlCol="0" anchor="ctr"/>
-          <a:lstStyle/>
-          <a:p>
-            <a:endParaRPr lang="en-US"/>
-          </a:p>
-        </p:txBody>
-      </p:sp>
-      <p:sp>
-        <p:nvSpPr>
-          <p:cNvPr id="5" name="Notes Placeholder 4"/>
-          <p:cNvSpPr>
-            <a:spLocks noGrp="1"/>
-          </p:cNvSpPr>
-          <p:nvPr>
-            <p:ph type="body" sz="quarter" idx="3"/>
-          </p:nvPr>
-        </p:nvSpPr>
-        <p:spPr>
-          <a:xfrm>
-            <a:off x="685800" y="4400550"/>
-            <a:ext cx="5486400" cy="3600450"/>
-          </a:xfrm>
-          <a:prstGeom prst="rect">
-            <a:avLst/>
-          </a:prstGeom>
-        </p:spPr>
-        <p:txBody>
-          <a:bodyPr vert="horz" lIns="91440" tIns="45720" rIns="91440" bIns="45720" rtlCol="0"/>
-          <a:lstStyle/>
-          <a:p>
-            <a:pPr lvl="0"/>
-            <a:r>
-              <a:rPr lang="en-US"/>
-              <a:t>Click to edit Master text styles</a:t>
-            </a:r>
-          </a:p>
-          <a:p>
-            <a:pPr lvl="1"/>
-            <a:r>
-              <a:rPr lang="en-US"/>
-              <a:t>Second level</a:t>
-            </a:r>
-          </a:p>
-          <a:p>
-            <a:pPr lvl="2"/>
-            <a:r>
-              <a:rPr lang="en-US"/>
-              <a:t>Third level</a:t>
-            </a:r>
-          </a:p>
-          <a:p>
-            <a:pPr lvl="3"/>
-            <a:r>
-              <a:rPr lang="en-US"/>
-              <a:t>Fourth level</a:t>
-            </a:r>
-          </a:p>
-          <a:p>
-            <a:pPr lvl="4"/>
-            <a:r>
-              <a:rPr lang="en-US"/>
-              <a:t>Fifth level</a:t>
-            </a:r>
-          </a:p>
-        </p:txBody>
-      </p:sp>
-      <p:sp>
-        <p:nvSpPr>
-          <p:cNvPr id="6" name="Footer Placeholder 5"/>
-          <p:cNvSpPr>
-            <a:spLocks noGrp="1"/>
-          </p:cNvSpPr>
-          <p:nvPr>
-            <p:ph type="ftr" sz="quarter" idx="4"/>
-          </p:nvPr>
-        </p:nvSpPr>
-        <p:spPr>
-          <a:xfrm>
-            <a:off x="0" y="8685213"/>
-            <a:ext cx="2971800" cy="458787"/>
-          </a:xfrm>
-          <a:prstGeom prst="rect">
-            <a:avLst/>
-          </a:prstGeom>
-        </p:spPr>
-        <p:txBody>
-          <a:bodyPr vert="horz" lIns="91440" tIns="45720" rIns="91440" bIns="45720" rtlCol="0" anchor="b"/>
-          <a:lstStyle>
-            <a:lvl1pPr algn="l">
-              <a:defRPr sz="1200"/>
-            </a:lvl1pPr>
-          </a:lstStyle>
-          <a:p>
-            <a:endParaRPr lang="en-US"/>
-          </a:p>
-        </p:txBody>
-      </p:sp>
-      <p:sp>
-        <p:nvSpPr>
-          <p:cNvPr id="7" name="Slide Number Placeholder 6"/>
-          <p:cNvSpPr>
-            <a:spLocks noGrp="1"/>
-          </p:cNvSpPr>
-          <p:nvPr>
-            <p:ph type="sldNum" sz="quarter" idx="5"/>
-          </p:nvPr>
-        </p:nvSpPr>
-        <p:spPr>
-          <a:xfrm>
-            <a:off x="3884613" y="8685213"/>
-            <a:ext cx="2971800" cy="458787"/>
-          </a:xfrm>
-          <a:prstGeom prst="rect">
-            <a:avLst/>
-          </a:prstGeom>
-        </p:spPr>
-        <p:txBody>
-          <a:bodyPr vert="horz" lIns="91440" tIns="45720" rIns="91440" bIns="45720" rtlCol="0" anchor="b"/>
-          <a:lstStyle>
-            <a:lvl1pPr algn="r">
-              <a:defRPr sz="1200"/>
-            </a:lvl1pPr>
-          </a:lstStyle>
-          <a:p>
-            <a:fld id="{CE5E9CC1-C706-0F49-92D6-E571CC5EEA8F}" type="slidenum">
-              <a:rPr lang="en-US"/>
-              <a:t>‹#›</a:t>
-            </a:fld>
-            <a:endParaRPr lang="en-US"/>
-          </a:p>
-        </p:txBody>
-      </p:sp>
     </p:spTree>
     <p:extLst>
       <p:ext uri="{BB962C8B-B14F-4D97-AF65-F5344CB8AC3E}">
-        <p14:creationId xmlns:p14="http://schemas.microsoft.com/office/powerpoint/2010/main" val="1024086991"/>
+        <p14:creationId xmlns:p14="http://schemas.microsoft.com/office/powerpoint/2010/main" val="539180576"/>
       </p:ext>
     </p:extLst>
   </p:cSld>
@@ -528,7 +309,6 @@
               <a:rPr lang="en-US" dirty="0"/>
               <a:t>Welcome. This is a hands-on workshop: about 25 minutes of presentation, then you will process four real collection datasets with Claude Code. The goal is not to show you what AI can do. It is to teach you techniques you can repeat on your own data next week.</a:t>
             </a:r>
-            <a:endParaRPr lang="en-US" dirty="0"/>
           </a:p>
         </p:txBody>
       </p:sp>
@@ -616,7 +396,6 @@
               <a:rPr lang="en-US" dirty="0"/>
               <a:t>There are problems. The biggest is for entry-level workers: the routine work AI takes over is the work people used to learn on, so we need to think about how new staff build experience. Bear in mind that we are social creatures and will always seek interpersonal interaction. At least for now, there will always be tasks that must be performed by humans, especially communication between people. Finally, pattern matching is at the heart of many AI models. That explains both their strength on repetitive transformations and why we validate everything they produce, which is the technique you will use in the exercise.</a:t>
             </a:r>
-            <a:endParaRPr lang="en-US" dirty="0"/>
           </a:p>
         </p:txBody>
       </p:sp>
@@ -704,7 +483,6 @@
               <a:rPr lang="en-US" dirty="0"/>
               <a:t>Core premise: most data is AI-ready with the right prompt. Success depends on three factors: the prompt, the amount of context, and the model. In the exercise you will control all three: the prompts are written for you, the repository provides the context, and you can switch models.</a:t>
             </a:r>
-            <a:endParaRPr lang="en-US" dirty="0"/>
           </a:p>
         </p:txBody>
       </p:sp>
@@ -792,7 +570,6 @@
               <a:rPr lang="en-US" dirty="0"/>
               <a:t>Hold their hand: the best results come from giving the model every task, note and guideline. Have the model review the instructions: it finds gaps and ambiguity. Wording matters: several times I have had mediocre results, and someone else phrased the same instructions differently and the task succeeded. Process the data ahead of time. Compare results using different levels of information. Provide examples.</a:t>
             </a:r>
-            <a:endParaRPr lang="en-US" dirty="0"/>
           </a:p>
         </p:txBody>
       </p:sp>
@@ -880,7 +657,6 @@
               <a:rPr lang="en-US" dirty="0"/>
               <a:t>ETL vocabulary: Extract pulls data from its source in its verbatim form. Transform cleans, splits, categorizes, translates, reconciles and restructures it. Load writes it to the target. Organize a pipeline as discrete stages with defined inputs and outputs, driven by config rather than hard-coded logic, with small repeatable scripts. Always generate a report that defines what the output contains.</a:t>
             </a:r>
-            <a:endParaRPr lang="en-US" dirty="0"/>
           </a:p>
         </p:txBody>
       </p:sp>
@@ -968,7 +744,6 @@
               <a:rPr lang="en-US" dirty="0"/>
               <a:t>Key points: avoid runaway codebases; make things repeatable with config files and scripts; define metrics; give examples; make a plan and have Claude review it; use a stepwise architecture; report at every stage; keep the source verbatim. Provenance: store the work in a standardized repository, minimize reliance on AI to perform specific transformations by scripting the task, and generate reports. In today’s exercise, model translations are saved to mapping files for exactly this reason.</a:t>
             </a:r>
-            <a:endParaRPr lang="en-US" dirty="0"/>
           </a:p>
         </p:txBody>
       </p:sp>
@@ -1056,7 +831,6 @@
               <a:rPr lang="en-US" dirty="0"/>
               <a:t>Claude Code differs from a chat tool in one key way: it works on your files. It reads the documentation in the repository, writes scripts, runs them, and reads the results. A CLAUDE.md file gives it the project rules at the start of every session, which is the most efficient way to provide context. It asks permission before editing files or running commands. Setup: install, sign in, open the repository folder.</a:t>
             </a:r>
-            <a:endParaRPr lang="en-US" dirty="0"/>
           </a:p>
         </p:txBody>
       </p:sp>
@@ -1144,7 +918,6 @@
               <a:rPr lang="en-US" dirty="0"/>
               <a:t>Repository layout. data/input holds the verbatim exports and is never edited. Each dataset has a folder in data/output starting at version 00; every step writes the next number plus a report. data/dist holds only reviewed, validated deliverables. Authorities, docs, schemas and scripts support the process. Participants: clone github.com/ben-norton/tdwg2026-wks10.</a:t>
             </a:r>
-            <a:endParaRPr lang="en-US" dirty="0"/>
           </a:p>
         </p:txBody>
       </p:sp>
@@ -1232,7 +1005,6 @@
               <a:rPr lang="en-US" dirty="0"/>
               <a:t>Four datasets. A: 2,191 German mineral names from NM Bern; most end in -it, but some need knowledge (Quarz, Schwefel). B: 21,460 specimen rows from MHN Geneva with French names and Strunz numbers, including synonyms, uncertain identifications and notes. C: 14,092 locality strings from Basel, mixed English and German, with qualifiers and historical countries. D: 67 Yale Peabody specimens, each with 2–5 minerals, to be converted to the compound specimen model.</a:t>
             </a:r>
-            <a:endParaRPr lang="en-US" dirty="0"/>
           </a:p>
         </p:txBody>
       </p:sp>
@@ -1320,7 +1092,6 @@
               <a:rPr lang="en-US" dirty="0"/>
               <a:t>The target data model for Part D is the compound specimen model, aligned with the Mineralogy Extension. A physical specimen is a material entity that can contain component parts. Each part becomes its own record, linked to the parent by is_part_of. Procedure: find the fields that hold part names, define the criteria for material categories, list the changes needed to transpose the repeating columns, create the join ID, and stack the dataset.</a:t>
             </a:r>
-            <a:endParaRPr lang="en-US" dirty="0"/>
           </a:p>
         </p:txBody>
       </p:sp>
@@ -1408,7 +1179,6 @@
               <a:rPr lang="en-US" dirty="0"/>
               <a:t>The Standard Process: 1. analyze (profile) the dataset; 2. define the target; 3. list the changes; 4. provide helpful resources such as normative documentation, external authorities (GADM) and definitions; 5. write a stepwise plan including stages and reports, and have Claude review it; 6. generate the script; 7. run the process; 8. review the results, which must be described by a report. Step 5 is highlighted because it is where most problems are caught.</a:t>
             </a:r>
-            <a:endParaRPr lang="en-US" dirty="0"/>
           </a:p>
         </p:txBody>
       </p:sp>
@@ -1496,7 +1266,6 @@
               <a:rPr lang="en-US" dirty="0"/>
               <a:t>The agenda. The presentation sets up the method; the four parts apply it. Every part uses the same Standard Process, so by Part D you will be moving quickly. If you fall behind, skip to Part D, the shortest. Everything stays in the repository for you to finish later.</a:t>
             </a:r>
-            <a:endParaRPr lang="en-US" dirty="0"/>
           </a:p>
         </p:txBody>
       </p:sp>
@@ -1584,7 +1353,6 @@
               <a:rPr lang="en-US" dirty="0"/>
               <a:t>The central technique for Parts A and B: rules first, the model for what the rules cannot handle, and then a deterministic authority check on every result, whatever produced it. Matches go to the dictionary; everything else goes to an unresolved file for a person. Figures from profiling the workshop data: a suffix rule alone validates roughly two thirds of the German names. For the French data, only 12 name/Strunz pairs agree as written, but 1,756 agree once the leading zero is removed. That is “process the data ahead of time”. For localities, the authority names are English/ASCII, so it serves as context.</a:t>
             </a:r>
-            <a:endParaRPr lang="en-US" dirty="0"/>
           </a:p>
         </p:txBody>
       </p:sp>
@@ -1672,7 +1440,6 @@
               <a:rPr lang="en-US" dirty="0"/>
               <a:t>Switch to the Exercise Guide. Run Part A together on screen: participants type the same prompts at the same time. Then let pairs work through B, C and D. Walk the room. If people fall behind, send them to Part D, then use the reference outputs for the rest.</a:t>
             </a:r>
-            <a:endParaRPr lang="en-US" dirty="0"/>
           </a:p>
         </p:txBody>
       </p:sp>
@@ -1760,7 +1527,6 @@
               <a:rPr lang="en-US" dirty="0"/>
               <a:t>How do we know it is accurate? Compare AI errors with human error; manual digitization is not error-free. Use the latest models. Build in verification: reports, metrics, and a review of unresolved values. Compare runs made with different levels of context. Ask tables to share their unresolved counts from Parts A and B.</a:t>
             </a:r>
-            <a:endParaRPr lang="en-US" dirty="0"/>
           </a:p>
         </p:txBody>
       </p:sp>
@@ -1848,7 +1614,6 @@
               <a:rPr lang="en-US" dirty="0"/>
               <a:t>Return to the questions captured at the start. Which did the exercise answer, which need a different test, which should the community explore together? Take-home: a repeatable pipeline, the Standard Process as reusable prompts, mapping files and reports that record AI decisions, and unresolved lists that show where people are still needed. Invite feedback on the compound specimen model and the Mineralogy Extension.</a:t>
             </a:r>
-            <a:endParaRPr lang="en-US" dirty="0"/>
           </a:p>
         </p:txBody>
       </p:sp>
@@ -1936,7 +1701,6 @@
               <a:rPr lang="en-US" dirty="0"/>
               <a:t>Thank participants. Point to the repository and the guide, and invite follow-up by email.</a:t>
             </a:r>
-            <a:endParaRPr lang="en-US" dirty="0"/>
           </a:p>
         </p:txBody>
       </p:sp>
@@ -2024,7 +1788,6 @@
               <a:rPr lang="en-US" dirty="0"/>
               <a:t>Attribution slide. Lucide icons are ISC-licensed (portions from Feather, MIT); rendered via react-icons (MIT). The TDWG 2026 logo belongs to the conference. Leave this slide at the end of any shared copy of the deck.</a:t>
             </a:r>
-            <a:endParaRPr lang="en-US" dirty="0"/>
           </a:p>
         </p:txBody>
       </p:sp>
@@ -2112,7 +1875,6 @@
               <a:rPr lang="en-US" dirty="0"/>
               <a:t>For about six months I have been building ETL pipelines for several separate projects using Claude every step of the way: data transforms, testing, front-end UI, even custom database abstraction layers. The question I kept coming back to is how to use it effectively in a collections workflow, so the result is repeatable, reusable, and has provenance. AI is an entry-level programmer. I can’t hire one, so nothing is being lost.</a:t>
             </a:r>
-            <a:endParaRPr lang="en-US" dirty="0"/>
           </a:p>
         </p:txBody>
       </p:sp>
@@ -2201,7 +1963,6 @@
               <a:t>We are often told about AI: told it can do cool things, shown a demo. I want to flip that. I have spent roughly six months working almost exclusively on how to use AI, in many types of projects, many languages and many contexts. I can show some cool stuff, but that is what these sessions always are. So instead: what areas are you interested in? What do you think should be explored further? What do you feel is not given enough time or focus?
 Facilitation: take 3–4 minutes. Capture answers on a flip chart or shared doc. Keep them visible and come back to them in the wrap-up. Where an answer connects to one of the four datasets, say so, and point to it during the hands-on part.</a:t>
             </a:r>
-            <a:endParaRPr lang="en-US" dirty="0"/>
           </a:p>
         </p:txBody>
       </p:sp>
@@ -2289,7 +2050,6 @@
               <a:rPr lang="en-US" dirty="0"/>
               <a:t>A common theme at every TDWG I have attended: not enough time, not enough money, not enough people. It is highly unlikely that this will change. AI addresses the problem if it is used in an efficient and strategic manner. Three questions frame the rest of the talk: what problem does it solve, what role does it play, and how accurate is it?</a:t>
             </a:r>
-            <a:endParaRPr lang="en-US" dirty="0"/>
           </a:p>
         </p:txBody>
       </p:sp>
@@ -2377,7 +2137,6 @@
               <a:rPr lang="en-US" dirty="0"/>
               <a:t>Anecdote: I needed to turn a screenshot into a Figma mockup. I installed a plugin built for that task, which offered several models. I tried Opus, Sonnet, GPT, Flash and Flash Lite. All failed completely except Flash. The lesson: match the model to the task, and be ready to switch.</a:t>
             </a:r>
-            <a:endParaRPr lang="en-US" dirty="0"/>
           </a:p>
         </p:txBody>
       </p:sp>
@@ -2465,7 +2224,6 @@
               <a:rPr lang="en-US" dirty="0"/>
               <a:t>Release dates as recorded in the workshop notes: Claude 1 Mar 2023, Claude 3 family Mar 2024, Claude 4 family May 2025, Sonnet 4.5 Sep 2025, Opus 4.5 Nov 2025, Sonnet 5 Jun 2026, Opus 5 Jul 2026. Gemini Flash 2.0 Feb 2025, 2.5 Jun 2025, 3.5 May 2026, 3.6 Jul 2026, 3.7 Aug 2026, 3.8 Sep 2026. Verify these dates before presenting. The point is the pace: a judgment about what a model can do has a short shelf life.</a:t>
             </a:r>
-            <a:endParaRPr lang="en-US" dirty="0"/>
           </a:p>
         </p:txBody>
       </p:sp>
@@ -2553,7 +2311,6 @@
               <a:rPr lang="en-US" dirty="0"/>
               <a:t>Organizations are no longer bound to general-purpose software such as Excel. Building software keeps getting easier, and demand for custom solutions keeps rising. For collections people, the valuable skill is being able to describe exactly what you want and then check the result.</a:t>
             </a:r>
-            <a:endParaRPr lang="en-US" dirty="0"/>
           </a:p>
         </p:txBody>
       </p:sp>
@@ -2641,7 +2398,6 @@
               <a:rPr lang="en-US" dirty="0"/>
               <a:t>The most difficult task in any software development project is not technical. It is convincing people to change the way they do things every day. That requires a specific set of communication skills and a real time investment, and AI cannot do it for us. What AI does do is reduce labour requirements, both financial and temporal. The time saved can be reallocated: people can build new skills and accomplish more. Demand for software and other technical assets is higher than ever, so AI gives people the chance to focus on higher-level tasks.</a:t>
             </a:r>
-            <a:endParaRPr lang="en-US" dirty="0"/>
           </a:p>
         </p:txBody>
       </p:sp>
@@ -2714,6 +2470,11 @@
 <file path=ppt/slideMasters/slideMaster1.xml><?xml version="1.0" encoding="utf-8"?>
 <p:sldMaster xmlns:a="http://schemas.openxmlformats.org/drawingml/2006/main" xmlns:r="http://schemas.openxmlformats.org/officeDocument/2006/relationships" xmlns:p="http://schemas.openxmlformats.org/presentationml/2006/main">
   <p:cSld>
+    <p:bg>
+      <p:bgRef idx="1001">
+        <a:schemeClr val="bg1"/>
+      </p:bgRef>
+    </p:bg>
     <p:spTree>
       <p:nvGrpSpPr>
         <p:cNvPr id="1" name=""/>
@@ -2996,6 +2757,7 @@
         <a:solidFill>
           <a:srgbClr val="2B2E36"/>
         </a:solidFill>
+        <a:effectLst/>
       </p:bgPr>
     </p:bg>
     <p:spTree>
@@ -3033,11 +2795,11 @@
           <a:bodyPr wrap="square" lIns="0" tIns="0" rIns="0" bIns="0" rtlCol="0" anchor="t"/>
           <a:lstStyle/>
           <a:p>
-            <a:pPr indent="0" marL="0">
-              <a:buNone/>
-            </a:pPr>
-            <a:r>
-              <a:rPr lang="en-US" sz="1200" b="1" spc="100" kern="0" dirty="0">
+            <a:pPr marL="0" indent="0">
+              <a:buNone/>
+            </a:pPr>
+            <a:r>
+              <a:rPr lang="en-US" sz="1200" b="1" kern="0" spc="100" dirty="0">
                 <a:solidFill>
                   <a:srgbClr val="DCC37A"/>
                 </a:solidFill>
@@ -3053,14 +2815,14 @@
       </p:sp>
       <p:pic>
         <p:nvPicPr>
-          <p:cNvPr id="3" name="Image 0" descr="/home/claude/oslo_logo.png">    </p:cNvPr>
+          <p:cNvPr id="3" name="Image 0" descr="/home/claude/oslo_logo.png"/>
           <p:cNvPicPr>
             <a:picLocks noChangeAspect="1"/>
           </p:cNvPicPr>
           <p:nvPr/>
         </p:nvPicPr>
         <p:blipFill>
-          <a:blip r:embed="rId1"/>
+          <a:blip r:embed="rId3"/>
           <a:stretch>
             <a:fillRect/>
           </a:stretch>
@@ -3096,7 +2858,7 @@
           <a:bodyPr wrap="square" lIns="0" tIns="0" rIns="0" bIns="0" rtlCol="0" anchor="ctr"/>
           <a:lstStyle/>
           <a:p>
-            <a:pPr indent="0" marL="0">
+            <a:pPr marL="0" indent="0">
               <a:buNone/>
             </a:pPr>
             <a:r>
@@ -3135,7 +2897,7 @@
           <a:bodyPr wrap="square" lIns="0" tIns="0" rIns="0" bIns="0" rtlCol="0" anchor="ctr"/>
           <a:lstStyle/>
           <a:p>
-            <a:pPr indent="0" marL="0">
+            <a:pPr marL="0" indent="0">
               <a:buNone/>
             </a:pPr>
             <a:r>
@@ -3174,7 +2936,7 @@
           <a:bodyPr wrap="square" lIns="0" tIns="0" rIns="0" bIns="0" rtlCol="0" anchor="t"/>
           <a:lstStyle/>
           <a:p>
-            <a:pPr indent="0" marL="0">
+            <a:pPr marL="0" indent="0">
               <a:lnSpc>
                 <a:spcPct val="120000"/>
               </a:lnSpc>
@@ -3197,386 +2959,6 @@
       </p:sp>
       <p:sp>
         <p:nvSpPr>
-          <p:cNvPr id="7" name="Text 4"/>
-          <p:cNvSpPr txBox="1"/>
-          <p:nvPr/>
-        </p:nvSpPr>
-        <p:spPr>
-          <a:xfrm>
-            <a:off x="548640" y="4069080"/>
-            <a:ext cx="2560320" cy="822960"/>
-          </a:xfrm>
-          <a:prstGeom prst="rect">
-            <a:avLst/>
-          </a:prstGeom>
-          <a:noFill/>
-          <a:ln/>
-        </p:spPr>
-        <p:txBody>
-          <a:bodyPr wrap="square" lIns="0" tIns="0" rIns="0" bIns="0" rtlCol="0" anchor="ctr"/>
-          <a:lstStyle/>
-          <a:p>
-            <a:pPr indent="0" marL="0">
-              <a:buNone/>
-            </a:pPr>
-            <a:r>
-              <a:rPr lang="en-US" sz="5400" b="1" dirty="0">
-                <a:solidFill>
-                  <a:srgbClr val="DCC37A"/>
-                </a:solidFill>
-                <a:latin typeface="Cambria" pitchFamily="34" charset="0"/>
-                <a:ea typeface="Cambria" pitchFamily="34" charset="-122"/>
-                <a:cs typeface="Cambria" pitchFamily="34" charset="-120"/>
-              </a:rPr>
-              <a:t>4</a:t>
-            </a:r>
-            <a:endParaRPr lang="en-US" sz="5400" dirty="0"/>
-          </a:p>
-        </p:txBody>
-      </p:sp>
-      <p:sp>
-        <p:nvSpPr>
-          <p:cNvPr id="8" name="Text 5"/>
-          <p:cNvSpPr txBox="1"/>
-          <p:nvPr/>
-        </p:nvSpPr>
-        <p:spPr>
-          <a:xfrm>
-            <a:off x="548640" y="4937760"/>
-            <a:ext cx="2560320" cy="640080"/>
-          </a:xfrm>
-          <a:prstGeom prst="rect">
-            <a:avLst/>
-          </a:prstGeom>
-          <a:noFill/>
-          <a:ln/>
-        </p:spPr>
-        <p:txBody>
-          <a:bodyPr wrap="square" lIns="0" tIns="0" rIns="0" bIns="0" rtlCol="0" anchor="t"/>
-          <a:lstStyle/>
-          <a:p>
-            <a:pPr indent="0" marL="0">
-              <a:buNone/>
-            </a:pPr>
-            <a:r>
-              <a:rPr lang="en-US" sz="1300" dirty="0">
-                <a:solidFill>
-                  <a:srgbClr val="D4D8DE"/>
-                </a:solidFill>
-                <a:latin typeface="Calibri" pitchFamily="34" charset="0"/>
-                <a:ea typeface="Calibri" pitchFamily="34" charset="-122"/>
-                <a:cs typeface="Calibri" pitchFamily="34" charset="-120"/>
-              </a:rPr>
-              <a:t>real datasets from Swiss and</a:t>
-            </a:r>
-            <a:endParaRPr lang="en-US" sz="1300" dirty="0"/>
-          </a:p>
-          <a:p>
-            <a:pPr indent="0" marL="0">
-              <a:buNone/>
-            </a:pPr>
-            <a:r>
-              <a:rPr lang="en-US" sz="1300" dirty="0">
-                <a:solidFill>
-                  <a:srgbClr val="D4D8DE"/>
-                </a:solidFill>
-                <a:latin typeface="Calibri" pitchFamily="34" charset="0"/>
-                <a:ea typeface="Calibri" pitchFamily="34" charset="-122"/>
-                <a:cs typeface="Calibri" pitchFamily="34" charset="-120"/>
-              </a:rPr>
-              <a:t>US collections</a:t>
-            </a:r>
-            <a:endParaRPr lang="en-US" sz="1300" dirty="0"/>
-          </a:p>
-        </p:txBody>
-      </p:sp>
-      <p:sp>
-        <p:nvSpPr>
-          <p:cNvPr id="9" name="Text 6"/>
-          <p:cNvSpPr txBox="1"/>
-          <p:nvPr/>
-        </p:nvSpPr>
-        <p:spPr>
-          <a:xfrm>
-            <a:off x="3337560" y="4069080"/>
-            <a:ext cx="2560320" cy="822960"/>
-          </a:xfrm>
-          <a:prstGeom prst="rect">
-            <a:avLst/>
-          </a:prstGeom>
-          <a:noFill/>
-          <a:ln/>
-        </p:spPr>
-        <p:txBody>
-          <a:bodyPr wrap="square" lIns="0" tIns="0" rIns="0" bIns="0" rtlCol="0" anchor="ctr"/>
-          <a:lstStyle/>
-          <a:p>
-            <a:pPr indent="0" marL="0">
-              <a:buNone/>
-            </a:pPr>
-            <a:r>
-              <a:rPr lang="en-US" sz="5400" b="1" dirty="0">
-                <a:solidFill>
-                  <a:srgbClr val="DCC37A"/>
-                </a:solidFill>
-                <a:latin typeface="Cambria" pitchFamily="34" charset="0"/>
-                <a:ea typeface="Cambria" pitchFamily="34" charset="-122"/>
-                <a:cs typeface="Cambria" pitchFamily="34" charset="-120"/>
-              </a:rPr>
-              <a:t>90</a:t>
-            </a:r>
-            <a:endParaRPr lang="en-US" sz="5400" dirty="0"/>
-          </a:p>
-        </p:txBody>
-      </p:sp>
-      <p:sp>
-        <p:nvSpPr>
-          <p:cNvPr id="10" name="Text 7"/>
-          <p:cNvSpPr txBox="1"/>
-          <p:nvPr/>
-        </p:nvSpPr>
-        <p:spPr>
-          <a:xfrm>
-            <a:off x="3337560" y="4937760"/>
-            <a:ext cx="2560320" cy="640080"/>
-          </a:xfrm>
-          <a:prstGeom prst="rect">
-            <a:avLst/>
-          </a:prstGeom>
-          <a:noFill/>
-          <a:ln/>
-        </p:spPr>
-        <p:txBody>
-          <a:bodyPr wrap="square" lIns="0" tIns="0" rIns="0" bIns="0" rtlCol="0" anchor="t"/>
-          <a:lstStyle/>
-          <a:p>
-            <a:pPr indent="0" marL="0">
-              <a:buNone/>
-            </a:pPr>
-            <a:r>
-              <a:rPr lang="en-US" sz="1300" dirty="0">
-                <a:solidFill>
-                  <a:srgbClr val="D4D8DE"/>
-                </a:solidFill>
-                <a:latin typeface="Calibri" pitchFamily="34" charset="0"/>
-                <a:ea typeface="Calibri" pitchFamily="34" charset="-122"/>
-                <a:cs typeface="Calibri" pitchFamily="34" charset="-120"/>
-              </a:rPr>
-              <a:t>minutes, more than half</a:t>
-            </a:r>
-            <a:endParaRPr lang="en-US" sz="1300" dirty="0"/>
-          </a:p>
-          <a:p>
-            <a:pPr indent="0" marL="0">
-              <a:buNone/>
-            </a:pPr>
-            <a:r>
-              <a:rPr lang="en-US" sz="1300" dirty="0">
-                <a:solidFill>
-                  <a:srgbClr val="D4D8DE"/>
-                </a:solidFill>
-                <a:latin typeface="Calibri" pitchFamily="34" charset="0"/>
-                <a:ea typeface="Calibri" pitchFamily="34" charset="-122"/>
-                <a:cs typeface="Calibri" pitchFamily="34" charset="-120"/>
-              </a:rPr>
-              <a:t>of them hands-on</a:t>
-            </a:r>
-            <a:endParaRPr lang="en-US" sz="1300" dirty="0"/>
-          </a:p>
-        </p:txBody>
-      </p:sp>
-      <p:sp>
-        <p:nvSpPr>
-          <p:cNvPr id="11" name="Text 8"/>
-          <p:cNvSpPr txBox="1"/>
-          <p:nvPr/>
-        </p:nvSpPr>
-        <p:spPr>
-          <a:xfrm>
-            <a:off x="6126480" y="4069080"/>
-            <a:ext cx="2560320" cy="822960"/>
-          </a:xfrm>
-          <a:prstGeom prst="rect">
-            <a:avLst/>
-          </a:prstGeom>
-          <a:noFill/>
-          <a:ln/>
-        </p:spPr>
-        <p:txBody>
-          <a:bodyPr wrap="square" lIns="0" tIns="0" rIns="0" bIns="0" rtlCol="0" anchor="ctr"/>
-          <a:lstStyle/>
-          <a:p>
-            <a:pPr indent="0" marL="0">
-              <a:buNone/>
-            </a:pPr>
-            <a:r>
-              <a:rPr lang="en-US" sz="5400" b="1" dirty="0">
-                <a:solidFill>
-                  <a:srgbClr val="DCC37A"/>
-                </a:solidFill>
-                <a:latin typeface="Cambria" pitchFamily="34" charset="0"/>
-                <a:ea typeface="Cambria" pitchFamily="34" charset="-122"/>
-                <a:cs typeface="Cambria" pitchFamily="34" charset="-120"/>
-              </a:rPr>
-              <a:t>8</a:t>
-            </a:r>
-            <a:endParaRPr lang="en-US" sz="5400" dirty="0"/>
-          </a:p>
-        </p:txBody>
-      </p:sp>
-      <p:sp>
-        <p:nvSpPr>
-          <p:cNvPr id="12" name="Text 9"/>
-          <p:cNvSpPr txBox="1"/>
-          <p:nvPr/>
-        </p:nvSpPr>
-        <p:spPr>
-          <a:xfrm>
-            <a:off x="6126480" y="4937760"/>
-            <a:ext cx="2560320" cy="640080"/>
-          </a:xfrm>
-          <a:prstGeom prst="rect">
-            <a:avLst/>
-          </a:prstGeom>
-          <a:noFill/>
-          <a:ln/>
-        </p:spPr>
-        <p:txBody>
-          <a:bodyPr wrap="square" lIns="0" tIns="0" rIns="0" bIns="0" rtlCol="0" anchor="t"/>
-          <a:lstStyle/>
-          <a:p>
-            <a:pPr indent="0" marL="0">
-              <a:buNone/>
-            </a:pPr>
-            <a:r>
-              <a:rPr lang="en-US" sz="1300" dirty="0">
-                <a:solidFill>
-                  <a:srgbClr val="D4D8DE"/>
-                </a:solidFill>
-                <a:latin typeface="Calibri" pitchFamily="34" charset="0"/>
-                <a:ea typeface="Calibri" pitchFamily="34" charset="-122"/>
-                <a:cs typeface="Calibri" pitchFamily="34" charset="-120"/>
-              </a:rPr>
-              <a:t>steps in the Standard</a:t>
-            </a:r>
-            <a:endParaRPr lang="en-US" sz="1300" dirty="0"/>
-          </a:p>
-          <a:p>
-            <a:pPr indent="0" marL="0">
-              <a:buNone/>
-            </a:pPr>
-            <a:r>
-              <a:rPr lang="en-US" sz="1300" dirty="0">
-                <a:solidFill>
-                  <a:srgbClr val="D4D8DE"/>
-                </a:solidFill>
-                <a:latin typeface="Calibri" pitchFamily="34" charset="0"/>
-                <a:ea typeface="Calibri" pitchFamily="34" charset="-122"/>
-                <a:cs typeface="Calibri" pitchFamily="34" charset="-120"/>
-              </a:rPr>
-              <a:t>Process, used every time</a:t>
-            </a:r>
-            <a:endParaRPr lang="en-US" sz="1300" dirty="0"/>
-          </a:p>
-        </p:txBody>
-      </p:sp>
-      <p:sp>
-        <p:nvSpPr>
-          <p:cNvPr id="13" name="Text 10"/>
-          <p:cNvSpPr txBox="1"/>
-          <p:nvPr/>
-        </p:nvSpPr>
-        <p:spPr>
-          <a:xfrm>
-            <a:off x="8915400" y="4069080"/>
-            <a:ext cx="2560320" cy="822960"/>
-          </a:xfrm>
-          <a:prstGeom prst="rect">
-            <a:avLst/>
-          </a:prstGeom>
-          <a:noFill/>
-          <a:ln/>
-        </p:spPr>
-        <p:txBody>
-          <a:bodyPr wrap="square" lIns="0" tIns="0" rIns="0" bIns="0" rtlCol="0" anchor="ctr"/>
-          <a:lstStyle/>
-          <a:p>
-            <a:pPr indent="0" marL="0">
-              <a:buNone/>
-            </a:pPr>
-            <a:r>
-              <a:rPr lang="en-US" sz="5400" b="1" dirty="0">
-                <a:solidFill>
-                  <a:srgbClr val="DCC37A"/>
-                </a:solidFill>
-                <a:latin typeface="Cambria" pitchFamily="34" charset="0"/>
-                <a:ea typeface="Cambria" pitchFamily="34" charset="-122"/>
-                <a:cs typeface="Cambria" pitchFamily="34" charset="-120"/>
-              </a:rPr>
-              <a:t>1</a:t>
-            </a:r>
-            <a:endParaRPr lang="en-US" sz="5400" dirty="0"/>
-          </a:p>
-        </p:txBody>
-      </p:sp>
-      <p:sp>
-        <p:nvSpPr>
-          <p:cNvPr id="14" name="Text 11"/>
-          <p:cNvSpPr txBox="1"/>
-          <p:nvPr/>
-        </p:nvSpPr>
-        <p:spPr>
-          <a:xfrm>
-            <a:off x="8915400" y="4937760"/>
-            <a:ext cx="2560320" cy="640080"/>
-          </a:xfrm>
-          <a:prstGeom prst="rect">
-            <a:avLst/>
-          </a:prstGeom>
-          <a:noFill/>
-          <a:ln/>
-        </p:spPr>
-        <p:txBody>
-          <a:bodyPr wrap="square" lIns="0" tIns="0" rIns="0" bIns="0" rtlCol="0" anchor="t"/>
-          <a:lstStyle/>
-          <a:p>
-            <a:pPr indent="0" marL="0">
-              <a:buNone/>
-            </a:pPr>
-            <a:r>
-              <a:rPr lang="en-US" sz="1300" dirty="0">
-                <a:solidFill>
-                  <a:srgbClr val="D4D8DE"/>
-                </a:solidFill>
-                <a:latin typeface="Calibri" pitchFamily="34" charset="0"/>
-                <a:ea typeface="Calibri" pitchFamily="34" charset="-122"/>
-                <a:cs typeface="Calibri" pitchFamily="34" charset="-120"/>
-              </a:rPr>
-              <a:t>repository you take home</a:t>
-            </a:r>
-            <a:endParaRPr lang="en-US" sz="1300" dirty="0"/>
-          </a:p>
-          <a:p>
-            <a:pPr indent="0" marL="0">
-              <a:buNone/>
-            </a:pPr>
-            <a:r>
-              <a:rPr lang="en-US" sz="1300" dirty="0">
-                <a:solidFill>
-                  <a:srgbClr val="D4D8DE"/>
-                </a:solidFill>
-                <a:latin typeface="Calibri" pitchFamily="34" charset="0"/>
-                <a:ea typeface="Calibri" pitchFamily="34" charset="-122"/>
-                <a:cs typeface="Calibri" pitchFamily="34" charset="-120"/>
-              </a:rPr>
-              <a:t>and re-run on your data</a:t>
-            </a:r>
-            <a:endParaRPr lang="en-US" sz="1300" dirty="0"/>
-          </a:p>
-        </p:txBody>
-      </p:sp>
-      <p:sp>
-        <p:nvSpPr>
           <p:cNvPr id="15" name="Text 12"/>
           <p:cNvSpPr txBox="1"/>
           <p:nvPr/>
@@ -3596,7 +2978,7 @@
           <a:bodyPr wrap="square" lIns="0" tIns="0" rIns="0" bIns="0" rtlCol="0" anchor="t"/>
           <a:lstStyle/>
           <a:p>
-            <a:pPr indent="0" marL="0">
+            <a:pPr marL="0" indent="0">
               <a:buNone/>
             </a:pPr>
             <a:r>
@@ -3630,6 +3012,7 @@
         <a:solidFill>
           <a:srgbClr val="2B2E36"/>
         </a:solidFill>
+        <a:effectLst/>
       </p:bgPr>
     </p:bg>
     <p:spTree>
@@ -3667,11 +3050,11 @@
           <a:bodyPr wrap="square" lIns="0" tIns="0" rIns="0" bIns="0" rtlCol="0" anchor="ctr"/>
           <a:lstStyle/>
           <a:p>
-            <a:pPr indent="0" marL="0">
-              <a:buNone/>
-            </a:pPr>
-            <a:r>
-              <a:rPr lang="en-US" sz="1100" b="1" spc="100" kern="0" dirty="0">
+            <a:pPr marL="0" indent="0">
+              <a:buNone/>
+            </a:pPr>
+            <a:r>
+              <a:rPr lang="en-US" sz="1100" b="1" kern="0" spc="100" dirty="0">
                 <a:solidFill>
                   <a:srgbClr val="9CBFD6"/>
                 </a:solidFill>
@@ -3706,7 +3089,7 @@
           <a:bodyPr wrap="square" lIns="0" tIns="0" rIns="0" bIns="0" rtlCol="0" anchor="ctr"/>
           <a:lstStyle/>
           <a:p>
-            <a:pPr indent="0" marL="0">
+            <a:pPr marL="0" indent="0">
               <a:buNone/>
             </a:pPr>
             <a:r>
@@ -3745,7 +3128,7 @@
           <a:bodyPr wrap="square" lIns="0" tIns="0" rIns="0" bIns="0" rtlCol="0" anchor="ctr"/>
           <a:lstStyle/>
           <a:p>
-            <a:pPr indent="0" marL="0">
+            <a:pPr marL="0" indent="0">
               <a:buNone/>
             </a:pPr>
             <a:r>
@@ -3789,6 +3172,13 @@
             <a:prstDash val="solid"/>
           </a:ln>
         </p:spPr>
+        <p:txBody>
+          <a:bodyPr/>
+          <a:lstStyle/>
+          <a:p>
+            <a:endParaRPr lang="en-US"/>
+          </a:p>
+        </p:txBody>
       </p:sp>
       <p:sp>
         <p:nvSpPr>
@@ -3814,17 +3204,24 @@
             <a:prstDash val="solid"/>
           </a:ln>
         </p:spPr>
+        <p:txBody>
+          <a:bodyPr/>
+          <a:lstStyle/>
+          <a:p>
+            <a:endParaRPr lang="en-US"/>
+          </a:p>
+        </p:txBody>
       </p:sp>
       <p:pic>
         <p:nvPicPr>
-          <p:cNvPr id="7" name="Image 0" descr="preencoded.png">    </p:cNvPr>
+          <p:cNvPr id="7" name="Image 0" descr="preencoded.png"/>
           <p:cNvPicPr>
             <a:picLocks noChangeAspect="1"/>
           </p:cNvPicPr>
           <p:nvPr/>
         </p:nvPicPr>
         <p:blipFill>
-          <a:blip r:embed="rId1"/>
+          <a:blip r:embed="rId3"/>
           <a:stretch>
             <a:fillRect/>
           </a:stretch>
@@ -3860,7 +3257,7 @@
           <a:bodyPr wrap="square" lIns="0" tIns="0" rIns="0" bIns="0" rtlCol="0" anchor="t"/>
           <a:lstStyle/>
           <a:p>
-            <a:pPr indent="0" marL="0">
+            <a:pPr marL="0" indent="0">
               <a:buNone/>
             </a:pPr>
             <a:r>
@@ -3899,7 +3296,7 @@
           <a:bodyPr wrap="square" lIns="0" tIns="0" rIns="0" bIns="0" rtlCol="0" anchor="t"/>
           <a:lstStyle/>
           <a:p>
-            <a:pPr indent="0" marL="0">
+            <a:pPr marL="0" indent="0">
               <a:buNone/>
             </a:pPr>
             <a:r>
@@ -3943,6 +3340,13 @@
             <a:prstDash val="solid"/>
           </a:ln>
         </p:spPr>
+        <p:txBody>
+          <a:bodyPr/>
+          <a:lstStyle/>
+          <a:p>
+            <a:endParaRPr lang="en-US"/>
+          </a:p>
+        </p:txBody>
       </p:sp>
       <p:sp>
         <p:nvSpPr>
@@ -3968,17 +3372,24 @@
             <a:prstDash val="solid"/>
           </a:ln>
         </p:spPr>
+        <p:txBody>
+          <a:bodyPr/>
+          <a:lstStyle/>
+          <a:p>
+            <a:endParaRPr lang="en-US"/>
+          </a:p>
+        </p:txBody>
       </p:sp>
       <p:pic>
         <p:nvPicPr>
-          <p:cNvPr id="12" name="Image 1" descr="preencoded.png">    </p:cNvPr>
+          <p:cNvPr id="12" name="Image 1" descr="preencoded.png"/>
           <p:cNvPicPr>
             <a:picLocks noChangeAspect="1"/>
           </p:cNvPicPr>
           <p:nvPr/>
         </p:nvPicPr>
         <p:blipFill>
-          <a:blip r:embed="rId2"/>
+          <a:blip r:embed="rId4"/>
           <a:stretch>
             <a:fillRect/>
           </a:stretch>
@@ -4014,7 +3425,7 @@
           <a:bodyPr wrap="square" lIns="0" tIns="0" rIns="0" bIns="0" rtlCol="0" anchor="t"/>
           <a:lstStyle/>
           <a:p>
-            <a:pPr indent="0" marL="0">
+            <a:pPr marL="0" indent="0">
               <a:buNone/>
             </a:pPr>
             <a:r>
@@ -4053,7 +3464,7 @@
           <a:bodyPr wrap="square" lIns="0" tIns="0" rIns="0" bIns="0" rtlCol="0" anchor="t"/>
           <a:lstStyle/>
           <a:p>
-            <a:pPr indent="0" marL="0">
+            <a:pPr marL="0" indent="0">
               <a:buNone/>
             </a:pPr>
             <a:r>
@@ -4097,6 +3508,13 @@
             <a:prstDash val="solid"/>
           </a:ln>
         </p:spPr>
+        <p:txBody>
+          <a:bodyPr/>
+          <a:lstStyle/>
+          <a:p>
+            <a:endParaRPr lang="en-US"/>
+          </a:p>
+        </p:txBody>
       </p:sp>
       <p:sp>
         <p:nvSpPr>
@@ -4122,17 +3540,24 @@
             <a:prstDash val="solid"/>
           </a:ln>
         </p:spPr>
+        <p:txBody>
+          <a:bodyPr/>
+          <a:lstStyle/>
+          <a:p>
+            <a:endParaRPr lang="en-US"/>
+          </a:p>
+        </p:txBody>
       </p:sp>
       <p:pic>
         <p:nvPicPr>
-          <p:cNvPr id="17" name="Image 2" descr="preencoded.png">    </p:cNvPr>
+          <p:cNvPr id="17" name="Image 2" descr="preencoded.png"/>
           <p:cNvPicPr>
             <a:picLocks noChangeAspect="1"/>
           </p:cNvPicPr>
           <p:nvPr/>
         </p:nvPicPr>
         <p:blipFill>
-          <a:blip r:embed="rId3"/>
+          <a:blip r:embed="rId5"/>
           <a:stretch>
             <a:fillRect/>
           </a:stretch>
@@ -4168,7 +3593,7 @@
           <a:bodyPr wrap="square" lIns="0" tIns="0" rIns="0" bIns="0" rtlCol="0" anchor="t"/>
           <a:lstStyle/>
           <a:p>
-            <a:pPr indent="0" marL="0">
+            <a:pPr marL="0" indent="0">
               <a:buNone/>
             </a:pPr>
             <a:r>
@@ -4207,7 +3632,7 @@
           <a:bodyPr wrap="square" lIns="0" tIns="0" rIns="0" bIns="0" rtlCol="0" anchor="t"/>
           <a:lstStyle/>
           <a:p>
-            <a:pPr indent="0" marL="0">
+            <a:pPr marL="0" indent="0">
               <a:buNone/>
             </a:pPr>
             <a:r>
@@ -4246,7 +3671,7 @@
           <a:bodyPr wrap="square" lIns="0" tIns="0" rIns="0" bIns="0" rtlCol="0" anchor="ctr"/>
           <a:lstStyle/>
           <a:p>
-            <a:pPr indent="0" marL="0">
+            <a:pPr marL="0" indent="0">
               <a:buNone/>
             </a:pPr>
             <a:r>
@@ -4285,7 +3710,7 @@
           <a:bodyPr wrap="square" lIns="0" tIns="0" rIns="0" bIns="0" rtlCol="0" anchor="ctr"/>
           <a:lstStyle/>
           <a:p>
-            <a:pPr indent="0" marL="0">
+            <a:pPr marL="0" indent="0">
               <a:buNone/>
             </a:pPr>
             <a:r>
@@ -4324,7 +3749,7 @@
           <a:bodyPr wrap="square" lIns="0" tIns="0" rIns="0" bIns="0" rtlCol="0" anchor="ctr"/>
           <a:lstStyle/>
           <a:p>
-            <a:pPr algn="r" indent="0" marL="0">
+            <a:pPr marL="0" indent="0" algn="r">
               <a:buNone/>
             </a:pPr>
             <a:r>
@@ -4358,6 +3783,7 @@
         <a:solidFill>
           <a:srgbClr val="FFFFFF"/>
         </a:solidFill>
+        <a:effectLst/>
       </p:bgPr>
     </p:bg>
     <p:spTree>
@@ -4395,11 +3821,11 @@
           <a:bodyPr wrap="square" lIns="0" tIns="0" rIns="0" bIns="0" rtlCol="0" anchor="ctr"/>
           <a:lstStyle/>
           <a:p>
-            <a:pPr indent="0" marL="0">
-              <a:buNone/>
-            </a:pPr>
-            <a:r>
-              <a:rPr lang="en-US" sz="1100" b="1" spc="100" kern="0" dirty="0">
+            <a:pPr marL="0" indent="0">
+              <a:buNone/>
+            </a:pPr>
+            <a:r>
+              <a:rPr lang="en-US" sz="1100" b="1" kern="0" spc="100" dirty="0">
                 <a:solidFill>
                   <a:srgbClr val="A98B3C"/>
                 </a:solidFill>
@@ -4434,7 +3860,7 @@
           <a:bodyPr wrap="square" lIns="0" tIns="0" rIns="0" bIns="0" rtlCol="0" anchor="ctr"/>
           <a:lstStyle/>
           <a:p>
-            <a:pPr indent="0" marL="0">
+            <a:pPr marL="0" indent="0">
               <a:buNone/>
             </a:pPr>
             <a:r>
@@ -4473,7 +3899,7 @@
           <a:bodyPr wrap="square" lIns="0" tIns="0" rIns="0" bIns="0" rtlCol="0" anchor="ctr"/>
           <a:lstStyle/>
           <a:p>
-            <a:pPr indent="0" marL="0">
+            <a:pPr marL="0" indent="0">
               <a:buNone/>
             </a:pPr>
             <a:r>
@@ -4517,6 +3943,13 @@
             <a:prstDash val="solid"/>
           </a:ln>
         </p:spPr>
+        <p:txBody>
+          <a:bodyPr/>
+          <a:lstStyle/>
+          <a:p>
+            <a:endParaRPr lang="en-US"/>
+          </a:p>
+        </p:txBody>
       </p:sp>
       <p:sp>
         <p:nvSpPr>
@@ -4539,7 +3972,7 @@
           <a:bodyPr wrap="square" lIns="0" tIns="0" rIns="0" bIns="0" rtlCol="0" anchor="ctr"/>
           <a:lstStyle/>
           <a:p>
-            <a:pPr indent="0" marL="0">
+            <a:pPr marL="0" indent="0">
               <a:buNone/>
             </a:pPr>
             <a:r>
@@ -4578,7 +4011,7 @@
           <a:bodyPr wrap="square" lIns="0" tIns="0" rIns="0" bIns="0" rtlCol="0" anchor="ctr"/>
           <a:lstStyle/>
           <a:p>
-            <a:pPr indent="0" marL="0">
+            <a:pPr marL="0" indent="0">
               <a:buNone/>
             </a:pPr>
             <a:r>
@@ -4617,7 +4050,7 @@
           <a:bodyPr wrap="square" lIns="0" tIns="0" rIns="0" bIns="0" rtlCol="0" anchor="t"/>
           <a:lstStyle/>
           <a:p>
-            <a:pPr indent="0" marL="0">
+            <a:pPr marL="0" indent="0">
               <a:lnSpc>
                 <a:spcPct val="110000"/>
               </a:lnSpc>
@@ -4664,6 +4097,13 @@
             <a:prstDash val="solid"/>
           </a:ln>
         </p:spPr>
+        <p:txBody>
+          <a:bodyPr/>
+          <a:lstStyle/>
+          <a:p>
+            <a:endParaRPr lang="en-US"/>
+          </a:p>
+        </p:txBody>
       </p:sp>
       <p:sp>
         <p:nvSpPr>
@@ -4686,7 +4126,7 @@
           <a:bodyPr wrap="square" lIns="0" tIns="0" rIns="0" bIns="0" rtlCol="0" anchor="ctr"/>
           <a:lstStyle/>
           <a:p>
-            <a:pPr indent="0" marL="0">
+            <a:pPr marL="0" indent="0">
               <a:buNone/>
             </a:pPr>
             <a:r>
@@ -4725,7 +4165,7 @@
           <a:bodyPr wrap="square" lIns="0" tIns="0" rIns="0" bIns="0" rtlCol="0" anchor="ctr"/>
           <a:lstStyle/>
           <a:p>
-            <a:pPr indent="0" marL="0">
+            <a:pPr marL="0" indent="0">
               <a:buNone/>
             </a:pPr>
             <a:r>
@@ -4764,7 +4204,7 @@
           <a:bodyPr wrap="square" lIns="0" tIns="0" rIns="0" bIns="0" rtlCol="0" anchor="t"/>
           <a:lstStyle/>
           <a:p>
-            <a:pPr indent="0" marL="0">
+            <a:pPr marL="0" indent="0">
               <a:lnSpc>
                 <a:spcPct val="110000"/>
               </a:lnSpc>
@@ -4811,6 +4251,13 @@
             <a:prstDash val="solid"/>
           </a:ln>
         </p:spPr>
+        <p:txBody>
+          <a:bodyPr/>
+          <a:lstStyle/>
+          <a:p>
+            <a:endParaRPr lang="en-US"/>
+          </a:p>
+        </p:txBody>
       </p:sp>
       <p:sp>
         <p:nvSpPr>
@@ -4833,7 +4280,7 @@
           <a:bodyPr wrap="square" lIns="0" tIns="0" rIns="0" bIns="0" rtlCol="0" anchor="ctr"/>
           <a:lstStyle/>
           <a:p>
-            <a:pPr indent="0" marL="0">
+            <a:pPr marL="0" indent="0">
               <a:buNone/>
             </a:pPr>
             <a:r>
@@ -4872,7 +4319,7 @@
           <a:bodyPr wrap="square" lIns="0" tIns="0" rIns="0" bIns="0" rtlCol="0" anchor="ctr"/>
           <a:lstStyle/>
           <a:p>
-            <a:pPr indent="0" marL="0">
+            <a:pPr marL="0" indent="0">
               <a:buNone/>
             </a:pPr>
             <a:r>
@@ -4911,7 +4358,7 @@
           <a:bodyPr wrap="square" lIns="0" tIns="0" rIns="0" bIns="0" rtlCol="0" anchor="t"/>
           <a:lstStyle/>
           <a:p>
-            <a:pPr indent="0" marL="0">
+            <a:pPr marL="0" indent="0">
               <a:lnSpc>
                 <a:spcPct val="110000"/>
               </a:lnSpc>
@@ -4953,7 +4400,7 @@
           <a:bodyPr wrap="square" lIns="0" tIns="0" rIns="0" bIns="0" rtlCol="0" anchor="ctr"/>
           <a:lstStyle/>
           <a:p>
-            <a:pPr indent="0" marL="0">
+            <a:pPr marL="0" indent="0">
               <a:buNone/>
             </a:pPr>
             <a:r>
@@ -4992,7 +4439,7 @@
           <a:bodyPr wrap="square" lIns="0" tIns="0" rIns="0" bIns="0" rtlCol="0" anchor="ctr"/>
           <a:lstStyle/>
           <a:p>
-            <a:pPr algn="r" indent="0" marL="0">
+            <a:pPr marL="0" indent="0" algn="r">
               <a:buNone/>
             </a:pPr>
             <a:r>
@@ -5026,6 +4473,7 @@
         <a:solidFill>
           <a:srgbClr val="FFFFFF"/>
         </a:solidFill>
+        <a:effectLst/>
       </p:bgPr>
     </p:bg>
     <p:spTree>
@@ -5063,11 +4511,11 @@
           <a:bodyPr wrap="square" lIns="0" tIns="0" rIns="0" bIns="0" rtlCol="0" anchor="ctr"/>
           <a:lstStyle/>
           <a:p>
-            <a:pPr indent="0" marL="0">
-              <a:buNone/>
-            </a:pPr>
-            <a:r>
-              <a:rPr lang="en-US" sz="1100" b="1" spc="100" kern="0" dirty="0">
+            <a:pPr marL="0" indent="0">
+              <a:buNone/>
+            </a:pPr>
+            <a:r>
+              <a:rPr lang="en-US" sz="1100" b="1" kern="0" spc="100" dirty="0">
                 <a:solidFill>
                   <a:srgbClr val="A98B3C"/>
                 </a:solidFill>
@@ -5102,7 +4550,7 @@
           <a:bodyPr wrap="square" lIns="0" tIns="0" rIns="0" bIns="0" rtlCol="0" anchor="ctr"/>
           <a:lstStyle/>
           <a:p>
-            <a:pPr indent="0" marL="0">
+            <a:pPr marL="0" indent="0">
               <a:buNone/>
             </a:pPr>
             <a:r>
@@ -5141,7 +4589,7 @@
           <a:bodyPr wrap="square" lIns="0" tIns="0" rIns="0" bIns="0" rtlCol="0" anchor="ctr"/>
           <a:lstStyle/>
           <a:p>
-            <a:pPr indent="0" marL="0">
+            <a:pPr marL="0" indent="0">
               <a:buNone/>
             </a:pPr>
             <a:r>
@@ -5185,6 +4633,13 @@
             <a:prstDash val="solid"/>
           </a:ln>
         </p:spPr>
+        <p:txBody>
+          <a:bodyPr/>
+          <a:lstStyle/>
+          <a:p>
+            <a:endParaRPr lang="en-US"/>
+          </a:p>
+        </p:txBody>
       </p:sp>
       <p:sp>
         <p:nvSpPr>
@@ -5210,17 +4665,24 @@
             <a:prstDash val="solid"/>
           </a:ln>
         </p:spPr>
+        <p:txBody>
+          <a:bodyPr/>
+          <a:lstStyle/>
+          <a:p>
+            <a:endParaRPr lang="en-US"/>
+          </a:p>
+        </p:txBody>
       </p:sp>
       <p:pic>
         <p:nvPicPr>
-          <p:cNvPr id="7" name="Image 0" descr="preencoded.png">    </p:cNvPr>
+          <p:cNvPr id="7" name="Image 0" descr="preencoded.png"/>
           <p:cNvPicPr>
             <a:picLocks noChangeAspect="1"/>
           </p:cNvPicPr>
           <p:nvPr/>
         </p:nvPicPr>
         <p:blipFill>
-          <a:blip r:embed="rId1"/>
+          <a:blip r:embed="rId3"/>
           <a:stretch>
             <a:fillRect/>
           </a:stretch>
@@ -5256,7 +4718,7 @@
           <a:bodyPr wrap="square" lIns="0" tIns="0" rIns="0" bIns="0" rtlCol="0" anchor="ctr"/>
           <a:lstStyle/>
           <a:p>
-            <a:pPr indent="0" marL="0">
+            <a:pPr marL="0" indent="0">
               <a:buNone/>
             </a:pPr>
             <a:r>
@@ -5295,7 +4757,7 @@
           <a:bodyPr wrap="square" lIns="0" tIns="0" rIns="0" bIns="0" rtlCol="0" anchor="t"/>
           <a:lstStyle/>
           <a:p>
-            <a:pPr indent="0" marL="0">
+            <a:pPr marL="0" indent="0">
               <a:buNone/>
             </a:pPr>
             <a:r>
@@ -5339,6 +4801,13 @@
             <a:prstDash val="solid"/>
           </a:ln>
         </p:spPr>
+        <p:txBody>
+          <a:bodyPr/>
+          <a:lstStyle/>
+          <a:p>
+            <a:endParaRPr lang="en-US"/>
+          </a:p>
+        </p:txBody>
       </p:sp>
       <p:sp>
         <p:nvSpPr>
@@ -5364,17 +4833,24 @@
             <a:prstDash val="solid"/>
           </a:ln>
         </p:spPr>
+        <p:txBody>
+          <a:bodyPr/>
+          <a:lstStyle/>
+          <a:p>
+            <a:endParaRPr lang="en-US"/>
+          </a:p>
+        </p:txBody>
       </p:sp>
       <p:pic>
         <p:nvPicPr>
-          <p:cNvPr id="12" name="Image 1" descr="preencoded.png">    </p:cNvPr>
+          <p:cNvPr id="12" name="Image 1" descr="preencoded.png"/>
           <p:cNvPicPr>
             <a:picLocks noChangeAspect="1"/>
           </p:cNvPicPr>
           <p:nvPr/>
         </p:nvPicPr>
         <p:blipFill>
-          <a:blip r:embed="rId2"/>
+          <a:blip r:embed="rId4"/>
           <a:stretch>
             <a:fillRect/>
           </a:stretch>
@@ -5410,7 +4886,7 @@
           <a:bodyPr wrap="square" lIns="0" tIns="0" rIns="0" bIns="0" rtlCol="0" anchor="ctr"/>
           <a:lstStyle/>
           <a:p>
-            <a:pPr indent="0" marL="0">
+            <a:pPr marL="0" indent="0">
               <a:buNone/>
             </a:pPr>
             <a:r>
@@ -5449,7 +4925,7 @@
           <a:bodyPr wrap="square" lIns="0" tIns="0" rIns="0" bIns="0" rtlCol="0" anchor="t"/>
           <a:lstStyle/>
           <a:p>
-            <a:pPr indent="0" marL="0">
+            <a:pPr marL="0" indent="0">
               <a:buNone/>
             </a:pPr>
             <a:r>
@@ -5493,6 +4969,13 @@
             <a:prstDash val="solid"/>
           </a:ln>
         </p:spPr>
+        <p:txBody>
+          <a:bodyPr/>
+          <a:lstStyle/>
+          <a:p>
+            <a:endParaRPr lang="en-US"/>
+          </a:p>
+        </p:txBody>
       </p:sp>
       <p:sp>
         <p:nvSpPr>
@@ -5518,17 +5001,24 @@
             <a:prstDash val="solid"/>
           </a:ln>
         </p:spPr>
+        <p:txBody>
+          <a:bodyPr/>
+          <a:lstStyle/>
+          <a:p>
+            <a:endParaRPr lang="en-US"/>
+          </a:p>
+        </p:txBody>
       </p:sp>
       <p:pic>
         <p:nvPicPr>
-          <p:cNvPr id="17" name="Image 2" descr="preencoded.png">    </p:cNvPr>
+          <p:cNvPr id="17" name="Image 2" descr="preencoded.png"/>
           <p:cNvPicPr>
             <a:picLocks noChangeAspect="1"/>
           </p:cNvPicPr>
           <p:nvPr/>
         </p:nvPicPr>
         <p:blipFill>
-          <a:blip r:embed="rId3"/>
+          <a:blip r:embed="rId5"/>
           <a:stretch>
             <a:fillRect/>
           </a:stretch>
@@ -5564,7 +5054,7 @@
           <a:bodyPr wrap="square" lIns="0" tIns="0" rIns="0" bIns="0" rtlCol="0" anchor="ctr"/>
           <a:lstStyle/>
           <a:p>
-            <a:pPr indent="0" marL="0">
+            <a:pPr marL="0" indent="0">
               <a:buNone/>
             </a:pPr>
             <a:r>
@@ -5603,7 +5093,7 @@
           <a:bodyPr wrap="square" lIns="0" tIns="0" rIns="0" bIns="0" rtlCol="0" anchor="t"/>
           <a:lstStyle/>
           <a:p>
-            <a:pPr indent="0" marL="0">
+            <a:pPr marL="0" indent="0">
               <a:buNone/>
             </a:pPr>
             <a:r>
@@ -5647,6 +5137,13 @@
             <a:prstDash val="solid"/>
           </a:ln>
         </p:spPr>
+        <p:txBody>
+          <a:bodyPr/>
+          <a:lstStyle/>
+          <a:p>
+            <a:endParaRPr lang="en-US"/>
+          </a:p>
+        </p:txBody>
       </p:sp>
       <p:sp>
         <p:nvSpPr>
@@ -5672,17 +5169,24 @@
             <a:prstDash val="solid"/>
           </a:ln>
         </p:spPr>
+        <p:txBody>
+          <a:bodyPr/>
+          <a:lstStyle/>
+          <a:p>
+            <a:endParaRPr lang="en-US"/>
+          </a:p>
+        </p:txBody>
       </p:sp>
       <p:pic>
         <p:nvPicPr>
-          <p:cNvPr id="22" name="Image 3" descr="preencoded.png">    </p:cNvPr>
+          <p:cNvPr id="22" name="Image 3" descr="preencoded.png"/>
           <p:cNvPicPr>
             <a:picLocks noChangeAspect="1"/>
           </p:cNvPicPr>
           <p:nvPr/>
         </p:nvPicPr>
         <p:blipFill>
-          <a:blip r:embed="rId4"/>
+          <a:blip r:embed="rId6"/>
           <a:stretch>
             <a:fillRect/>
           </a:stretch>
@@ -5718,7 +5222,7 @@
           <a:bodyPr wrap="square" lIns="0" tIns="0" rIns="0" bIns="0" rtlCol="0" anchor="ctr"/>
           <a:lstStyle/>
           <a:p>
-            <a:pPr indent="0" marL="0">
+            <a:pPr marL="0" indent="0">
               <a:buNone/>
             </a:pPr>
             <a:r>
@@ -5757,7 +5261,7 @@
           <a:bodyPr wrap="square" lIns="0" tIns="0" rIns="0" bIns="0" rtlCol="0" anchor="t"/>
           <a:lstStyle/>
           <a:p>
-            <a:pPr indent="0" marL="0">
+            <a:pPr marL="0" indent="0">
               <a:buNone/>
             </a:pPr>
             <a:r>
@@ -5801,6 +5305,13 @@
             <a:prstDash val="solid"/>
           </a:ln>
         </p:spPr>
+        <p:txBody>
+          <a:bodyPr/>
+          <a:lstStyle/>
+          <a:p>
+            <a:endParaRPr lang="en-US"/>
+          </a:p>
+        </p:txBody>
       </p:sp>
       <p:sp>
         <p:nvSpPr>
@@ -5826,17 +5337,24 @@
             <a:prstDash val="solid"/>
           </a:ln>
         </p:spPr>
+        <p:txBody>
+          <a:bodyPr/>
+          <a:lstStyle/>
+          <a:p>
+            <a:endParaRPr lang="en-US"/>
+          </a:p>
+        </p:txBody>
       </p:sp>
       <p:pic>
         <p:nvPicPr>
-          <p:cNvPr id="27" name="Image 4" descr="preencoded.png">    </p:cNvPr>
+          <p:cNvPr id="27" name="Image 4" descr="preencoded.png"/>
           <p:cNvPicPr>
             <a:picLocks noChangeAspect="1"/>
           </p:cNvPicPr>
           <p:nvPr/>
         </p:nvPicPr>
         <p:blipFill>
-          <a:blip r:embed="rId5"/>
+          <a:blip r:embed="rId7"/>
           <a:stretch>
             <a:fillRect/>
           </a:stretch>
@@ -5872,7 +5390,7 @@
           <a:bodyPr wrap="square" lIns="0" tIns="0" rIns="0" bIns="0" rtlCol="0" anchor="ctr"/>
           <a:lstStyle/>
           <a:p>
-            <a:pPr indent="0" marL="0">
+            <a:pPr marL="0" indent="0">
               <a:buNone/>
             </a:pPr>
             <a:r>
@@ -5911,7 +5429,7 @@
           <a:bodyPr wrap="square" lIns="0" tIns="0" rIns="0" bIns="0" rtlCol="0" anchor="t"/>
           <a:lstStyle/>
           <a:p>
-            <a:pPr indent="0" marL="0">
+            <a:pPr marL="0" indent="0">
               <a:buNone/>
             </a:pPr>
             <a:r>
@@ -5955,6 +5473,13 @@
             <a:prstDash val="solid"/>
           </a:ln>
         </p:spPr>
+        <p:txBody>
+          <a:bodyPr/>
+          <a:lstStyle/>
+          <a:p>
+            <a:endParaRPr lang="en-US"/>
+          </a:p>
+        </p:txBody>
       </p:sp>
       <p:sp>
         <p:nvSpPr>
@@ -5980,17 +5505,24 @@
             <a:prstDash val="solid"/>
           </a:ln>
         </p:spPr>
+        <p:txBody>
+          <a:bodyPr/>
+          <a:lstStyle/>
+          <a:p>
+            <a:endParaRPr lang="en-US"/>
+          </a:p>
+        </p:txBody>
       </p:sp>
       <p:pic>
         <p:nvPicPr>
-          <p:cNvPr id="32" name="Image 5" descr="preencoded.png">    </p:cNvPr>
+          <p:cNvPr id="32" name="Image 5" descr="preencoded.png"/>
           <p:cNvPicPr>
             <a:picLocks noChangeAspect="1"/>
           </p:cNvPicPr>
           <p:nvPr/>
         </p:nvPicPr>
         <p:blipFill>
-          <a:blip r:embed="rId6"/>
+          <a:blip r:embed="rId8"/>
           <a:stretch>
             <a:fillRect/>
           </a:stretch>
@@ -6026,7 +5558,7 @@
           <a:bodyPr wrap="square" lIns="0" tIns="0" rIns="0" bIns="0" rtlCol="0" anchor="ctr"/>
           <a:lstStyle/>
           <a:p>
-            <a:pPr indent="0" marL="0">
+            <a:pPr marL="0" indent="0">
               <a:buNone/>
             </a:pPr>
             <a:r>
@@ -6065,7 +5597,7 @@
           <a:bodyPr wrap="square" lIns="0" tIns="0" rIns="0" bIns="0" rtlCol="0" anchor="t"/>
           <a:lstStyle/>
           <a:p>
-            <a:pPr indent="0" marL="0">
+            <a:pPr marL="0" indent="0">
               <a:buNone/>
             </a:pPr>
             <a:r>
@@ -6104,7 +5636,7 @@
           <a:bodyPr wrap="square" lIns="0" tIns="0" rIns="0" bIns="0" rtlCol="0" anchor="ctr"/>
           <a:lstStyle/>
           <a:p>
-            <a:pPr indent="0" marL="0">
+            <a:pPr marL="0" indent="0">
               <a:buNone/>
             </a:pPr>
             <a:r>
@@ -6143,7 +5675,7 @@
           <a:bodyPr wrap="square" lIns="0" tIns="0" rIns="0" bIns="0" rtlCol="0" anchor="ctr"/>
           <a:lstStyle/>
           <a:p>
-            <a:pPr algn="r" indent="0" marL="0">
+            <a:pPr marL="0" indent="0" algn="r">
               <a:buNone/>
             </a:pPr>
             <a:r>
@@ -6177,6 +5709,7 @@
         <a:solidFill>
           <a:srgbClr val="FFFFFF"/>
         </a:solidFill>
+        <a:effectLst/>
       </p:bgPr>
     </p:bg>
     <p:spTree>
@@ -6214,11 +5747,11 @@
           <a:bodyPr wrap="square" lIns="0" tIns="0" rIns="0" bIns="0" rtlCol="0" anchor="ctr"/>
           <a:lstStyle/>
           <a:p>
-            <a:pPr indent="0" marL="0">
-              <a:buNone/>
-            </a:pPr>
-            <a:r>
-              <a:rPr lang="en-US" sz="1100" b="1" spc="100" kern="0" dirty="0">
+            <a:pPr marL="0" indent="0">
+              <a:buNone/>
+            </a:pPr>
+            <a:r>
+              <a:rPr lang="en-US" sz="1100" b="1" kern="0" spc="100" dirty="0">
                 <a:solidFill>
                   <a:srgbClr val="A98B3C"/>
                 </a:solidFill>
@@ -6253,7 +5786,7 @@
           <a:bodyPr wrap="square" lIns="0" tIns="0" rIns="0" bIns="0" rtlCol="0" anchor="ctr"/>
           <a:lstStyle/>
           <a:p>
-            <a:pPr indent="0" marL="0">
+            <a:pPr marL="0" indent="0">
               <a:buNone/>
             </a:pPr>
             <a:r>
@@ -6292,7 +5825,7 @@
           <a:bodyPr wrap="square" lIns="0" tIns="0" rIns="0" bIns="0" rtlCol="0" anchor="ctr"/>
           <a:lstStyle/>
           <a:p>
-            <a:pPr indent="0" marL="0">
+            <a:pPr marL="0" indent="0">
               <a:buNone/>
             </a:pPr>
             <a:r>
@@ -6336,6 +5869,13 @@
             <a:prstDash val="solid"/>
           </a:ln>
         </p:spPr>
+        <p:txBody>
+          <a:bodyPr/>
+          <a:lstStyle/>
+          <a:p>
+            <a:endParaRPr lang="en-US"/>
+          </a:p>
+        </p:txBody>
       </p:sp>
       <p:sp>
         <p:nvSpPr>
@@ -6361,17 +5901,24 @@
             <a:prstDash val="solid"/>
           </a:ln>
         </p:spPr>
+        <p:txBody>
+          <a:bodyPr/>
+          <a:lstStyle/>
+          <a:p>
+            <a:endParaRPr lang="en-US"/>
+          </a:p>
+        </p:txBody>
       </p:sp>
       <p:pic>
         <p:nvPicPr>
-          <p:cNvPr id="7" name="Image 0" descr="preencoded.png">    </p:cNvPr>
+          <p:cNvPr id="7" name="Image 0" descr="preencoded.png"/>
           <p:cNvPicPr>
             <a:picLocks noChangeAspect="1"/>
           </p:cNvPicPr>
           <p:nvPr/>
         </p:nvPicPr>
         <p:blipFill>
-          <a:blip r:embed="rId1"/>
+          <a:blip r:embed="rId3"/>
           <a:stretch>
             <a:fillRect/>
           </a:stretch>
@@ -6407,7 +5954,7 @@
           <a:bodyPr wrap="square" lIns="0" tIns="0" rIns="0" bIns="0" rtlCol="0" anchor="ctr"/>
           <a:lstStyle/>
           <a:p>
-            <a:pPr indent="0" marL="0">
+            <a:pPr marL="0" indent="0">
               <a:buNone/>
             </a:pPr>
             <a:r>
@@ -6446,7 +5993,7 @@
           <a:bodyPr wrap="square" lIns="0" tIns="0" rIns="0" bIns="0" rtlCol="0" anchor="t"/>
           <a:lstStyle/>
           <a:p>
-            <a:pPr indent="0" marL="0">
+            <a:pPr marL="0" indent="0">
               <a:buNone/>
             </a:pPr>
             <a:r>
@@ -6466,14 +6013,14 @@
       </p:sp>
       <p:pic>
         <p:nvPicPr>
-          <p:cNvPr id="10" name="Image 1" descr="preencoded.png">    </p:cNvPr>
+          <p:cNvPr id="10" name="Image 1" descr="preencoded.png"/>
           <p:cNvPicPr>
             <a:picLocks noChangeAspect="1"/>
           </p:cNvPicPr>
           <p:nvPr/>
         </p:nvPicPr>
         <p:blipFill>
-          <a:blip r:embed="rId2"/>
+          <a:blip r:embed="rId4"/>
           <a:stretch>
             <a:fillRect/>
           </a:stretch>
@@ -6514,6 +6061,13 @@
             <a:prstDash val="solid"/>
           </a:ln>
         </p:spPr>
+        <p:txBody>
+          <a:bodyPr/>
+          <a:lstStyle/>
+          <a:p>
+            <a:endParaRPr lang="en-US"/>
+          </a:p>
+        </p:txBody>
       </p:sp>
       <p:sp>
         <p:nvSpPr>
@@ -6539,17 +6093,24 @@
             <a:prstDash val="solid"/>
           </a:ln>
         </p:spPr>
+        <p:txBody>
+          <a:bodyPr/>
+          <a:lstStyle/>
+          <a:p>
+            <a:endParaRPr lang="en-US"/>
+          </a:p>
+        </p:txBody>
       </p:sp>
       <p:pic>
         <p:nvPicPr>
-          <p:cNvPr id="13" name="Image 2" descr="preencoded.png">    </p:cNvPr>
+          <p:cNvPr id="13" name="Image 2" descr="preencoded.png"/>
           <p:cNvPicPr>
             <a:picLocks noChangeAspect="1"/>
           </p:cNvPicPr>
           <p:nvPr/>
         </p:nvPicPr>
         <p:blipFill>
-          <a:blip r:embed="rId3"/>
+          <a:blip r:embed="rId5"/>
           <a:stretch>
             <a:fillRect/>
           </a:stretch>
@@ -6585,7 +6146,7 @@
           <a:bodyPr wrap="square" lIns="0" tIns="0" rIns="0" bIns="0" rtlCol="0" anchor="ctr"/>
           <a:lstStyle/>
           <a:p>
-            <a:pPr indent="0" marL="0">
+            <a:pPr marL="0" indent="0">
               <a:buNone/>
             </a:pPr>
             <a:r>
@@ -6624,7 +6185,7 @@
           <a:bodyPr wrap="square" lIns="0" tIns="0" rIns="0" bIns="0" rtlCol="0" anchor="t"/>
           <a:lstStyle/>
           <a:p>
-            <a:pPr indent="0" marL="0">
+            <a:pPr marL="0" indent="0">
               <a:buNone/>
             </a:pPr>
             <a:r>
@@ -6644,7 +6205,7 @@
       </p:sp>
       <p:pic>
         <p:nvPicPr>
-          <p:cNvPr id="16" name="Image 3" descr="preencoded.png">    </p:cNvPr>
+          <p:cNvPr id="16" name="Image 3" descr="preencoded.png"/>
           <p:cNvPicPr>
             <a:picLocks noChangeAspect="1"/>
           </p:cNvPicPr>
@@ -6692,6 +6253,13 @@
             <a:prstDash val="solid"/>
           </a:ln>
         </p:spPr>
+        <p:txBody>
+          <a:bodyPr/>
+          <a:lstStyle/>
+          <a:p>
+            <a:endParaRPr lang="en-US"/>
+          </a:p>
+        </p:txBody>
       </p:sp>
       <p:sp>
         <p:nvSpPr>
@@ -6717,17 +6285,24 @@
             <a:prstDash val="solid"/>
           </a:ln>
         </p:spPr>
+        <p:txBody>
+          <a:bodyPr/>
+          <a:lstStyle/>
+          <a:p>
+            <a:endParaRPr lang="en-US"/>
+          </a:p>
+        </p:txBody>
       </p:sp>
       <p:pic>
         <p:nvPicPr>
-          <p:cNvPr id="19" name="Image 4" descr="preencoded.png">    </p:cNvPr>
+          <p:cNvPr id="19" name="Image 4" descr="preencoded.png"/>
           <p:cNvPicPr>
             <a:picLocks noChangeAspect="1"/>
           </p:cNvPicPr>
           <p:nvPr/>
         </p:nvPicPr>
         <p:blipFill>
-          <a:blip r:embed="rId5"/>
+          <a:blip r:embed="rId6"/>
           <a:stretch>
             <a:fillRect/>
           </a:stretch>
@@ -6763,7 +6338,7 @@
           <a:bodyPr wrap="square" lIns="0" tIns="0" rIns="0" bIns="0" rtlCol="0" anchor="ctr"/>
           <a:lstStyle/>
           <a:p>
-            <a:pPr indent="0" marL="0">
+            <a:pPr marL="0" indent="0">
               <a:buNone/>
             </a:pPr>
             <a:r>
@@ -6802,7 +6377,7 @@
           <a:bodyPr wrap="square" lIns="0" tIns="0" rIns="0" bIns="0" rtlCol="0" anchor="t"/>
           <a:lstStyle/>
           <a:p>
-            <a:pPr indent="0" marL="0">
+            <a:pPr marL="0" indent="0">
               <a:buNone/>
             </a:pPr>
             <a:r>
@@ -6841,11 +6416,11 @@
           <a:bodyPr wrap="square" lIns="0" tIns="0" rIns="0" bIns="0" rtlCol="0" anchor="t"/>
           <a:lstStyle/>
           <a:p>
-            <a:pPr indent="0" marL="0">
-              <a:buNone/>
-            </a:pPr>
-            <a:r>
-              <a:rPr lang="en-US" sz="1100" b="1" spc="100" kern="0" dirty="0">
+            <a:pPr marL="0" indent="0">
+              <a:buNone/>
+            </a:pPr>
+            <a:r>
+              <a:rPr lang="en-US" sz="1100" b="1" kern="0" spc="100" dirty="0">
                 <a:solidFill>
                   <a:srgbClr val="A98B3C"/>
                 </a:solidFill>
@@ -6880,7 +6455,7 @@
           <a:bodyPr wrap="square" lIns="0" tIns="0" rIns="0" bIns="0" rtlCol="0" anchor="t"/>
           <a:lstStyle/>
           <a:p>
-            <a:pPr indent="0" marL="0">
+            <a:pPr marL="0" indent="0">
               <a:buNone/>
             </a:pPr>
             <a:r>
@@ -6897,7 +6472,7 @@
             <a:endParaRPr lang="en-US" sz="1400" dirty="0"/>
           </a:p>
           <a:p>
-            <a:pPr indent="0" marL="0">
+            <a:pPr marL="0" indent="0">
               <a:buNone/>
             </a:pPr>
             <a:r>
@@ -6936,7 +6511,7 @@
           <a:bodyPr wrap="square" lIns="0" tIns="0" rIns="0" bIns="0" rtlCol="0" anchor="t"/>
           <a:lstStyle/>
           <a:p>
-            <a:pPr indent="0" marL="0">
+            <a:pPr marL="0" indent="0">
               <a:buNone/>
             </a:pPr>
             <a:r>
@@ -6953,7 +6528,7 @@
             <a:endParaRPr lang="en-US" sz="1400" dirty="0"/>
           </a:p>
           <a:p>
-            <a:pPr indent="0" marL="0">
+            <a:pPr marL="0" indent="0">
               <a:buNone/>
             </a:pPr>
             <a:r>
@@ -6992,7 +6567,7 @@
           <a:bodyPr wrap="square" lIns="0" tIns="0" rIns="0" bIns="0" rtlCol="0" anchor="t"/>
           <a:lstStyle/>
           <a:p>
-            <a:pPr indent="0" marL="0">
+            <a:pPr marL="0" indent="0">
               <a:buNone/>
             </a:pPr>
             <a:r>
@@ -7009,7 +6584,7 @@
             <a:endParaRPr lang="en-US" sz="1400" dirty="0"/>
           </a:p>
           <a:p>
-            <a:pPr indent="0" marL="0">
+            <a:pPr marL="0" indent="0">
               <a:buNone/>
             </a:pPr>
             <a:r>
@@ -7048,7 +6623,7 @@
           <a:bodyPr wrap="square" lIns="0" tIns="0" rIns="0" bIns="0" rtlCol="0" anchor="t"/>
           <a:lstStyle/>
           <a:p>
-            <a:pPr indent="0" marL="0">
+            <a:pPr marL="0" indent="0">
               <a:buNone/>
             </a:pPr>
             <a:r>
@@ -7065,7 +6640,7 @@
             <a:endParaRPr lang="en-US" sz="1400" dirty="0"/>
           </a:p>
           <a:p>
-            <a:pPr indent="0" marL="0">
+            <a:pPr marL="0" indent="0">
               <a:buNone/>
             </a:pPr>
             <a:r>
@@ -7104,7 +6679,7 @@
           <a:bodyPr wrap="square" lIns="0" tIns="0" rIns="0" bIns="0" rtlCol="0" anchor="ctr"/>
           <a:lstStyle/>
           <a:p>
-            <a:pPr indent="0" marL="0">
+            <a:pPr marL="0" indent="0">
               <a:buNone/>
             </a:pPr>
             <a:r>
@@ -7143,7 +6718,7 @@
           <a:bodyPr wrap="square" lIns="0" tIns="0" rIns="0" bIns="0" rtlCol="0" anchor="ctr"/>
           <a:lstStyle/>
           <a:p>
-            <a:pPr algn="r" indent="0" marL="0">
+            <a:pPr marL="0" indent="0" algn="r">
               <a:buNone/>
             </a:pPr>
             <a:r>
@@ -7177,6 +6752,7 @@
         <a:solidFill>
           <a:srgbClr val="2B2E36"/>
         </a:solidFill>
+        <a:effectLst/>
       </p:bgPr>
     </p:bg>
     <p:spTree>
@@ -7214,7 +6790,7 @@
           <a:bodyPr wrap="square" lIns="0" tIns="0" rIns="0" bIns="0" rtlCol="0" anchor="ctr"/>
           <a:lstStyle/>
           <a:p>
-            <a:pPr indent="0" marL="0">
+            <a:pPr marL="0" indent="0">
               <a:buNone/>
             </a:pPr>
             <a:r>
@@ -7258,6 +6834,13 @@
             <a:prstDash val="solid"/>
           </a:ln>
         </p:spPr>
+        <p:txBody>
+          <a:bodyPr/>
+          <a:lstStyle/>
+          <a:p>
+            <a:endParaRPr lang="en-US"/>
+          </a:p>
+        </p:txBody>
       </p:sp>
       <p:sp>
         <p:nvSpPr>
@@ -7285,6 +6868,13 @@
             <a:prstDash val="solid"/>
           </a:ln>
         </p:spPr>
+        <p:txBody>
+          <a:bodyPr/>
+          <a:lstStyle/>
+          <a:p>
+            <a:endParaRPr lang="en-US"/>
+          </a:p>
+        </p:txBody>
       </p:sp>
       <p:sp>
         <p:nvSpPr>
@@ -7307,11 +6897,11 @@
           <a:bodyPr wrap="square" lIns="0" tIns="0" rIns="0" bIns="0" rtlCol="0" anchor="t"/>
           <a:lstStyle/>
           <a:p>
-            <a:pPr indent="0" marL="0">
-              <a:buNone/>
-            </a:pPr>
-            <a:r>
-              <a:rPr lang="en-US" sz="1100" b="1" spc="100" kern="0" dirty="0">
+            <a:pPr marL="0" indent="0">
+              <a:buNone/>
+            </a:pPr>
+            <a:r>
+              <a:rPr lang="en-US" sz="1100" b="1" kern="0" spc="100" dirty="0">
                 <a:solidFill>
                   <a:srgbClr val="9CBFD6"/>
                 </a:solidFill>
@@ -7536,11 +7126,11 @@
           <a:bodyPr wrap="square" lIns="0" tIns="0" rIns="0" bIns="0" rtlCol="0" anchor="t"/>
           <a:lstStyle/>
           <a:p>
-            <a:pPr indent="0" marL="0">
-              <a:buNone/>
-            </a:pPr>
-            <a:r>
-              <a:rPr lang="en-US" sz="1100" b="1" spc="100" kern="0" dirty="0">
+            <a:pPr marL="0" indent="0">
+              <a:buNone/>
+            </a:pPr>
+            <a:r>
+              <a:rPr lang="en-US" sz="1100" b="1" kern="0" spc="100" dirty="0">
                 <a:solidFill>
                   <a:srgbClr val="DCC37A"/>
                 </a:solidFill>
@@ -7681,7 +7271,7 @@
           <a:bodyPr wrap="square" lIns="0" tIns="0" rIns="0" bIns="0" rtlCol="0" anchor="ctr"/>
           <a:lstStyle/>
           <a:p>
-            <a:pPr indent="0" marL="0">
+            <a:pPr marL="0" indent="0">
               <a:buNone/>
             </a:pPr>
             <a:r>
@@ -7720,7 +7310,7 @@
           <a:bodyPr wrap="square" lIns="0" tIns="0" rIns="0" bIns="0" rtlCol="0" anchor="ctr"/>
           <a:lstStyle/>
           <a:p>
-            <a:pPr indent="0" marL="0">
+            <a:pPr marL="0" indent="0">
               <a:buNone/>
             </a:pPr>
             <a:r>
@@ -7759,7 +7349,7 @@
           <a:bodyPr wrap="square" lIns="0" tIns="0" rIns="0" bIns="0" rtlCol="0" anchor="ctr"/>
           <a:lstStyle/>
           <a:p>
-            <a:pPr algn="r" indent="0" marL="0">
+            <a:pPr marL="0" indent="0" algn="r">
               <a:buNone/>
             </a:pPr>
             <a:r>
@@ -7793,6 +7383,7 @@
         <a:solidFill>
           <a:srgbClr val="FFFFFF"/>
         </a:solidFill>
+        <a:effectLst/>
       </p:bgPr>
     </p:bg>
     <p:spTree>
@@ -7830,11 +7421,11 @@
           <a:bodyPr wrap="square" lIns="0" tIns="0" rIns="0" bIns="0" rtlCol="0" anchor="ctr"/>
           <a:lstStyle/>
           <a:p>
-            <a:pPr indent="0" marL="0">
-              <a:buNone/>
-            </a:pPr>
-            <a:r>
-              <a:rPr lang="en-US" sz="1100" b="1" spc="100" kern="0" dirty="0">
+            <a:pPr marL="0" indent="0">
+              <a:buNone/>
+            </a:pPr>
+            <a:r>
+              <a:rPr lang="en-US" sz="1100" b="1" kern="0" spc="100" dirty="0">
                 <a:solidFill>
                   <a:srgbClr val="A98B3C"/>
                 </a:solidFill>
@@ -7869,7 +7460,7 @@
           <a:bodyPr wrap="square" lIns="0" tIns="0" rIns="0" bIns="0" rtlCol="0" anchor="ctr"/>
           <a:lstStyle/>
           <a:p>
-            <a:pPr indent="0" marL="0">
+            <a:pPr marL="0" indent="0">
               <a:buNone/>
             </a:pPr>
             <a:r>
@@ -7908,7 +7499,7 @@
           <a:bodyPr wrap="square" lIns="0" tIns="0" rIns="0" bIns="0" rtlCol="0" anchor="ctr"/>
           <a:lstStyle/>
           <a:p>
-            <a:pPr indent="0" marL="0">
+            <a:pPr marL="0" indent="0">
               <a:buNone/>
             </a:pPr>
             <a:r>
@@ -7952,6 +7543,13 @@
             <a:prstDash val="solid"/>
           </a:ln>
         </p:spPr>
+        <p:txBody>
+          <a:bodyPr/>
+          <a:lstStyle/>
+          <a:p>
+            <a:endParaRPr lang="en-US"/>
+          </a:p>
+        </p:txBody>
       </p:sp>
       <p:sp>
         <p:nvSpPr>
@@ -7979,6 +7577,13 @@
             <a:prstDash val="solid"/>
           </a:ln>
         </p:spPr>
+        <p:txBody>
+          <a:bodyPr/>
+          <a:lstStyle/>
+          <a:p>
+            <a:endParaRPr lang="en-US"/>
+          </a:p>
+        </p:txBody>
       </p:sp>
       <p:sp>
         <p:nvSpPr>
@@ -8004,17 +7609,24 @@
             <a:prstDash val="solid"/>
           </a:ln>
         </p:spPr>
+        <p:txBody>
+          <a:bodyPr/>
+          <a:lstStyle/>
+          <a:p>
+            <a:endParaRPr lang="en-US"/>
+          </a:p>
+        </p:txBody>
       </p:sp>
       <p:pic>
         <p:nvPicPr>
-          <p:cNvPr id="8" name="Image 0" descr="preencoded.png">    </p:cNvPr>
+          <p:cNvPr id="8" name="Image 0" descr="preencoded.png"/>
           <p:cNvPicPr>
             <a:picLocks noChangeAspect="1"/>
           </p:cNvPicPr>
           <p:nvPr/>
         </p:nvPicPr>
         <p:blipFill>
-          <a:blip r:embed="rId1"/>
+          <a:blip r:embed="rId3"/>
           <a:stretch>
             <a:fillRect/>
           </a:stretch>
@@ -8050,7 +7662,7 @@
           <a:bodyPr wrap="square" lIns="0" tIns="0" rIns="0" bIns="0" rtlCol="0" anchor="t"/>
           <a:lstStyle/>
           <a:p>
-            <a:pPr indent="0" marL="0">
+            <a:pPr marL="0" indent="0">
               <a:buNone/>
             </a:pPr>
             <a:r>
@@ -8089,7 +7701,7 @@
           <a:bodyPr wrap="square" lIns="0" tIns="0" rIns="0" bIns="0" rtlCol="0" anchor="t"/>
           <a:lstStyle/>
           <a:p>
-            <a:pPr indent="0" marL="0">
+            <a:pPr marL="0" indent="0">
               <a:buNone/>
             </a:pPr>
             <a:r>
@@ -8131,17 +7743,24 @@
             <a:prstDash val="solid"/>
           </a:ln>
         </p:spPr>
+        <p:txBody>
+          <a:bodyPr/>
+          <a:lstStyle/>
+          <a:p>
+            <a:endParaRPr lang="en-US"/>
+          </a:p>
+        </p:txBody>
       </p:sp>
       <p:pic>
         <p:nvPicPr>
-          <p:cNvPr id="12" name="Image 1" descr="preencoded.png">    </p:cNvPr>
+          <p:cNvPr id="12" name="Image 1" descr="preencoded.png"/>
           <p:cNvPicPr>
             <a:picLocks noChangeAspect="1"/>
           </p:cNvPicPr>
           <p:nvPr/>
         </p:nvPicPr>
         <p:blipFill>
-          <a:blip r:embed="rId2"/>
+          <a:blip r:embed="rId4"/>
           <a:stretch>
             <a:fillRect/>
           </a:stretch>
@@ -8177,7 +7796,7 @@
           <a:bodyPr wrap="square" lIns="0" tIns="0" rIns="0" bIns="0" rtlCol="0" anchor="t"/>
           <a:lstStyle/>
           <a:p>
-            <a:pPr indent="0" marL="0">
+            <a:pPr marL="0" indent="0">
               <a:buNone/>
             </a:pPr>
             <a:r>
@@ -8216,7 +7835,7 @@
           <a:bodyPr wrap="square" lIns="0" tIns="0" rIns="0" bIns="0" rtlCol="0" anchor="t"/>
           <a:lstStyle/>
           <a:p>
-            <a:pPr indent="0" marL="0">
+            <a:pPr marL="0" indent="0">
               <a:buNone/>
             </a:pPr>
             <a:r>
@@ -8258,17 +7877,24 @@
             <a:prstDash val="solid"/>
           </a:ln>
         </p:spPr>
+        <p:txBody>
+          <a:bodyPr/>
+          <a:lstStyle/>
+          <a:p>
+            <a:endParaRPr lang="en-US"/>
+          </a:p>
+        </p:txBody>
       </p:sp>
       <p:pic>
         <p:nvPicPr>
-          <p:cNvPr id="16" name="Image 2" descr="preencoded.png">    </p:cNvPr>
+          <p:cNvPr id="16" name="Image 2" descr="preencoded.png"/>
           <p:cNvPicPr>
             <a:picLocks noChangeAspect="1"/>
           </p:cNvPicPr>
           <p:nvPr/>
         </p:nvPicPr>
         <p:blipFill>
-          <a:blip r:embed="rId3"/>
+          <a:blip r:embed="rId5"/>
           <a:stretch>
             <a:fillRect/>
           </a:stretch>
@@ -8304,7 +7930,7 @@
           <a:bodyPr wrap="square" lIns="0" tIns="0" rIns="0" bIns="0" rtlCol="0" anchor="t"/>
           <a:lstStyle/>
           <a:p>
-            <a:pPr indent="0" marL="0">
+            <a:pPr marL="0" indent="0">
               <a:buNone/>
             </a:pPr>
             <a:r>
@@ -8343,7 +7969,7 @@
           <a:bodyPr wrap="square" lIns="0" tIns="0" rIns="0" bIns="0" rtlCol="0" anchor="t"/>
           <a:lstStyle/>
           <a:p>
-            <a:pPr indent="0" marL="0">
+            <a:pPr marL="0" indent="0">
               <a:buNone/>
             </a:pPr>
             <a:r>
@@ -8382,11 +8008,11 @@
           <a:bodyPr wrap="square" lIns="0" tIns="0" rIns="0" bIns="0" rtlCol="0" anchor="t"/>
           <a:lstStyle/>
           <a:p>
-            <a:pPr indent="0" marL="0">
-              <a:buNone/>
-            </a:pPr>
-            <a:r>
-              <a:rPr lang="en-US" sz="1100" b="1" spc="100" kern="0" dirty="0">
+            <a:pPr marL="0" indent="0">
+              <a:buNone/>
+            </a:pPr>
+            <a:r>
+              <a:rPr lang="en-US" sz="1100" b="1" kern="0" spc="100" dirty="0">
                 <a:solidFill>
                   <a:srgbClr val="2E5C8F"/>
                 </a:solidFill>
@@ -8527,11 +8153,11 @@
           <a:bodyPr wrap="square" lIns="0" tIns="0" rIns="0" bIns="0" rtlCol="0" anchor="t"/>
           <a:lstStyle/>
           <a:p>
-            <a:pPr indent="0" marL="0">
-              <a:buNone/>
-            </a:pPr>
-            <a:r>
-              <a:rPr lang="en-US" sz="1100" b="1" spc="100" kern="0" dirty="0">
+            <a:pPr marL="0" indent="0">
+              <a:buNone/>
+            </a:pPr>
+            <a:r>
+              <a:rPr lang="en-US" sz="1100" b="1" kern="0" spc="100" dirty="0">
                 <a:solidFill>
                   <a:srgbClr val="5F8FAF"/>
                 </a:solidFill>
@@ -8693,7 +8319,7 @@
           <a:bodyPr wrap="square" lIns="0" tIns="0" rIns="0" bIns="0" rtlCol="0" anchor="ctr"/>
           <a:lstStyle/>
           <a:p>
-            <a:pPr indent="0" marL="0">
+            <a:pPr marL="0" indent="0">
               <a:buNone/>
             </a:pPr>
             <a:r>
@@ -8732,7 +8358,7 @@
           <a:bodyPr wrap="square" lIns="0" tIns="0" rIns="0" bIns="0" rtlCol="0" anchor="ctr"/>
           <a:lstStyle/>
           <a:p>
-            <a:pPr algn="r" indent="0" marL="0">
+            <a:pPr marL="0" indent="0" algn="r">
               <a:buNone/>
             </a:pPr>
             <a:r>
@@ -8766,6 +8392,7 @@
         <a:solidFill>
           <a:srgbClr val="FFFFFF"/>
         </a:solidFill>
+        <a:effectLst/>
       </p:bgPr>
     </p:bg>
     <p:spTree>
@@ -8803,11 +8430,11 @@
           <a:bodyPr wrap="square" lIns="0" tIns="0" rIns="0" bIns="0" rtlCol="0" anchor="ctr"/>
           <a:lstStyle/>
           <a:p>
-            <a:pPr indent="0" marL="0">
-              <a:buNone/>
-            </a:pPr>
-            <a:r>
-              <a:rPr lang="en-US" sz="1100" b="1" spc="100" kern="0" dirty="0">
+            <a:pPr marL="0" indent="0">
+              <a:buNone/>
+            </a:pPr>
+            <a:r>
+              <a:rPr lang="en-US" sz="1100" b="1" kern="0" spc="100" dirty="0">
                 <a:solidFill>
                   <a:srgbClr val="A98B3C"/>
                 </a:solidFill>
@@ -8842,7 +8469,7 @@
           <a:bodyPr wrap="square" lIns="0" tIns="0" rIns="0" bIns="0" rtlCol="0" anchor="ctr"/>
           <a:lstStyle/>
           <a:p>
-            <a:pPr indent="0" marL="0">
+            <a:pPr marL="0" indent="0">
               <a:buNone/>
             </a:pPr>
             <a:r>
@@ -8881,7 +8508,7 @@
           <a:bodyPr wrap="square" lIns="0" tIns="0" rIns="0" bIns="0" rtlCol="0" anchor="ctr"/>
           <a:lstStyle/>
           <a:p>
-            <a:pPr indent="0" marL="0">
+            <a:pPr marL="0" indent="0">
               <a:buNone/>
             </a:pPr>
             <a:r>
@@ -8925,6 +8552,13 @@
             <a:prstDash val="solid"/>
           </a:ln>
         </p:spPr>
+        <p:txBody>
+          <a:bodyPr/>
+          <a:lstStyle/>
+          <a:p>
+            <a:endParaRPr lang="en-US"/>
+          </a:p>
+        </p:txBody>
       </p:sp>
       <p:sp>
         <p:nvSpPr>
@@ -8950,17 +8584,24 @@
             <a:prstDash val="solid"/>
           </a:ln>
         </p:spPr>
+        <p:txBody>
+          <a:bodyPr/>
+          <a:lstStyle/>
+          <a:p>
+            <a:endParaRPr lang="en-US"/>
+          </a:p>
+        </p:txBody>
       </p:sp>
       <p:pic>
         <p:nvPicPr>
-          <p:cNvPr id="7" name="Image 0" descr="preencoded.png">    </p:cNvPr>
+          <p:cNvPr id="7" name="Image 0" descr="preencoded.png"/>
           <p:cNvPicPr>
             <a:picLocks noChangeAspect="1"/>
           </p:cNvPicPr>
           <p:nvPr/>
         </p:nvPicPr>
         <p:blipFill>
-          <a:blip r:embed="rId1"/>
+          <a:blip r:embed="rId3"/>
           <a:stretch>
             <a:fillRect/>
           </a:stretch>
@@ -8996,7 +8637,7 @@
           <a:bodyPr wrap="square" lIns="0" tIns="0" rIns="0" bIns="0" rtlCol="0" anchor="ctr"/>
           <a:lstStyle/>
           <a:p>
-            <a:pPr indent="0" marL="0">
+            <a:pPr marL="0" indent="0">
               <a:buNone/>
             </a:pPr>
             <a:r>
@@ -9035,7 +8676,7 @@
           <a:bodyPr wrap="square" lIns="0" tIns="0" rIns="0" bIns="0" rtlCol="0" anchor="t"/>
           <a:lstStyle/>
           <a:p>
-            <a:pPr indent="0" marL="0">
+            <a:pPr marL="0" indent="0">
               <a:buNone/>
             </a:pPr>
             <a:r>
@@ -9055,14 +8696,14 @@
       </p:sp>
       <p:pic>
         <p:nvPicPr>
-          <p:cNvPr id="10" name="Image 1" descr="preencoded.png">    </p:cNvPr>
+          <p:cNvPr id="10" name="Image 1" descr="preencoded.png"/>
           <p:cNvPicPr>
             <a:picLocks noChangeAspect="1"/>
           </p:cNvPicPr>
           <p:nvPr/>
         </p:nvPicPr>
         <p:blipFill>
-          <a:blip r:embed="rId2"/>
+          <a:blip r:embed="rId4"/>
           <a:stretch>
             <a:fillRect/>
           </a:stretch>
@@ -9103,6 +8744,13 @@
             <a:prstDash val="solid"/>
           </a:ln>
         </p:spPr>
+        <p:txBody>
+          <a:bodyPr/>
+          <a:lstStyle/>
+          <a:p>
+            <a:endParaRPr lang="en-US"/>
+          </a:p>
+        </p:txBody>
       </p:sp>
       <p:sp>
         <p:nvSpPr>
@@ -9128,17 +8776,24 @@
             <a:prstDash val="solid"/>
           </a:ln>
         </p:spPr>
+        <p:txBody>
+          <a:bodyPr/>
+          <a:lstStyle/>
+          <a:p>
+            <a:endParaRPr lang="en-US"/>
+          </a:p>
+        </p:txBody>
       </p:sp>
       <p:pic>
         <p:nvPicPr>
-          <p:cNvPr id="13" name="Image 2" descr="preencoded.png">    </p:cNvPr>
+          <p:cNvPr id="13" name="Image 2" descr="preencoded.png"/>
           <p:cNvPicPr>
             <a:picLocks noChangeAspect="1"/>
           </p:cNvPicPr>
           <p:nvPr/>
         </p:nvPicPr>
         <p:blipFill>
-          <a:blip r:embed="rId3"/>
+          <a:blip r:embed="rId5"/>
           <a:stretch>
             <a:fillRect/>
           </a:stretch>
@@ -9174,7 +8829,7 @@
           <a:bodyPr wrap="square" lIns="0" tIns="0" rIns="0" bIns="0" rtlCol="0" anchor="ctr"/>
           <a:lstStyle/>
           <a:p>
-            <a:pPr indent="0" marL="0">
+            <a:pPr marL="0" indent="0">
               <a:buNone/>
             </a:pPr>
             <a:r>
@@ -9213,7 +8868,7 @@
           <a:bodyPr wrap="square" lIns="0" tIns="0" rIns="0" bIns="0" rtlCol="0" anchor="t"/>
           <a:lstStyle/>
           <a:p>
-            <a:pPr indent="0" marL="0">
+            <a:pPr marL="0" indent="0">
               <a:buNone/>
             </a:pPr>
             <a:r>
@@ -9230,7 +8885,7 @@
             <a:endParaRPr lang="en-US" sz="1350" dirty="0"/>
           </a:p>
           <a:p>
-            <a:pPr indent="0" marL="0">
+            <a:pPr marL="0" indent="0">
               <a:buNone/>
             </a:pPr>
             <a:r>
@@ -9250,7 +8905,7 @@
       </p:sp>
       <p:pic>
         <p:nvPicPr>
-          <p:cNvPr id="16" name="Image 3" descr="preencoded.png">    </p:cNvPr>
+          <p:cNvPr id="16" name="Image 3" descr="preencoded.png"/>
           <p:cNvPicPr>
             <a:picLocks noChangeAspect="1"/>
           </p:cNvPicPr>
@@ -9298,6 +8953,13 @@
             <a:prstDash val="solid"/>
           </a:ln>
         </p:spPr>
+        <p:txBody>
+          <a:bodyPr/>
+          <a:lstStyle/>
+          <a:p>
+            <a:endParaRPr lang="en-US"/>
+          </a:p>
+        </p:txBody>
       </p:sp>
       <p:sp>
         <p:nvSpPr>
@@ -9323,17 +8985,24 @@
             <a:prstDash val="solid"/>
           </a:ln>
         </p:spPr>
+        <p:txBody>
+          <a:bodyPr/>
+          <a:lstStyle/>
+          <a:p>
+            <a:endParaRPr lang="en-US"/>
+          </a:p>
+        </p:txBody>
       </p:sp>
       <p:pic>
         <p:nvPicPr>
-          <p:cNvPr id="19" name="Image 4" descr="preencoded.png">    </p:cNvPr>
+          <p:cNvPr id="19" name="Image 4" descr="preencoded.png"/>
           <p:cNvPicPr>
             <a:picLocks noChangeAspect="1"/>
           </p:cNvPicPr>
           <p:nvPr/>
         </p:nvPicPr>
         <p:blipFill>
-          <a:blip r:embed="rId5"/>
+          <a:blip r:embed="rId6"/>
           <a:stretch>
             <a:fillRect/>
           </a:stretch>
@@ -9369,7 +9038,7 @@
           <a:bodyPr wrap="square" lIns="0" tIns="0" rIns="0" bIns="0" rtlCol="0" anchor="ctr"/>
           <a:lstStyle/>
           <a:p>
-            <a:pPr indent="0" marL="0">
+            <a:pPr marL="0" indent="0">
               <a:buNone/>
             </a:pPr>
             <a:r>
@@ -9408,7 +9077,7 @@
           <a:bodyPr wrap="square" lIns="0" tIns="0" rIns="0" bIns="0" rtlCol="0" anchor="t"/>
           <a:lstStyle/>
           <a:p>
-            <a:pPr indent="0" marL="0">
+            <a:pPr marL="0" indent="0">
               <a:buNone/>
             </a:pPr>
             <a:r>
@@ -9425,7 +9094,7 @@
             <a:endParaRPr lang="en-US" sz="1350" dirty="0"/>
           </a:p>
           <a:p>
-            <a:pPr indent="0" marL="0">
+            <a:pPr marL="0" indent="0">
               <a:buNone/>
             </a:pPr>
             <a:r>
@@ -9464,7 +9133,7 @@
           <a:bodyPr wrap="square" lIns="0" tIns="0" rIns="0" bIns="0" rtlCol="0" anchor="ctr"/>
           <a:lstStyle/>
           <a:p>
-            <a:pPr indent="0" marL="0">
+            <a:pPr marL="0" indent="0">
               <a:buNone/>
             </a:pPr>
             <a:r>
@@ -9503,7 +9172,7 @@
           <a:bodyPr wrap="square" lIns="0" tIns="0" rIns="0" bIns="0" rtlCol="0" anchor="t"/>
           <a:lstStyle/>
           <a:p>
-            <a:pPr indent="0" marL="0">
+            <a:pPr marL="0" indent="0">
               <a:buNone/>
             </a:pPr>
             <a:r>
@@ -9542,7 +9211,7 @@
           <a:bodyPr wrap="square" lIns="0" tIns="0" rIns="0" bIns="0" rtlCol="0" anchor="ctr"/>
           <a:lstStyle/>
           <a:p>
-            <a:pPr indent="0" marL="0">
+            <a:pPr marL="0" indent="0">
               <a:buNone/>
             </a:pPr>
             <a:r>
@@ -9581,7 +9250,7 @@
           <a:bodyPr wrap="square" lIns="0" tIns="0" rIns="0" bIns="0" rtlCol="0" anchor="t"/>
           <a:lstStyle/>
           <a:p>
-            <a:pPr indent="0" marL="0">
+            <a:pPr marL="0" indent="0">
               <a:buNone/>
             </a:pPr>
             <a:r>
@@ -9620,7 +9289,7 @@
           <a:bodyPr wrap="square" lIns="0" tIns="0" rIns="0" bIns="0" rtlCol="0" anchor="ctr"/>
           <a:lstStyle/>
           <a:p>
-            <a:pPr indent="0" marL="0">
+            <a:pPr marL="0" indent="0">
               <a:buNone/>
             </a:pPr>
             <a:r>
@@ -9659,7 +9328,7 @@
           <a:bodyPr wrap="square" lIns="0" tIns="0" rIns="0" bIns="0" rtlCol="0" anchor="t"/>
           <a:lstStyle/>
           <a:p>
-            <a:pPr indent="0" marL="0">
+            <a:pPr marL="0" indent="0">
               <a:buNone/>
             </a:pPr>
             <a:r>
@@ -9698,7 +9367,7 @@
           <a:bodyPr wrap="square" lIns="0" tIns="0" rIns="0" bIns="0" rtlCol="0" anchor="ctr"/>
           <a:lstStyle/>
           <a:p>
-            <a:pPr indent="0" marL="0">
+            <a:pPr marL="0" indent="0">
               <a:buNone/>
             </a:pPr>
             <a:r>
@@ -9737,7 +9406,7 @@
           <a:bodyPr wrap="square" lIns="0" tIns="0" rIns="0" bIns="0" rtlCol="0" anchor="t"/>
           <a:lstStyle/>
           <a:p>
-            <a:pPr indent="0" marL="0">
+            <a:pPr marL="0" indent="0">
               <a:buNone/>
             </a:pPr>
             <a:r>
@@ -9776,7 +9445,7 @@
           <a:bodyPr wrap="square" lIns="0" tIns="0" rIns="0" bIns="0" rtlCol="0" anchor="ctr"/>
           <a:lstStyle/>
           <a:p>
-            <a:pPr indent="0" marL="0">
+            <a:pPr marL="0" indent="0">
               <a:buNone/>
             </a:pPr>
             <a:r>
@@ -9815,7 +9484,7 @@
           <a:bodyPr wrap="square" lIns="0" tIns="0" rIns="0" bIns="0" rtlCol="0" anchor="ctr"/>
           <a:lstStyle/>
           <a:p>
-            <a:pPr algn="r" indent="0" marL="0">
+            <a:pPr marL="0" indent="0" algn="r">
               <a:buNone/>
             </a:pPr>
             <a:r>
@@ -9849,6 +9518,7 @@
         <a:solidFill>
           <a:srgbClr val="FFFFFF"/>
         </a:solidFill>
+        <a:effectLst/>
       </p:bgPr>
     </p:bg>
     <p:spTree>
@@ -9886,11 +9556,11 @@
           <a:bodyPr wrap="square" lIns="0" tIns="0" rIns="0" bIns="0" rtlCol="0" anchor="ctr"/>
           <a:lstStyle/>
           <a:p>
-            <a:pPr indent="0" marL="0">
-              <a:buNone/>
-            </a:pPr>
-            <a:r>
-              <a:rPr lang="en-US" sz="1100" b="1" spc="100" kern="0" dirty="0">
+            <a:pPr marL="0" indent="0">
+              <a:buNone/>
+            </a:pPr>
+            <a:r>
+              <a:rPr lang="en-US" sz="1100" b="1" kern="0" spc="100" dirty="0">
                 <a:solidFill>
                   <a:srgbClr val="A98B3C"/>
                 </a:solidFill>
@@ -9925,7 +9595,7 @@
           <a:bodyPr wrap="square" lIns="0" tIns="0" rIns="0" bIns="0" rtlCol="0" anchor="ctr"/>
           <a:lstStyle/>
           <a:p>
-            <a:pPr indent="0" marL="0">
+            <a:pPr marL="0" indent="0">
               <a:buNone/>
             </a:pPr>
             <a:r>
@@ -9964,7 +9634,7 @@
           <a:bodyPr wrap="square" lIns="0" tIns="0" rIns="0" bIns="0" rtlCol="0" anchor="ctr"/>
           <a:lstStyle/>
           <a:p>
-            <a:pPr indent="0" marL="0">
+            <a:pPr marL="0" indent="0">
               <a:buNone/>
             </a:pPr>
             <a:r>
@@ -10008,6 +9678,13 @@
             <a:prstDash val="solid"/>
           </a:ln>
         </p:spPr>
+        <p:txBody>
+          <a:bodyPr/>
+          <a:lstStyle/>
+          <a:p>
+            <a:endParaRPr lang="en-US"/>
+          </a:p>
+        </p:txBody>
       </p:sp>
       <p:sp>
         <p:nvSpPr>
@@ -10030,11 +9707,11 @@
           <a:bodyPr wrap="square" lIns="0" tIns="0" rIns="0" bIns="0" rtlCol="0" anchor="t"/>
           <a:lstStyle/>
           <a:p>
-            <a:pPr indent="0" marL="0">
-              <a:buNone/>
-            </a:pPr>
-            <a:r>
-              <a:rPr lang="en-US" sz="1100" b="1" spc="100" kern="0" dirty="0">
+            <a:pPr marL="0" indent="0">
+              <a:buNone/>
+            </a:pPr>
+            <a:r>
+              <a:rPr lang="en-US" sz="1100" b="1" kern="0" spc="100" dirty="0">
                 <a:solidFill>
                   <a:srgbClr val="A98B3C"/>
                 </a:solidFill>
@@ -10069,7 +9746,7 @@
           <a:bodyPr wrap="square" lIns="0" tIns="0" rIns="0" bIns="0" rtlCol="0" anchor="t"/>
           <a:lstStyle/>
           <a:p>
-            <a:pPr indent="0" marL="0">
+            <a:pPr marL="0" indent="0">
               <a:buNone/>
             </a:pPr>
             <a:r>
@@ -10108,7 +9785,7 @@
           <a:bodyPr wrap="square" lIns="0" tIns="0" rIns="0" bIns="0" rtlCol="0" anchor="ctr"/>
           <a:lstStyle/>
           <a:p>
-            <a:pPr indent="0" marL="0">
+            <a:pPr marL="0" indent="0">
               <a:buNone/>
             </a:pPr>
             <a:r>
@@ -10147,7 +9824,7 @@
           <a:bodyPr wrap="square" lIns="0" tIns="0" rIns="0" bIns="0" rtlCol="0" anchor="t"/>
           <a:lstStyle/>
           <a:p>
-            <a:pPr indent="0" marL="0">
+            <a:pPr marL="0" indent="0">
               <a:buNone/>
             </a:pPr>
             <a:r>
@@ -10186,7 +9863,7 @@
           <a:bodyPr wrap="square" lIns="0" tIns="0" rIns="0" bIns="0" rtlCol="0" anchor="t"/>
           <a:lstStyle/>
           <a:p>
-            <a:pPr indent="0" marL="0">
+            <a:pPr marL="0" indent="0">
               <a:buNone/>
             </a:pPr>
             <a:r>
@@ -10200,9 +9877,6 @@
               </a:rPr>
               <a:t>e.g. </a:t>
             </a:r>
-            <a:pPr indent="0" marL="0">
-              <a:buNone/>
-            </a:pPr>
             <a:r>
               <a:rPr lang="en-US" sz="1250" i="1" dirty="0">
                 <a:solidFill>
@@ -10244,6 +9918,13 @@
             <a:prstDash val="solid"/>
           </a:ln>
         </p:spPr>
+        <p:txBody>
+          <a:bodyPr/>
+          <a:lstStyle/>
+          <a:p>
+            <a:endParaRPr lang="en-US"/>
+          </a:p>
+        </p:txBody>
       </p:sp>
       <p:sp>
         <p:nvSpPr>
@@ -10266,11 +9947,11 @@
           <a:bodyPr wrap="square" lIns="0" tIns="0" rIns="0" bIns="0" rtlCol="0" anchor="t"/>
           <a:lstStyle/>
           <a:p>
-            <a:pPr indent="0" marL="0">
-              <a:buNone/>
-            </a:pPr>
-            <a:r>
-              <a:rPr lang="en-US" sz="1100" b="1" spc="100" kern="0" dirty="0">
+            <a:pPr marL="0" indent="0">
+              <a:buNone/>
+            </a:pPr>
+            <a:r>
+              <a:rPr lang="en-US" sz="1100" b="1" kern="0" spc="100" dirty="0">
                 <a:solidFill>
                   <a:srgbClr val="A98B3C"/>
                 </a:solidFill>
@@ -10305,7 +9986,7 @@
           <a:bodyPr wrap="square" lIns="0" tIns="0" rIns="0" bIns="0" rtlCol="0" anchor="t"/>
           <a:lstStyle/>
           <a:p>
-            <a:pPr indent="0" marL="0">
+            <a:pPr marL="0" indent="0">
               <a:buNone/>
             </a:pPr>
             <a:r>
@@ -10344,7 +10025,7 @@
           <a:bodyPr wrap="square" lIns="0" tIns="0" rIns="0" bIns="0" rtlCol="0" anchor="ctr"/>
           <a:lstStyle/>
           <a:p>
-            <a:pPr indent="0" marL="0">
+            <a:pPr marL="0" indent="0">
               <a:buNone/>
             </a:pPr>
             <a:r>
@@ -10383,7 +10064,7 @@
           <a:bodyPr wrap="square" lIns="0" tIns="0" rIns="0" bIns="0" rtlCol="0" anchor="t"/>
           <a:lstStyle/>
           <a:p>
-            <a:pPr indent="0" marL="0">
+            <a:pPr marL="0" indent="0">
               <a:buNone/>
             </a:pPr>
             <a:r>
@@ -10422,7 +10103,7 @@
           <a:bodyPr wrap="square" lIns="0" tIns="0" rIns="0" bIns="0" rtlCol="0" anchor="t"/>
           <a:lstStyle/>
           <a:p>
-            <a:pPr indent="0" marL="0">
+            <a:pPr marL="0" indent="0">
               <a:buNone/>
             </a:pPr>
             <a:r>
@@ -10436,9 +10117,6 @@
               </a:rPr>
               <a:t>e.g. </a:t>
             </a:r>
-            <a:pPr indent="0" marL="0">
-              <a:buNone/>
-            </a:pPr>
             <a:r>
               <a:rPr lang="en-US" sz="1250" i="1" dirty="0">
                 <a:solidFill>
@@ -10480,6 +10158,13 @@
             <a:prstDash val="solid"/>
           </a:ln>
         </p:spPr>
+        <p:txBody>
+          <a:bodyPr/>
+          <a:lstStyle/>
+          <a:p>
+            <a:endParaRPr lang="en-US"/>
+          </a:p>
+        </p:txBody>
       </p:sp>
       <p:sp>
         <p:nvSpPr>
@@ -10502,11 +10187,11 @@
           <a:bodyPr wrap="square" lIns="0" tIns="0" rIns="0" bIns="0" rtlCol="0" anchor="t"/>
           <a:lstStyle/>
           <a:p>
-            <a:pPr indent="0" marL="0">
-              <a:buNone/>
-            </a:pPr>
-            <a:r>
-              <a:rPr lang="en-US" sz="1100" b="1" spc="100" kern="0" dirty="0">
+            <a:pPr marL="0" indent="0">
+              <a:buNone/>
+            </a:pPr>
+            <a:r>
+              <a:rPr lang="en-US" sz="1100" b="1" kern="0" spc="100" dirty="0">
                 <a:solidFill>
                   <a:srgbClr val="A98B3C"/>
                 </a:solidFill>
@@ -10541,7 +10226,7 @@
           <a:bodyPr wrap="square" lIns="0" tIns="0" rIns="0" bIns="0" rtlCol="0" anchor="t"/>
           <a:lstStyle/>
           <a:p>
-            <a:pPr indent="0" marL="0">
+            <a:pPr marL="0" indent="0">
               <a:buNone/>
             </a:pPr>
             <a:r>
@@ -10580,7 +10265,7 @@
           <a:bodyPr wrap="square" lIns="0" tIns="0" rIns="0" bIns="0" rtlCol="0" anchor="ctr"/>
           <a:lstStyle/>
           <a:p>
-            <a:pPr indent="0" marL="0">
+            <a:pPr marL="0" indent="0">
               <a:buNone/>
             </a:pPr>
             <a:r>
@@ -10619,7 +10304,7 @@
           <a:bodyPr wrap="square" lIns="0" tIns="0" rIns="0" bIns="0" rtlCol="0" anchor="t"/>
           <a:lstStyle/>
           <a:p>
-            <a:pPr indent="0" marL="0">
+            <a:pPr marL="0" indent="0">
               <a:buNone/>
             </a:pPr>
             <a:r>
@@ -10658,7 +10343,7 @@
           <a:bodyPr wrap="square" lIns="0" tIns="0" rIns="0" bIns="0" rtlCol="0" anchor="t"/>
           <a:lstStyle/>
           <a:p>
-            <a:pPr indent="0" marL="0">
+            <a:pPr marL="0" indent="0">
               <a:buNone/>
             </a:pPr>
             <a:r>
@@ -10672,9 +10357,6 @@
               </a:rPr>
               <a:t>e.g. </a:t>
             </a:r>
-            <a:pPr indent="0" marL="0">
-              <a:buNone/>
-            </a:pPr>
             <a:r>
               <a:rPr lang="en-US" sz="1250" i="1" dirty="0">
                 <a:solidFill>
@@ -10716,6 +10398,13 @@
             <a:prstDash val="solid"/>
           </a:ln>
         </p:spPr>
+        <p:txBody>
+          <a:bodyPr/>
+          <a:lstStyle/>
+          <a:p>
+            <a:endParaRPr lang="en-US"/>
+          </a:p>
+        </p:txBody>
       </p:sp>
       <p:sp>
         <p:nvSpPr>
@@ -10738,11 +10427,11 @@
           <a:bodyPr wrap="square" lIns="0" tIns="0" rIns="0" bIns="0" rtlCol="0" anchor="t"/>
           <a:lstStyle/>
           <a:p>
-            <a:pPr indent="0" marL="0">
-              <a:buNone/>
-            </a:pPr>
-            <a:r>
-              <a:rPr lang="en-US" sz="1100" b="1" spc="100" kern="0" dirty="0">
+            <a:pPr marL="0" indent="0">
+              <a:buNone/>
+            </a:pPr>
+            <a:r>
+              <a:rPr lang="en-US" sz="1100" b="1" kern="0" spc="100" dirty="0">
                 <a:solidFill>
                   <a:srgbClr val="A98B3C"/>
                 </a:solidFill>
@@ -10777,7 +10466,7 @@
           <a:bodyPr wrap="square" lIns="0" tIns="0" rIns="0" bIns="0" rtlCol="0" anchor="t"/>
           <a:lstStyle/>
           <a:p>
-            <a:pPr indent="0" marL="0">
+            <a:pPr marL="0" indent="0">
               <a:buNone/>
             </a:pPr>
             <a:r>
@@ -10816,7 +10505,7 @@
           <a:bodyPr wrap="square" lIns="0" tIns="0" rIns="0" bIns="0" rtlCol="0" anchor="ctr"/>
           <a:lstStyle/>
           <a:p>
-            <a:pPr indent="0" marL="0">
+            <a:pPr marL="0" indent="0">
               <a:buNone/>
             </a:pPr>
             <a:r>
@@ -10855,7 +10544,7 @@
           <a:bodyPr wrap="square" lIns="0" tIns="0" rIns="0" bIns="0" rtlCol="0" anchor="t"/>
           <a:lstStyle/>
           <a:p>
-            <a:pPr indent="0" marL="0">
+            <a:pPr marL="0" indent="0">
               <a:buNone/>
             </a:pPr>
             <a:r>
@@ -10894,7 +10583,7 @@
           <a:bodyPr wrap="square" lIns="0" tIns="0" rIns="0" bIns="0" rtlCol="0" anchor="t"/>
           <a:lstStyle/>
           <a:p>
-            <a:pPr indent="0" marL="0">
+            <a:pPr marL="0" indent="0">
               <a:buNone/>
             </a:pPr>
             <a:r>
@@ -10908,9 +10597,6 @@
               </a:rPr>
               <a:t>e.g. </a:t>
             </a:r>
-            <a:pPr indent="0" marL="0">
-              <a:buNone/>
-            </a:pPr>
             <a:r>
               <a:rPr lang="en-US" sz="1250" i="1" dirty="0">
                 <a:solidFill>
@@ -10947,7 +10633,7 @@
           <a:bodyPr wrap="square" lIns="0" tIns="0" rIns="0" bIns="0" rtlCol="0" anchor="ctr"/>
           <a:lstStyle/>
           <a:p>
-            <a:pPr indent="0" marL="0">
+            <a:pPr marL="0" indent="0">
               <a:buNone/>
             </a:pPr>
             <a:r>
@@ -10986,7 +10672,7 @@
           <a:bodyPr wrap="square" lIns="0" tIns="0" rIns="0" bIns="0" rtlCol="0" anchor="ctr"/>
           <a:lstStyle/>
           <a:p>
-            <a:pPr algn="r" indent="0" marL="0">
+            <a:pPr marL="0" indent="0" algn="r">
               <a:buNone/>
             </a:pPr>
             <a:r>
@@ -11020,6 +10706,7 @@
         <a:solidFill>
           <a:srgbClr val="FFFFFF"/>
         </a:solidFill>
+        <a:effectLst/>
       </p:bgPr>
     </p:bg>
     <p:spTree>
@@ -11057,11 +10744,11 @@
           <a:bodyPr wrap="square" lIns="0" tIns="0" rIns="0" bIns="0" rtlCol="0" anchor="ctr"/>
           <a:lstStyle/>
           <a:p>
-            <a:pPr indent="0" marL="0">
-              <a:buNone/>
-            </a:pPr>
-            <a:r>
-              <a:rPr lang="en-US" sz="1100" b="1" spc="100" kern="0" dirty="0">
+            <a:pPr marL="0" indent="0">
+              <a:buNone/>
+            </a:pPr>
+            <a:r>
+              <a:rPr lang="en-US" sz="1100" b="1" kern="0" spc="100" dirty="0">
                 <a:solidFill>
                   <a:srgbClr val="A98B3C"/>
                 </a:solidFill>
@@ -11096,7 +10783,7 @@
           <a:bodyPr wrap="square" lIns="0" tIns="0" rIns="0" bIns="0" rtlCol="0" anchor="ctr"/>
           <a:lstStyle/>
           <a:p>
-            <a:pPr indent="0" marL="0">
+            <a:pPr marL="0" indent="0">
               <a:buNone/>
             </a:pPr>
             <a:r>
@@ -11135,7 +10822,7 @@
           <a:bodyPr wrap="square" lIns="0" tIns="0" rIns="0" bIns="0" rtlCol="0" anchor="ctr"/>
           <a:lstStyle/>
           <a:p>
-            <a:pPr indent="0" marL="0">
+            <a:pPr marL="0" indent="0">
               <a:buNone/>
             </a:pPr>
             <a:r>
@@ -11174,11 +10861,11 @@
           <a:bodyPr wrap="square" lIns="0" tIns="0" rIns="0" bIns="0" rtlCol="0" anchor="t"/>
           <a:lstStyle/>
           <a:p>
-            <a:pPr indent="0" marL="0">
-              <a:buNone/>
-            </a:pPr>
-            <a:r>
-              <a:rPr lang="en-US" sz="1100" b="1" spc="100" kern="0" dirty="0">
+            <a:pPr marL="0" indent="0">
+              <a:buNone/>
+            </a:pPr>
+            <a:r>
+              <a:rPr lang="en-US" sz="1100" b="1" kern="0" spc="100" dirty="0">
                 <a:solidFill>
                   <a:srgbClr val="A98B3C"/>
                 </a:solidFill>
@@ -11215,7 +10902,7 @@
           <a:bodyPr wrap="square" lIns="1905" tIns="1905" rIns="1905" bIns="1905" rtlCol="0" anchor="ctr"/>
           <a:lstStyle/>
           <a:p>
-            <a:pPr indent="0" marL="0">
+            <a:pPr marL="0" indent="0">
               <a:buNone/>
             </a:pPr>
             <a:r>
@@ -11232,7 +10919,7 @@
             <a:endParaRPr lang="en-US" sz="1300" dirty="0"/>
           </a:p>
           <a:p>
-            <a:pPr indent="0" marL="0">
+            <a:pPr marL="0" indent="0">
               <a:buNone/>
             </a:pPr>
             <a:r>
@@ -11276,6 +10963,13 @@
             <a:prstDash val="solid"/>
           </a:ln>
         </p:spPr>
+        <p:txBody>
+          <a:bodyPr/>
+          <a:lstStyle/>
+          <a:p>
+            <a:endParaRPr lang="en-US"/>
+          </a:p>
+        </p:txBody>
       </p:sp>
       <p:sp>
         <p:nvSpPr>
@@ -11298,7 +10992,7 @@
           <a:bodyPr wrap="square" lIns="0" tIns="0" rIns="0" bIns="0" rtlCol="0" anchor="ctr"/>
           <a:lstStyle/>
           <a:p>
-            <a:pPr algn="ctr" indent="0" marL="0">
+            <a:pPr marL="0" indent="0" algn="ctr">
               <a:buNone/>
             </a:pPr>
             <a:r>
@@ -11315,7 +11009,7 @@
             <a:endParaRPr lang="en-US" sz="1250" dirty="0"/>
           </a:p>
           <a:p>
-            <a:pPr algn="ctr" indent="0" marL="0">
+            <a:pPr marL="0" indent="0" algn="ctr">
               <a:buNone/>
             </a:pPr>
             <a:r>
@@ -11355,6 +11049,13 @@
             <a:prstDash val="solid"/>
           </a:ln>
         </p:spPr>
+        <p:txBody>
+          <a:bodyPr/>
+          <a:lstStyle/>
+          <a:p>
+            <a:endParaRPr lang="en-US"/>
+          </a:p>
+        </p:txBody>
       </p:sp>
       <p:sp>
         <p:nvSpPr>
@@ -11382,6 +11083,13 @@
             <a:prstDash val="solid"/>
           </a:ln>
         </p:spPr>
+        <p:txBody>
+          <a:bodyPr/>
+          <a:lstStyle/>
+          <a:p>
+            <a:endParaRPr lang="en-US"/>
+          </a:p>
+        </p:txBody>
       </p:sp>
       <p:sp>
         <p:nvSpPr>
@@ -11404,7 +11112,7 @@
           <a:bodyPr wrap="square" lIns="0" tIns="0" rIns="0" bIns="0" rtlCol="0" anchor="ctr"/>
           <a:lstStyle/>
           <a:p>
-            <a:pPr algn="ctr" indent="0" marL="0">
+            <a:pPr marL="0" indent="0" algn="ctr">
               <a:buNone/>
             </a:pPr>
             <a:r>
@@ -11421,7 +11129,7 @@
             <a:endParaRPr lang="en-US" sz="1300" dirty="0"/>
           </a:p>
           <a:p>
-            <a:pPr algn="ctr" indent="0" marL="0">
+            <a:pPr marL="0" indent="0" algn="ctr">
               <a:buNone/>
             </a:pPr>
             <a:r>
@@ -11461,6 +11169,13 @@
             <a:prstDash val="solid"/>
           </a:ln>
         </p:spPr>
+        <p:txBody>
+          <a:bodyPr/>
+          <a:lstStyle/>
+          <a:p>
+            <a:endParaRPr lang="en-US"/>
+          </a:p>
+        </p:txBody>
       </p:sp>
       <p:sp>
         <p:nvSpPr>
@@ -11488,6 +11203,13 @@
             <a:prstDash val="solid"/>
           </a:ln>
         </p:spPr>
+        <p:txBody>
+          <a:bodyPr/>
+          <a:lstStyle/>
+          <a:p>
+            <a:endParaRPr lang="en-US"/>
+          </a:p>
+        </p:txBody>
       </p:sp>
       <p:sp>
         <p:nvSpPr>
@@ -11510,7 +11232,7 @@
           <a:bodyPr wrap="square" lIns="0" tIns="0" rIns="0" bIns="0" rtlCol="0" anchor="ctr"/>
           <a:lstStyle/>
           <a:p>
-            <a:pPr algn="ctr" indent="0" marL="0">
+            <a:pPr marL="0" indent="0" algn="ctr">
               <a:buNone/>
             </a:pPr>
             <a:r>
@@ -11527,7 +11249,7 @@
             <a:endParaRPr lang="en-US" sz="1300" dirty="0"/>
           </a:p>
           <a:p>
-            <a:pPr algn="ctr" indent="0" marL="0">
+            <a:pPr marL="0" indent="0" algn="ctr">
               <a:buNone/>
             </a:pPr>
             <a:r>
@@ -11567,6 +11289,13 @@
             <a:prstDash val="solid"/>
           </a:ln>
         </p:spPr>
+        <p:txBody>
+          <a:bodyPr/>
+          <a:lstStyle/>
+          <a:p>
+            <a:endParaRPr lang="en-US"/>
+          </a:p>
+        </p:txBody>
       </p:sp>
       <p:sp>
         <p:nvSpPr>
@@ -11594,6 +11323,13 @@
             <a:prstDash val="solid"/>
           </a:ln>
         </p:spPr>
+        <p:txBody>
+          <a:bodyPr/>
+          <a:lstStyle/>
+          <a:p>
+            <a:endParaRPr lang="en-US"/>
+          </a:p>
+        </p:txBody>
       </p:sp>
       <p:sp>
         <p:nvSpPr>
@@ -11616,7 +11352,7 @@
           <a:bodyPr wrap="square" lIns="0" tIns="0" rIns="0" bIns="0" rtlCol="0" anchor="ctr"/>
           <a:lstStyle/>
           <a:p>
-            <a:pPr algn="ctr" indent="0" marL="0">
+            <a:pPr marL="0" indent="0" algn="ctr">
               <a:buNone/>
             </a:pPr>
             <a:r>
@@ -11633,7 +11369,7 @@
             <a:endParaRPr lang="en-US" sz="1300" dirty="0"/>
           </a:p>
           <a:p>
-            <a:pPr algn="ctr" indent="0" marL="0">
+            <a:pPr marL="0" indent="0" algn="ctr">
               <a:buNone/>
             </a:pPr>
             <a:r>
@@ -11673,6 +11409,13 @@
             <a:prstDash val="solid"/>
           </a:ln>
         </p:spPr>
+        <p:txBody>
+          <a:bodyPr/>
+          <a:lstStyle/>
+          <a:p>
+            <a:endParaRPr lang="en-US"/>
+          </a:p>
+        </p:txBody>
       </p:sp>
       <p:sp>
         <p:nvSpPr>
@@ -11700,6 +11443,13 @@
             <a:prstDash val="solid"/>
           </a:ln>
         </p:spPr>
+        <p:txBody>
+          <a:bodyPr/>
+          <a:lstStyle/>
+          <a:p>
+            <a:endParaRPr lang="en-US"/>
+          </a:p>
+        </p:txBody>
       </p:sp>
       <p:sp>
         <p:nvSpPr>
@@ -11722,7 +11472,7 @@
           <a:bodyPr wrap="square" lIns="0" tIns="0" rIns="0" bIns="0" rtlCol="0" anchor="ctr"/>
           <a:lstStyle/>
           <a:p>
-            <a:pPr algn="ctr" indent="0" marL="0">
+            <a:pPr marL="0" indent="0" algn="ctr">
               <a:buNone/>
             </a:pPr>
             <a:r>
@@ -11739,7 +11489,7 @@
             <a:endParaRPr lang="en-US" sz="1300" dirty="0"/>
           </a:p>
           <a:p>
-            <a:pPr algn="ctr" indent="0" marL="0">
+            <a:pPr marL="0" indent="0" algn="ctr">
               <a:buNone/>
             </a:pPr>
             <a:r>
@@ -11783,6 +11533,13 @@
             <a:prstDash val="solid"/>
           </a:ln>
         </p:spPr>
+        <p:txBody>
+          <a:bodyPr/>
+          <a:lstStyle/>
+          <a:p>
+            <a:endParaRPr lang="en-US"/>
+          </a:p>
+        </p:txBody>
       </p:sp>
       <p:sp>
         <p:nvSpPr>
@@ -11805,11 +11562,11 @@
           <a:bodyPr wrap="square" lIns="0" tIns="0" rIns="0" bIns="0" rtlCol="0" anchor="t"/>
           <a:lstStyle/>
           <a:p>
-            <a:pPr indent="0" marL="0">
-              <a:buNone/>
-            </a:pPr>
-            <a:r>
-              <a:rPr lang="en-US" sz="1100" b="1" spc="100" kern="0" dirty="0">
+            <a:pPr marL="0" indent="0">
+              <a:buNone/>
+            </a:pPr>
+            <a:r>
+              <a:rPr lang="en-US" sz="1100" b="1" kern="0" spc="100" dirty="0">
                 <a:solidFill>
                   <a:srgbClr val="727885"/>
                 </a:solidFill>
@@ -11850,7 +11607,7 @@
               </a:spcAft>
               <a:buSzPct val="100000"/>
               <a:buFont typeface="+mj-lt"/>
-              <a:buAutoNum type="arabicPeriod" startAt="1"/>
+              <a:buAutoNum type="arabicPeriod"/>
             </a:pPr>
             <a:r>
               <a:rPr lang="en-US" sz="1300" dirty="0">
@@ -11872,7 +11629,7 @@
               </a:spcAft>
               <a:buSzPct val="100000"/>
               <a:buFont typeface="+mj-lt"/>
-              <a:buAutoNum type="arabicPeriod" startAt="1"/>
+              <a:buAutoNum type="arabicPeriod"/>
             </a:pPr>
             <a:r>
               <a:rPr lang="en-US" sz="1300" dirty="0">
@@ -11894,7 +11651,7 @@
               </a:spcAft>
               <a:buSzPct val="100000"/>
               <a:buFont typeface="+mj-lt"/>
-              <a:buAutoNum type="arabicPeriod" startAt="1"/>
+              <a:buAutoNum type="arabicPeriod"/>
             </a:pPr>
             <a:r>
               <a:rPr lang="en-US" sz="1300" dirty="0">
@@ -11916,7 +11673,7 @@
               </a:spcAft>
               <a:buSzPct val="100000"/>
               <a:buFont typeface="+mj-lt"/>
-              <a:buAutoNum type="arabicPeriod" startAt="1"/>
+              <a:buAutoNum type="arabicPeriod"/>
             </a:pPr>
             <a:r>
               <a:rPr lang="en-US" sz="1300" dirty="0">
@@ -11938,7 +11695,7 @@
               </a:spcAft>
               <a:buSzPct val="100000"/>
               <a:buFont typeface="+mj-lt"/>
-              <a:buAutoNum type="arabicPeriod" startAt="1"/>
+              <a:buAutoNum type="arabicPeriod"/>
             </a:pPr>
             <a:r>
               <a:rPr lang="en-US" sz="1300" dirty="0">
@@ -11976,7 +11733,7 @@
           <a:bodyPr wrap="square" lIns="0" tIns="0" rIns="0" bIns="0" rtlCol="0" anchor="ctr"/>
           <a:lstStyle/>
           <a:p>
-            <a:pPr indent="0" marL="0">
+            <a:pPr marL="0" indent="0">
               <a:buNone/>
             </a:pPr>
             <a:r>
@@ -12015,7 +11772,7 @@
           <a:bodyPr wrap="square" lIns="0" tIns="0" rIns="0" bIns="0" rtlCol="0" anchor="ctr"/>
           <a:lstStyle/>
           <a:p>
-            <a:pPr algn="r" indent="0" marL="0">
+            <a:pPr marL="0" indent="0" algn="r">
               <a:buNone/>
             </a:pPr>
             <a:r>
@@ -12049,6 +11806,7 @@
         <a:solidFill>
           <a:srgbClr val="2B2E36"/>
         </a:solidFill>
+        <a:effectLst/>
       </p:bgPr>
     </p:bg>
     <p:spTree>
@@ -12086,11 +11844,11 @@
           <a:bodyPr wrap="square" lIns="0" tIns="0" rIns="0" bIns="0" rtlCol="0" anchor="ctr"/>
           <a:lstStyle/>
           <a:p>
-            <a:pPr indent="0" marL="0">
-              <a:buNone/>
-            </a:pPr>
-            <a:r>
-              <a:rPr lang="en-US" sz="1100" b="1" spc="100" kern="0" dirty="0">
+            <a:pPr marL="0" indent="0">
+              <a:buNone/>
+            </a:pPr>
+            <a:r>
+              <a:rPr lang="en-US" sz="1100" b="1" kern="0" spc="100" dirty="0">
                 <a:solidFill>
                   <a:srgbClr val="9CBFD6"/>
                 </a:solidFill>
@@ -12125,7 +11883,7 @@
           <a:bodyPr wrap="square" lIns="0" tIns="0" rIns="0" bIns="0" rtlCol="0" anchor="ctr"/>
           <a:lstStyle/>
           <a:p>
-            <a:pPr indent="0" marL="0">
+            <a:pPr marL="0" indent="0">
               <a:buNone/>
             </a:pPr>
             <a:r>
@@ -12164,7 +11922,7 @@
           <a:bodyPr wrap="square" lIns="0" tIns="0" rIns="0" bIns="0" rtlCol="0" anchor="ctr"/>
           <a:lstStyle/>
           <a:p>
-            <a:pPr indent="0" marL="0">
+            <a:pPr marL="0" indent="0">
               <a:buNone/>
             </a:pPr>
             <a:r>
@@ -12208,6 +11966,13 @@
             <a:prstDash val="solid"/>
           </a:ln>
         </p:spPr>
+        <p:txBody>
+          <a:bodyPr/>
+          <a:lstStyle/>
+          <a:p>
+            <a:endParaRPr lang="en-US"/>
+          </a:p>
+        </p:txBody>
       </p:sp>
       <p:sp>
         <p:nvSpPr>
@@ -12230,7 +11995,7 @@
           <a:bodyPr wrap="square" lIns="0" tIns="0" rIns="0" bIns="0" rtlCol="0" anchor="ctr"/>
           <a:lstStyle/>
           <a:p>
-            <a:pPr indent="0" marL="0">
+            <a:pPr marL="0" indent="0">
               <a:buNone/>
             </a:pPr>
             <a:r>
@@ -12269,7 +12034,7 @@
           <a:bodyPr wrap="square" lIns="0" tIns="0" rIns="0" bIns="0" rtlCol="0" anchor="t"/>
           <a:lstStyle/>
           <a:p>
-            <a:pPr indent="0" marL="0">
+            <a:pPr marL="0" indent="0">
               <a:buNone/>
             </a:pPr>
             <a:r>
@@ -12308,7 +12073,7 @@
           <a:bodyPr wrap="square" lIns="0" tIns="0" rIns="0" bIns="0" rtlCol="0" anchor="t"/>
           <a:lstStyle/>
           <a:p>
-            <a:pPr indent="0" marL="0">
+            <a:pPr marL="0" indent="0">
               <a:buNone/>
             </a:pPr>
             <a:r>
@@ -12352,6 +12117,13 @@
             <a:prstDash val="solid"/>
           </a:ln>
         </p:spPr>
+        <p:txBody>
+          <a:bodyPr/>
+          <a:lstStyle/>
+          <a:p>
+            <a:endParaRPr lang="en-US"/>
+          </a:p>
+        </p:txBody>
       </p:sp>
       <p:sp>
         <p:nvSpPr>
@@ -12374,7 +12146,7 @@
           <a:bodyPr wrap="square" lIns="0" tIns="0" rIns="0" bIns="0" rtlCol="0" anchor="ctr"/>
           <a:lstStyle/>
           <a:p>
-            <a:pPr indent="0" marL="0">
+            <a:pPr marL="0" indent="0">
               <a:buNone/>
             </a:pPr>
             <a:r>
@@ -12413,7 +12185,7 @@
           <a:bodyPr wrap="square" lIns="0" tIns="0" rIns="0" bIns="0" rtlCol="0" anchor="t"/>
           <a:lstStyle/>
           <a:p>
-            <a:pPr indent="0" marL="0">
+            <a:pPr marL="0" indent="0">
               <a:buNone/>
             </a:pPr>
             <a:r>
@@ -12452,7 +12224,7 @@
           <a:bodyPr wrap="square" lIns="0" tIns="0" rIns="0" bIns="0" rtlCol="0" anchor="t"/>
           <a:lstStyle/>
           <a:p>
-            <a:pPr indent="0" marL="0">
+            <a:pPr marL="0" indent="0">
               <a:buNone/>
             </a:pPr>
             <a:r>
@@ -12496,6 +12268,13 @@
             <a:prstDash val="solid"/>
           </a:ln>
         </p:spPr>
+        <p:txBody>
+          <a:bodyPr/>
+          <a:lstStyle/>
+          <a:p>
+            <a:endParaRPr lang="en-US"/>
+          </a:p>
+        </p:txBody>
       </p:sp>
       <p:sp>
         <p:nvSpPr>
@@ -12518,7 +12297,7 @@
           <a:bodyPr wrap="square" lIns="0" tIns="0" rIns="0" bIns="0" rtlCol="0" anchor="ctr"/>
           <a:lstStyle/>
           <a:p>
-            <a:pPr indent="0" marL="0">
+            <a:pPr marL="0" indent="0">
               <a:buNone/>
             </a:pPr>
             <a:r>
@@ -12557,7 +12336,7 @@
           <a:bodyPr wrap="square" lIns="0" tIns="0" rIns="0" bIns="0" rtlCol="0" anchor="t"/>
           <a:lstStyle/>
           <a:p>
-            <a:pPr indent="0" marL="0">
+            <a:pPr marL="0" indent="0">
               <a:buNone/>
             </a:pPr>
             <a:r>
@@ -12596,7 +12375,7 @@
           <a:bodyPr wrap="square" lIns="0" tIns="0" rIns="0" bIns="0" rtlCol="0" anchor="t"/>
           <a:lstStyle/>
           <a:p>
-            <a:pPr indent="0" marL="0">
+            <a:pPr marL="0" indent="0">
               <a:buNone/>
             </a:pPr>
             <a:r>
@@ -12640,6 +12419,13 @@
             <a:prstDash val="solid"/>
           </a:ln>
         </p:spPr>
+        <p:txBody>
+          <a:bodyPr/>
+          <a:lstStyle/>
+          <a:p>
+            <a:endParaRPr lang="en-US"/>
+          </a:p>
+        </p:txBody>
       </p:sp>
       <p:sp>
         <p:nvSpPr>
@@ -12662,7 +12448,7 @@
           <a:bodyPr wrap="square" lIns="0" tIns="0" rIns="0" bIns="0" rtlCol="0" anchor="ctr"/>
           <a:lstStyle/>
           <a:p>
-            <a:pPr indent="0" marL="0">
+            <a:pPr marL="0" indent="0">
               <a:buNone/>
             </a:pPr>
             <a:r>
@@ -12701,7 +12487,7 @@
           <a:bodyPr wrap="square" lIns="0" tIns="0" rIns="0" bIns="0" rtlCol="0" anchor="t"/>
           <a:lstStyle/>
           <a:p>
-            <a:pPr indent="0" marL="0">
+            <a:pPr marL="0" indent="0">
               <a:buNone/>
             </a:pPr>
             <a:r>
@@ -12740,7 +12526,7 @@
           <a:bodyPr wrap="square" lIns="0" tIns="0" rIns="0" bIns="0" rtlCol="0" anchor="t"/>
           <a:lstStyle/>
           <a:p>
-            <a:pPr indent="0" marL="0">
+            <a:pPr marL="0" indent="0">
               <a:buNone/>
             </a:pPr>
             <a:r>
@@ -12784,6 +12570,13 @@
             <a:prstDash val="solid"/>
           </a:ln>
         </p:spPr>
+        <p:txBody>
+          <a:bodyPr/>
+          <a:lstStyle/>
+          <a:p>
+            <a:endParaRPr lang="en-US"/>
+          </a:p>
+        </p:txBody>
       </p:sp>
       <p:sp>
         <p:nvSpPr>
@@ -12806,7 +12599,7 @@
           <a:bodyPr wrap="square" lIns="0" tIns="0" rIns="0" bIns="0" rtlCol="0" anchor="ctr"/>
           <a:lstStyle/>
           <a:p>
-            <a:pPr indent="0" marL="0">
+            <a:pPr marL="0" indent="0">
               <a:buNone/>
             </a:pPr>
             <a:r>
@@ -12845,7 +12638,7 @@
           <a:bodyPr wrap="square" lIns="0" tIns="0" rIns="0" bIns="0" rtlCol="0" anchor="t"/>
           <a:lstStyle/>
           <a:p>
-            <a:pPr indent="0" marL="0">
+            <a:pPr marL="0" indent="0">
               <a:buNone/>
             </a:pPr>
             <a:r>
@@ -12884,7 +12677,7 @@
           <a:bodyPr wrap="square" lIns="0" tIns="0" rIns="0" bIns="0" rtlCol="0" anchor="t"/>
           <a:lstStyle/>
           <a:p>
-            <a:pPr indent="0" marL="0">
+            <a:pPr marL="0" indent="0">
               <a:buNone/>
             </a:pPr>
             <a:r>
@@ -12928,6 +12721,13 @@
             <a:prstDash val="solid"/>
           </a:ln>
         </p:spPr>
+        <p:txBody>
+          <a:bodyPr/>
+          <a:lstStyle/>
+          <a:p>
+            <a:endParaRPr lang="en-US"/>
+          </a:p>
+        </p:txBody>
       </p:sp>
       <p:sp>
         <p:nvSpPr>
@@ -12950,7 +12750,7 @@
           <a:bodyPr wrap="square" lIns="0" tIns="0" rIns="0" bIns="0" rtlCol="0" anchor="ctr"/>
           <a:lstStyle/>
           <a:p>
-            <a:pPr indent="0" marL="0">
+            <a:pPr marL="0" indent="0">
               <a:buNone/>
             </a:pPr>
             <a:r>
@@ -12989,7 +12789,7 @@
           <a:bodyPr wrap="square" lIns="0" tIns="0" rIns="0" bIns="0" rtlCol="0" anchor="t"/>
           <a:lstStyle/>
           <a:p>
-            <a:pPr indent="0" marL="0">
+            <a:pPr marL="0" indent="0">
               <a:buNone/>
             </a:pPr>
             <a:r>
@@ -13028,7 +12828,7 @@
           <a:bodyPr wrap="square" lIns="0" tIns="0" rIns="0" bIns="0" rtlCol="0" anchor="t"/>
           <a:lstStyle/>
           <a:p>
-            <a:pPr indent="0" marL="0">
+            <a:pPr marL="0" indent="0">
               <a:buNone/>
             </a:pPr>
             <a:r>
@@ -13072,6 +12872,13 @@
             <a:prstDash val="solid"/>
           </a:ln>
         </p:spPr>
+        <p:txBody>
+          <a:bodyPr/>
+          <a:lstStyle/>
+          <a:p>
+            <a:endParaRPr lang="en-US"/>
+          </a:p>
+        </p:txBody>
       </p:sp>
       <p:sp>
         <p:nvSpPr>
@@ -13094,7 +12901,7 @@
           <a:bodyPr wrap="square" lIns="0" tIns="0" rIns="0" bIns="0" rtlCol="0" anchor="ctr"/>
           <a:lstStyle/>
           <a:p>
-            <a:pPr indent="0" marL="0">
+            <a:pPr marL="0" indent="0">
               <a:buNone/>
             </a:pPr>
             <a:r>
@@ -13133,7 +12940,7 @@
           <a:bodyPr wrap="square" lIns="0" tIns="0" rIns="0" bIns="0" rtlCol="0" anchor="t"/>
           <a:lstStyle/>
           <a:p>
-            <a:pPr indent="0" marL="0">
+            <a:pPr marL="0" indent="0">
               <a:buNone/>
             </a:pPr>
             <a:r>
@@ -13172,7 +12979,7 @@
           <a:bodyPr wrap="square" lIns="0" tIns="0" rIns="0" bIns="0" rtlCol="0" anchor="t"/>
           <a:lstStyle/>
           <a:p>
-            <a:pPr indent="0" marL="0">
+            <a:pPr marL="0" indent="0">
               <a:buNone/>
             </a:pPr>
             <a:r>
@@ -13216,6 +13023,13 @@
             <a:prstDash val="solid"/>
           </a:ln>
         </p:spPr>
+        <p:txBody>
+          <a:bodyPr/>
+          <a:lstStyle/>
+          <a:p>
+            <a:endParaRPr lang="en-US"/>
+          </a:p>
+        </p:txBody>
       </p:sp>
       <p:sp>
         <p:nvSpPr>
@@ -13238,7 +13052,7 @@
           <a:bodyPr wrap="square" lIns="0" tIns="0" rIns="0" bIns="0" rtlCol="0" anchor="ctr"/>
           <a:lstStyle/>
           <a:p>
-            <a:pPr indent="0" marL="0">
+            <a:pPr marL="0" indent="0">
               <a:buNone/>
             </a:pPr>
             <a:r>
@@ -13277,7 +13091,7 @@
           <a:bodyPr wrap="square" lIns="0" tIns="0" rIns="0" bIns="0" rtlCol="0" anchor="t"/>
           <a:lstStyle/>
           <a:p>
-            <a:pPr indent="0" marL="0">
+            <a:pPr marL="0" indent="0">
               <a:buNone/>
             </a:pPr>
             <a:r>
@@ -13316,7 +13130,7 @@
           <a:bodyPr wrap="square" lIns="0" tIns="0" rIns="0" bIns="0" rtlCol="0" anchor="t"/>
           <a:lstStyle/>
           <a:p>
-            <a:pPr indent="0" marL="0">
+            <a:pPr marL="0" indent="0">
               <a:buNone/>
             </a:pPr>
             <a:r>
@@ -13355,7 +13169,7 @@
           <a:bodyPr wrap="square" lIns="0" tIns="0" rIns="0" bIns="0" rtlCol="0" anchor="ctr"/>
           <a:lstStyle/>
           <a:p>
-            <a:pPr indent="0" marL="0">
+            <a:pPr marL="0" indent="0">
               <a:buNone/>
             </a:pPr>
             <a:r>
@@ -13394,7 +13208,7 @@
           <a:bodyPr wrap="square" lIns="0" tIns="0" rIns="0" bIns="0" rtlCol="0" anchor="ctr"/>
           <a:lstStyle/>
           <a:p>
-            <a:pPr algn="r" indent="0" marL="0">
+            <a:pPr marL="0" indent="0" algn="r">
               <a:buNone/>
             </a:pPr>
             <a:r>
@@ -13428,6 +13242,7 @@
         <a:solidFill>
           <a:srgbClr val="FFFFFF"/>
         </a:solidFill>
+        <a:effectLst/>
       </p:bgPr>
     </p:bg>
     <p:spTree>
@@ -13465,7 +13280,7 @@
           <a:bodyPr wrap="square" lIns="0" tIns="0" rIns="0" bIns="0" rtlCol="0" anchor="ctr"/>
           <a:lstStyle/>
           <a:p>
-            <a:pPr indent="0" marL="0">
+            <a:pPr marL="0" indent="0">
               <a:buNone/>
             </a:pPr>
             <a:r>
@@ -13504,7 +13319,7 @@
           <a:bodyPr wrap="square" lIns="0" tIns="0" rIns="0" bIns="0" rtlCol="0" anchor="ctr"/>
           <a:lstStyle/>
           <a:p>
-            <a:pPr indent="0" marL="0">
+            <a:pPr marL="0" indent="0">
               <a:buNone/>
             </a:pPr>
             <a:r>
@@ -13546,6 +13361,13 @@
             <a:prstDash val="solid"/>
           </a:ln>
         </p:spPr>
+        <p:txBody>
+          <a:bodyPr/>
+          <a:lstStyle/>
+          <a:p>
+            <a:endParaRPr lang="en-US"/>
+          </a:p>
+        </p:txBody>
       </p:sp>
       <p:sp>
         <p:nvSpPr>
@@ -13568,7 +13390,7 @@
           <a:bodyPr wrap="square" lIns="0" tIns="0" rIns="0" bIns="0" rtlCol="0" anchor="ctr"/>
           <a:lstStyle/>
           <a:p>
-            <a:pPr algn="ctr" indent="0" marL="0">
+            <a:pPr marL="0" indent="0" algn="ctr">
               <a:buNone/>
             </a:pPr>
             <a:r>
@@ -13607,7 +13429,7 @@
           <a:bodyPr wrap="square" lIns="0" tIns="0" rIns="0" bIns="0" rtlCol="0" anchor="t"/>
           <a:lstStyle/>
           <a:p>
-            <a:pPr algn="ctr" indent="0" marL="0">
+            <a:pPr marL="0" indent="0" algn="ctr">
               <a:buNone/>
             </a:pPr>
             <a:r>
@@ -13649,6 +13471,13 @@
             <a:prstDash val="solid"/>
           </a:ln>
         </p:spPr>
+        <p:txBody>
+          <a:bodyPr/>
+          <a:lstStyle/>
+          <a:p>
+            <a:endParaRPr lang="en-US"/>
+          </a:p>
+        </p:txBody>
       </p:sp>
       <p:sp>
         <p:nvSpPr>
@@ -13671,7 +13500,7 @@
           <a:bodyPr wrap="square" lIns="0" tIns="0" rIns="0" bIns="0" rtlCol="0" anchor="ctr"/>
           <a:lstStyle/>
           <a:p>
-            <a:pPr algn="ctr" indent="0" marL="0">
+            <a:pPr marL="0" indent="0" algn="ctr">
               <a:buNone/>
             </a:pPr>
             <a:r>
@@ -13710,7 +13539,7 @@
           <a:bodyPr wrap="square" lIns="0" tIns="0" rIns="0" bIns="0" rtlCol="0" anchor="t"/>
           <a:lstStyle/>
           <a:p>
-            <a:pPr algn="ctr" indent="0" marL="0">
+            <a:pPr marL="0" indent="0" algn="ctr">
               <a:buNone/>
             </a:pPr>
             <a:r>
@@ -13752,6 +13581,13 @@
             <a:prstDash val="solid"/>
           </a:ln>
         </p:spPr>
+        <p:txBody>
+          <a:bodyPr/>
+          <a:lstStyle/>
+          <a:p>
+            <a:endParaRPr lang="en-US"/>
+          </a:p>
+        </p:txBody>
       </p:sp>
       <p:sp>
         <p:nvSpPr>
@@ -13774,7 +13610,7 @@
           <a:bodyPr wrap="square" lIns="0" tIns="0" rIns="0" bIns="0" rtlCol="0" anchor="ctr"/>
           <a:lstStyle/>
           <a:p>
-            <a:pPr algn="ctr" indent="0" marL="0">
+            <a:pPr marL="0" indent="0" algn="ctr">
               <a:buNone/>
             </a:pPr>
             <a:r>
@@ -13813,7 +13649,7 @@
           <a:bodyPr wrap="square" lIns="0" tIns="0" rIns="0" bIns="0" rtlCol="0" anchor="t"/>
           <a:lstStyle/>
           <a:p>
-            <a:pPr algn="ctr" indent="0" marL="0">
+            <a:pPr marL="0" indent="0" algn="ctr">
               <a:buNone/>
             </a:pPr>
             <a:r>
@@ -13855,6 +13691,13 @@
             <a:prstDash val="solid"/>
           </a:ln>
         </p:spPr>
+        <p:txBody>
+          <a:bodyPr/>
+          <a:lstStyle/>
+          <a:p>
+            <a:endParaRPr lang="en-US"/>
+          </a:p>
+        </p:txBody>
       </p:sp>
       <p:sp>
         <p:nvSpPr>
@@ -13877,7 +13720,7 @@
           <a:bodyPr wrap="square" lIns="0" tIns="0" rIns="0" bIns="0" rtlCol="0" anchor="ctr"/>
           <a:lstStyle/>
           <a:p>
-            <a:pPr algn="ctr" indent="0" marL="0">
+            <a:pPr marL="0" indent="0" algn="ctr">
               <a:buNone/>
             </a:pPr>
             <a:r>
@@ -13916,7 +13759,7 @@
           <a:bodyPr wrap="square" lIns="0" tIns="0" rIns="0" bIns="0" rtlCol="0" anchor="t"/>
           <a:lstStyle/>
           <a:p>
-            <a:pPr algn="ctr" indent="0" marL="0">
+            <a:pPr marL="0" indent="0" algn="ctr">
               <a:buNone/>
             </a:pPr>
             <a:r>
@@ -13958,6 +13801,13 @@
             <a:prstDash val="solid"/>
           </a:ln>
         </p:spPr>
+        <p:txBody>
+          <a:bodyPr/>
+          <a:lstStyle/>
+          <a:p>
+            <a:endParaRPr lang="en-US"/>
+          </a:p>
+        </p:txBody>
       </p:sp>
       <p:sp>
         <p:nvSpPr>
@@ -13980,7 +13830,7 @@
           <a:bodyPr wrap="square" lIns="0" tIns="0" rIns="0" bIns="0" rtlCol="0" anchor="ctr"/>
           <a:lstStyle/>
           <a:p>
-            <a:pPr algn="ctr" indent="0" marL="0">
+            <a:pPr marL="0" indent="0" algn="ctr">
               <a:buNone/>
             </a:pPr>
             <a:r>
@@ -14019,7 +13869,7 @@
           <a:bodyPr wrap="square" lIns="0" tIns="0" rIns="0" bIns="0" rtlCol="0" anchor="t"/>
           <a:lstStyle/>
           <a:p>
-            <a:pPr algn="ctr" indent="0" marL="0">
+            <a:pPr marL="0" indent="0" algn="ctr">
               <a:buNone/>
             </a:pPr>
             <a:r>
@@ -14061,6 +13911,13 @@
             <a:prstDash val="solid"/>
           </a:ln>
         </p:spPr>
+        <p:txBody>
+          <a:bodyPr/>
+          <a:lstStyle/>
+          <a:p>
+            <a:endParaRPr lang="en-US"/>
+          </a:p>
+        </p:txBody>
       </p:sp>
       <p:sp>
         <p:nvSpPr>
@@ -14083,7 +13940,7 @@
           <a:bodyPr wrap="square" lIns="0" tIns="0" rIns="0" bIns="0" rtlCol="0" anchor="ctr"/>
           <a:lstStyle/>
           <a:p>
-            <a:pPr algn="ctr" indent="0" marL="0">
+            <a:pPr marL="0" indent="0" algn="ctr">
               <a:buNone/>
             </a:pPr>
             <a:r>
@@ -14122,7 +13979,7 @@
           <a:bodyPr wrap="square" lIns="0" tIns="0" rIns="0" bIns="0" rtlCol="0" anchor="t"/>
           <a:lstStyle/>
           <a:p>
-            <a:pPr algn="ctr" indent="0" marL="0">
+            <a:pPr marL="0" indent="0" algn="ctr">
               <a:buNone/>
             </a:pPr>
             <a:r>
@@ -14164,6 +14021,13 @@
             <a:prstDash val="solid"/>
           </a:ln>
         </p:spPr>
+        <p:txBody>
+          <a:bodyPr/>
+          <a:lstStyle/>
+          <a:p>
+            <a:endParaRPr lang="en-US"/>
+          </a:p>
+        </p:txBody>
       </p:sp>
       <p:sp>
         <p:nvSpPr>
@@ -14186,7 +14050,7 @@
           <a:bodyPr wrap="square" lIns="0" tIns="0" rIns="0" bIns="0" rtlCol="0" anchor="ctr"/>
           <a:lstStyle/>
           <a:p>
-            <a:pPr algn="ctr" indent="0" marL="0">
+            <a:pPr marL="0" indent="0" algn="ctr">
               <a:buNone/>
             </a:pPr>
             <a:r>
@@ -14225,7 +14089,7 @@
           <a:bodyPr wrap="square" lIns="0" tIns="0" rIns="0" bIns="0" rtlCol="0" anchor="t"/>
           <a:lstStyle/>
           <a:p>
-            <a:pPr algn="ctr" indent="0" marL="0">
+            <a:pPr marL="0" indent="0" algn="ctr">
               <a:buNone/>
             </a:pPr>
             <a:r>
@@ -14269,6 +14133,13 @@
             <a:prstDash val="solid"/>
           </a:ln>
         </p:spPr>
+        <p:txBody>
+          <a:bodyPr/>
+          <a:lstStyle/>
+          <a:p>
+            <a:endParaRPr lang="en-US"/>
+          </a:p>
+        </p:txBody>
       </p:sp>
       <p:sp>
         <p:nvSpPr>
@@ -14294,17 +14165,24 @@
             <a:prstDash val="solid"/>
           </a:ln>
         </p:spPr>
+        <p:txBody>
+          <a:bodyPr/>
+          <a:lstStyle/>
+          <a:p>
+            <a:endParaRPr lang="en-US"/>
+          </a:p>
+        </p:txBody>
       </p:sp>
       <p:pic>
         <p:nvPicPr>
-          <p:cNvPr id="27" name="Image 0" descr="preencoded.png">    </p:cNvPr>
+          <p:cNvPr id="27" name="Image 0" descr="preencoded.png"/>
           <p:cNvPicPr>
             <a:picLocks noChangeAspect="1"/>
           </p:cNvPicPr>
           <p:nvPr/>
         </p:nvPicPr>
         <p:blipFill>
-          <a:blip r:embed="rId1"/>
+          <a:blip r:embed="rId3"/>
           <a:stretch>
             <a:fillRect/>
           </a:stretch>
@@ -14340,11 +14218,11 @@
           <a:bodyPr wrap="square" lIns="0" tIns="0" rIns="0" bIns="0" rtlCol="0" anchor="t"/>
           <a:lstStyle/>
           <a:p>
-            <a:pPr indent="0" marL="0">
-              <a:buNone/>
-            </a:pPr>
-            <a:r>
-              <a:rPr lang="en-US" sz="1100" b="1" spc="100" kern="0" dirty="0">
+            <a:pPr marL="0" indent="0">
+              <a:buNone/>
+            </a:pPr>
+            <a:r>
+              <a:rPr lang="en-US" sz="1100" b="1" kern="0" spc="100" dirty="0">
                 <a:solidFill>
                   <a:srgbClr val="A98B3C"/>
                 </a:solidFill>
@@ -14379,7 +14257,7 @@
           <a:bodyPr wrap="square" lIns="0" tIns="0" rIns="0" bIns="0" rtlCol="0" anchor="t"/>
           <a:lstStyle/>
           <a:p>
-            <a:pPr indent="0" marL="0">
+            <a:pPr marL="0" indent="0">
               <a:buNone/>
             </a:pPr>
             <a:r>
@@ -14418,7 +14296,7 @@
           <a:bodyPr wrap="square" lIns="0" tIns="0" rIns="0" bIns="0" rtlCol="0" anchor="t"/>
           <a:lstStyle/>
           <a:p>
-            <a:pPr indent="0" marL="0">
+            <a:pPr marL="0" indent="0">
               <a:buNone/>
             </a:pPr>
             <a:r>
@@ -14462,6 +14340,13 @@
             <a:prstDash val="solid"/>
           </a:ln>
         </p:spPr>
+        <p:txBody>
+          <a:bodyPr/>
+          <a:lstStyle/>
+          <a:p>
+            <a:endParaRPr lang="en-US"/>
+          </a:p>
+        </p:txBody>
       </p:sp>
       <p:sp>
         <p:nvSpPr>
@@ -14487,17 +14372,24 @@
             <a:prstDash val="solid"/>
           </a:ln>
         </p:spPr>
+        <p:txBody>
+          <a:bodyPr/>
+          <a:lstStyle/>
+          <a:p>
+            <a:endParaRPr lang="en-US"/>
+          </a:p>
+        </p:txBody>
       </p:sp>
       <p:pic>
         <p:nvPicPr>
-          <p:cNvPr id="33" name="Image 1" descr="preencoded.png">    </p:cNvPr>
+          <p:cNvPr id="33" name="Image 1" descr="preencoded.png"/>
           <p:cNvPicPr>
             <a:picLocks noChangeAspect="1"/>
           </p:cNvPicPr>
           <p:nvPr/>
         </p:nvPicPr>
         <p:blipFill>
-          <a:blip r:embed="rId2"/>
+          <a:blip r:embed="rId4"/>
           <a:stretch>
             <a:fillRect/>
           </a:stretch>
@@ -14533,11 +14425,11 @@
           <a:bodyPr wrap="square" lIns="0" tIns="0" rIns="0" bIns="0" rtlCol="0" anchor="t"/>
           <a:lstStyle/>
           <a:p>
-            <a:pPr indent="0" marL="0">
-              <a:buNone/>
-            </a:pPr>
-            <a:r>
-              <a:rPr lang="en-US" sz="1100" b="1" spc="100" kern="0" dirty="0">
+            <a:pPr marL="0" indent="0">
+              <a:buNone/>
+            </a:pPr>
+            <a:r>
+              <a:rPr lang="en-US" sz="1100" b="1" kern="0" spc="100" dirty="0">
                 <a:solidFill>
                   <a:srgbClr val="A98B3C"/>
                 </a:solidFill>
@@ -14572,7 +14464,7 @@
           <a:bodyPr wrap="square" lIns="0" tIns="0" rIns="0" bIns="0" rtlCol="0" anchor="t"/>
           <a:lstStyle/>
           <a:p>
-            <a:pPr indent="0" marL="0">
+            <a:pPr marL="0" indent="0">
               <a:buNone/>
             </a:pPr>
             <a:r>
@@ -14611,7 +14503,7 @@
           <a:bodyPr wrap="square" lIns="0" tIns="0" rIns="0" bIns="0" rtlCol="0" anchor="t"/>
           <a:lstStyle/>
           <a:p>
-            <a:pPr indent="0" marL="0">
+            <a:pPr marL="0" indent="0">
               <a:buNone/>
             </a:pPr>
             <a:r>
@@ -14655,6 +14547,13 @@
             <a:prstDash val="solid"/>
           </a:ln>
         </p:spPr>
+        <p:txBody>
+          <a:bodyPr/>
+          <a:lstStyle/>
+          <a:p>
+            <a:endParaRPr lang="en-US"/>
+          </a:p>
+        </p:txBody>
       </p:sp>
       <p:sp>
         <p:nvSpPr>
@@ -14680,17 +14579,24 @@
             <a:prstDash val="solid"/>
           </a:ln>
         </p:spPr>
+        <p:txBody>
+          <a:bodyPr/>
+          <a:lstStyle/>
+          <a:p>
+            <a:endParaRPr lang="en-US"/>
+          </a:p>
+        </p:txBody>
       </p:sp>
       <p:pic>
         <p:nvPicPr>
-          <p:cNvPr id="39" name="Image 2" descr="preencoded.png">    </p:cNvPr>
+          <p:cNvPr id="39" name="Image 2" descr="preencoded.png"/>
           <p:cNvPicPr>
             <a:picLocks noChangeAspect="1"/>
           </p:cNvPicPr>
           <p:nvPr/>
         </p:nvPicPr>
         <p:blipFill>
-          <a:blip r:embed="rId3"/>
+          <a:blip r:embed="rId5"/>
           <a:stretch>
             <a:fillRect/>
           </a:stretch>
@@ -14726,11 +14632,11 @@
           <a:bodyPr wrap="square" lIns="0" tIns="0" rIns="0" bIns="0" rtlCol="0" anchor="t"/>
           <a:lstStyle/>
           <a:p>
-            <a:pPr indent="0" marL="0">
-              <a:buNone/>
-            </a:pPr>
-            <a:r>
-              <a:rPr lang="en-US" sz="1100" b="1" spc="100" kern="0" dirty="0">
+            <a:pPr marL="0" indent="0">
+              <a:buNone/>
+            </a:pPr>
+            <a:r>
+              <a:rPr lang="en-US" sz="1100" b="1" kern="0" spc="100" dirty="0">
                 <a:solidFill>
                   <a:srgbClr val="A98B3C"/>
                 </a:solidFill>
@@ -14765,7 +14671,7 @@
           <a:bodyPr wrap="square" lIns="0" tIns="0" rIns="0" bIns="0" rtlCol="0" anchor="t"/>
           <a:lstStyle/>
           <a:p>
-            <a:pPr indent="0" marL="0">
+            <a:pPr marL="0" indent="0">
               <a:buNone/>
             </a:pPr>
             <a:r>
@@ -14804,7 +14710,7 @@
           <a:bodyPr wrap="square" lIns="0" tIns="0" rIns="0" bIns="0" rtlCol="0" anchor="t"/>
           <a:lstStyle/>
           <a:p>
-            <a:pPr indent="0" marL="0">
+            <a:pPr marL="0" indent="0">
               <a:buNone/>
             </a:pPr>
             <a:r>
@@ -14848,6 +14754,13 @@
             <a:prstDash val="solid"/>
           </a:ln>
         </p:spPr>
+        <p:txBody>
+          <a:bodyPr/>
+          <a:lstStyle/>
+          <a:p>
+            <a:endParaRPr lang="en-US"/>
+          </a:p>
+        </p:txBody>
       </p:sp>
       <p:sp>
         <p:nvSpPr>
@@ -14873,17 +14786,24 @@
             <a:prstDash val="solid"/>
           </a:ln>
         </p:spPr>
+        <p:txBody>
+          <a:bodyPr/>
+          <a:lstStyle/>
+          <a:p>
+            <a:endParaRPr lang="en-US"/>
+          </a:p>
+        </p:txBody>
       </p:sp>
       <p:pic>
         <p:nvPicPr>
-          <p:cNvPr id="45" name="Image 3" descr="preencoded.png">    </p:cNvPr>
+          <p:cNvPr id="45" name="Image 3" descr="preencoded.png"/>
           <p:cNvPicPr>
             <a:picLocks noChangeAspect="1"/>
           </p:cNvPicPr>
           <p:nvPr/>
         </p:nvPicPr>
         <p:blipFill>
-          <a:blip r:embed="rId4"/>
+          <a:blip r:embed="rId6"/>
           <a:stretch>
             <a:fillRect/>
           </a:stretch>
@@ -14919,11 +14839,11 @@
           <a:bodyPr wrap="square" lIns="0" tIns="0" rIns="0" bIns="0" rtlCol="0" anchor="t"/>
           <a:lstStyle/>
           <a:p>
-            <a:pPr indent="0" marL="0">
-              <a:buNone/>
-            </a:pPr>
-            <a:r>
-              <a:rPr lang="en-US" sz="1100" b="1" spc="100" kern="0" dirty="0">
+            <a:pPr marL="0" indent="0">
+              <a:buNone/>
+            </a:pPr>
+            <a:r>
+              <a:rPr lang="en-US" sz="1100" b="1" kern="0" spc="100" dirty="0">
                 <a:solidFill>
                   <a:srgbClr val="A98B3C"/>
                 </a:solidFill>
@@ -14958,7 +14878,7 @@
           <a:bodyPr wrap="square" lIns="0" tIns="0" rIns="0" bIns="0" rtlCol="0" anchor="t"/>
           <a:lstStyle/>
           <a:p>
-            <a:pPr indent="0" marL="0">
+            <a:pPr marL="0" indent="0">
               <a:buNone/>
             </a:pPr>
             <a:r>
@@ -14997,7 +14917,7 @@
           <a:bodyPr wrap="square" lIns="0" tIns="0" rIns="0" bIns="0" rtlCol="0" anchor="t"/>
           <a:lstStyle/>
           <a:p>
-            <a:pPr indent="0" marL="0">
+            <a:pPr marL="0" indent="0">
               <a:buNone/>
             </a:pPr>
             <a:r>
@@ -15036,7 +14956,7 @@
           <a:bodyPr wrap="square" lIns="0" tIns="0" rIns="0" bIns="0" rtlCol="0" anchor="ctr"/>
           <a:lstStyle/>
           <a:p>
-            <a:pPr indent="0" marL="0">
+            <a:pPr marL="0" indent="0">
               <a:buNone/>
             </a:pPr>
             <a:r>
@@ -15075,7 +14995,7 @@
           <a:bodyPr wrap="square" lIns="0" tIns="0" rIns="0" bIns="0" rtlCol="0" anchor="ctr"/>
           <a:lstStyle/>
           <a:p>
-            <a:pPr algn="r" indent="0" marL="0">
+            <a:pPr marL="0" indent="0" algn="r">
               <a:buNone/>
             </a:pPr>
             <a:r>
@@ -15109,6 +15029,7 @@
         <a:solidFill>
           <a:srgbClr val="FFFFFF"/>
         </a:solidFill>
+        <a:effectLst/>
       </p:bgPr>
     </p:bg>
     <p:spTree>
@@ -15146,11 +15067,11 @@
           <a:bodyPr wrap="square" lIns="0" tIns="0" rIns="0" bIns="0" rtlCol="0" anchor="ctr"/>
           <a:lstStyle/>
           <a:p>
-            <a:pPr indent="0" marL="0">
-              <a:buNone/>
-            </a:pPr>
-            <a:r>
-              <a:rPr lang="en-US" sz="1100" b="1" spc="100" kern="0" dirty="0">
+            <a:pPr marL="0" indent="0">
+              <a:buNone/>
+            </a:pPr>
+            <a:r>
+              <a:rPr lang="en-US" sz="1100" b="1" kern="0" spc="100" dirty="0">
                 <a:solidFill>
                   <a:srgbClr val="A98B3C"/>
                 </a:solidFill>
@@ -15185,7 +15106,7 @@
           <a:bodyPr wrap="square" lIns="0" tIns="0" rIns="0" bIns="0" rtlCol="0" anchor="ctr"/>
           <a:lstStyle/>
           <a:p>
-            <a:pPr indent="0" marL="0">
+            <a:pPr marL="0" indent="0">
               <a:buNone/>
             </a:pPr>
             <a:r>
@@ -15224,7 +15145,7 @@
           <a:bodyPr wrap="square" lIns="0" tIns="0" rIns="0" bIns="0" rtlCol="0" anchor="ctr"/>
           <a:lstStyle/>
           <a:p>
-            <a:pPr indent="0" marL="0">
+            <a:pPr marL="0" indent="0">
               <a:buNone/>
             </a:pPr>
             <a:r>
@@ -15268,6 +15189,13 @@
             <a:prstDash val="solid"/>
           </a:ln>
         </p:spPr>
+        <p:txBody>
+          <a:bodyPr/>
+          <a:lstStyle/>
+          <a:p>
+            <a:endParaRPr lang="en-US"/>
+          </a:p>
+        </p:txBody>
       </p:sp>
       <p:sp>
         <p:nvSpPr>
@@ -15290,7 +15218,7 @@
           <a:bodyPr wrap="square" lIns="0" tIns="0" rIns="0" bIns="0" rtlCol="0" anchor="t"/>
           <a:lstStyle/>
           <a:p>
-            <a:pPr indent="0" marL="0">
+            <a:pPr marL="0" indent="0">
               <a:buNone/>
             </a:pPr>
             <a:r>
@@ -15329,7 +15257,7 @@
           <a:bodyPr wrap="square" lIns="0" tIns="0" rIns="0" bIns="0" rtlCol="0" anchor="t"/>
           <a:lstStyle/>
           <a:p>
-            <a:pPr indent="0" marL="0">
+            <a:pPr marL="0" indent="0">
               <a:buNone/>
             </a:pPr>
             <a:r>
@@ -15349,14 +15277,14 @@
       </p:sp>
       <p:pic>
         <p:nvPicPr>
-          <p:cNvPr id="8" name="Image 0" descr="preencoded.png">    </p:cNvPr>
+          <p:cNvPr id="8" name="Image 0" descr="preencoded.png"/>
           <p:cNvPicPr>
             <a:picLocks noChangeAspect="1"/>
           </p:cNvPicPr>
           <p:nvPr/>
         </p:nvPicPr>
         <p:blipFill>
-          <a:blip r:embed="rId1"/>
+          <a:blip r:embed="rId3"/>
           <a:stretch>
             <a:fillRect/>
           </a:stretch>
@@ -15397,6 +15325,13 @@
             <a:prstDash val="solid"/>
           </a:ln>
         </p:spPr>
+        <p:txBody>
+          <a:bodyPr/>
+          <a:lstStyle/>
+          <a:p>
+            <a:endParaRPr lang="en-US"/>
+          </a:p>
+        </p:txBody>
       </p:sp>
       <p:sp>
         <p:nvSpPr>
@@ -15419,7 +15354,7 @@
           <a:bodyPr wrap="square" lIns="0" tIns="0" rIns="0" bIns="0" rtlCol="0" anchor="t"/>
           <a:lstStyle/>
           <a:p>
-            <a:pPr indent="0" marL="0">
+            <a:pPr marL="0" indent="0">
               <a:buNone/>
             </a:pPr>
             <a:r>
@@ -15458,7 +15393,7 @@
           <a:bodyPr wrap="square" lIns="0" tIns="0" rIns="0" bIns="0" rtlCol="0" anchor="t"/>
           <a:lstStyle/>
           <a:p>
-            <a:pPr indent="0" marL="0">
+            <a:pPr marL="0" indent="0">
               <a:buNone/>
             </a:pPr>
             <a:r>
@@ -15478,14 +15413,14 @@
       </p:sp>
       <p:pic>
         <p:nvPicPr>
-          <p:cNvPr id="12" name="Image 1" descr="preencoded.png">    </p:cNvPr>
+          <p:cNvPr id="12" name="Image 1" descr="preencoded.png"/>
           <p:cNvPicPr>
             <a:picLocks noChangeAspect="1"/>
           </p:cNvPicPr>
           <p:nvPr/>
         </p:nvPicPr>
         <p:blipFill>
-          <a:blip r:embed="rId2"/>
+          <a:blip r:embed="rId3"/>
           <a:stretch>
             <a:fillRect/>
           </a:stretch>
@@ -15526,6 +15461,13 @@
             <a:prstDash val="solid"/>
           </a:ln>
         </p:spPr>
+        <p:txBody>
+          <a:bodyPr/>
+          <a:lstStyle/>
+          <a:p>
+            <a:endParaRPr lang="en-US"/>
+          </a:p>
+        </p:txBody>
       </p:sp>
       <p:sp>
         <p:nvSpPr>
@@ -15548,7 +15490,7 @@
           <a:bodyPr wrap="square" lIns="0" tIns="0" rIns="0" bIns="0" rtlCol="0" anchor="t"/>
           <a:lstStyle/>
           <a:p>
-            <a:pPr indent="0" marL="0">
+            <a:pPr marL="0" indent="0">
               <a:buNone/>
             </a:pPr>
             <a:r>
@@ -15587,7 +15529,7 @@
           <a:bodyPr wrap="square" lIns="0" tIns="0" rIns="0" bIns="0" rtlCol="0" anchor="t"/>
           <a:lstStyle/>
           <a:p>
-            <a:pPr indent="0" marL="0">
+            <a:pPr marL="0" indent="0">
               <a:buNone/>
             </a:pPr>
             <a:r>
@@ -15607,7 +15549,7 @@
       </p:sp>
       <p:pic>
         <p:nvPicPr>
-          <p:cNvPr id="16" name="Image 2" descr="preencoded.png">    </p:cNvPr>
+          <p:cNvPr id="16" name="Image 2" descr="preencoded.png"/>
           <p:cNvPicPr>
             <a:picLocks noChangeAspect="1"/>
           </p:cNvPicPr>
@@ -15655,6 +15597,13 @@
             <a:prstDash val="solid"/>
           </a:ln>
         </p:spPr>
+        <p:txBody>
+          <a:bodyPr/>
+          <a:lstStyle/>
+          <a:p>
+            <a:endParaRPr lang="en-US"/>
+          </a:p>
+        </p:txBody>
       </p:sp>
       <p:sp>
         <p:nvSpPr>
@@ -15677,7 +15626,7 @@
           <a:bodyPr wrap="square" lIns="0" tIns="0" rIns="0" bIns="0" rtlCol="0" anchor="ctr"/>
           <a:lstStyle/>
           <a:p>
-            <a:pPr indent="0" marL="0">
+            <a:pPr marL="0" indent="0">
               <a:buNone/>
             </a:pPr>
             <a:r>
@@ -15721,6 +15670,13 @@
             <a:prstDash val="solid"/>
           </a:ln>
         </p:spPr>
+        <p:txBody>
+          <a:bodyPr/>
+          <a:lstStyle/>
+          <a:p>
+            <a:endParaRPr lang="en-US"/>
+          </a:p>
+        </p:txBody>
       </p:sp>
       <p:sp>
         <p:nvSpPr>
@@ -15743,7 +15699,7 @@
           <a:bodyPr wrap="square" lIns="0" tIns="0" rIns="0" bIns="0" rtlCol="0" anchor="ctr"/>
           <a:lstStyle/>
           <a:p>
-            <a:pPr indent="0" marL="0">
+            <a:pPr marL="0" indent="0">
               <a:buNone/>
             </a:pPr>
             <a:r>
@@ -15782,7 +15738,7 @@
           <a:bodyPr wrap="square" lIns="0" tIns="0" rIns="0" bIns="0" rtlCol="0" anchor="ctr"/>
           <a:lstStyle/>
           <a:p>
-            <a:pPr indent="0" marL="0">
+            <a:pPr marL="0" indent="0">
               <a:buNone/>
             </a:pPr>
             <a:r>
@@ -15821,7 +15777,7 @@
           <a:bodyPr wrap="square" lIns="0" tIns="0" rIns="0" bIns="0" rtlCol="0" anchor="t"/>
           <a:lstStyle/>
           <a:p>
-            <a:pPr indent="0" marL="0">
+            <a:pPr marL="0" indent="0">
               <a:buNone/>
             </a:pPr>
             <a:r>
@@ -15860,7 +15816,7 @@
           <a:bodyPr wrap="square" lIns="0" tIns="0" rIns="0" bIns="0" rtlCol="0" anchor="ctr"/>
           <a:lstStyle/>
           <a:p>
-            <a:pPr indent="0" marL="0">
+            <a:pPr marL="0" indent="0">
               <a:buNone/>
             </a:pPr>
             <a:r>
@@ -15899,7 +15855,7 @@
           <a:bodyPr wrap="square" lIns="0" tIns="0" rIns="0" bIns="0" rtlCol="0" anchor="t"/>
           <a:lstStyle/>
           <a:p>
-            <a:pPr indent="0" marL="0">
+            <a:pPr marL="0" indent="0">
               <a:buNone/>
             </a:pPr>
             <a:r>
@@ -15938,7 +15894,7 @@
           <a:bodyPr wrap="square" lIns="0" tIns="0" rIns="0" bIns="0" rtlCol="0" anchor="ctr"/>
           <a:lstStyle/>
           <a:p>
-            <a:pPr indent="0" marL="0">
+            <a:pPr marL="0" indent="0">
               <a:buNone/>
             </a:pPr>
             <a:r>
@@ -15977,7 +15933,7 @@
           <a:bodyPr wrap="square" lIns="0" tIns="0" rIns="0" bIns="0" rtlCol="0" anchor="t"/>
           <a:lstStyle/>
           <a:p>
-            <a:pPr indent="0" marL="0">
+            <a:pPr marL="0" indent="0">
               <a:buNone/>
             </a:pPr>
             <a:r>
@@ -16016,7 +15972,7 @@
           <a:bodyPr wrap="square" lIns="0" tIns="0" rIns="0" bIns="0" rtlCol="0" anchor="ctr"/>
           <a:lstStyle/>
           <a:p>
-            <a:pPr indent="0" marL="0">
+            <a:pPr marL="0" indent="0">
               <a:buNone/>
             </a:pPr>
             <a:r>
@@ -16055,7 +16011,7 @@
           <a:bodyPr wrap="square" lIns="0" tIns="0" rIns="0" bIns="0" rtlCol="0" anchor="ctr"/>
           <a:lstStyle/>
           <a:p>
-            <a:pPr algn="r" indent="0" marL="0">
+            <a:pPr marL="0" indent="0" algn="r">
               <a:buNone/>
             </a:pPr>
             <a:r>
@@ -16089,6 +16045,7 @@
         <a:solidFill>
           <a:srgbClr val="2B2E36"/>
         </a:solidFill>
+        <a:effectLst/>
       </p:bgPr>
     </p:bg>
     <p:spTree>
@@ -16126,11 +16083,11 @@
           <a:bodyPr wrap="square" lIns="0" tIns="0" rIns="0" bIns="0" rtlCol="0" anchor="ctr"/>
           <a:lstStyle/>
           <a:p>
-            <a:pPr indent="0" marL="0">
-              <a:buNone/>
-            </a:pPr>
-            <a:r>
-              <a:rPr lang="en-US" sz="1100" b="1" spc="100" kern="0" dirty="0">
+            <a:pPr marL="0" indent="0">
+              <a:buNone/>
+            </a:pPr>
+            <a:r>
+              <a:rPr lang="en-US" sz="1100" b="1" kern="0" spc="100" dirty="0">
                 <a:solidFill>
                   <a:srgbClr val="9CBFD6"/>
                 </a:solidFill>
@@ -16165,7 +16122,7 @@
           <a:bodyPr wrap="square" lIns="0" tIns="0" rIns="0" bIns="0" rtlCol="0" anchor="ctr"/>
           <a:lstStyle/>
           <a:p>
-            <a:pPr indent="0" marL="0">
+            <a:pPr marL="0" indent="0">
               <a:buNone/>
             </a:pPr>
             <a:r>
@@ -16204,7 +16161,7 @@
           <a:bodyPr wrap="square" lIns="0" tIns="0" rIns="0" bIns="0" rtlCol="0" anchor="ctr"/>
           <a:lstStyle/>
           <a:p>
-            <a:pPr indent="0" marL="0">
+            <a:pPr marL="0" indent="0">
               <a:buNone/>
             </a:pPr>
             <a:r>
@@ -16248,6 +16205,13 @@
             <a:prstDash val="solid"/>
           </a:ln>
         </p:spPr>
+        <p:txBody>
+          <a:bodyPr/>
+          <a:lstStyle/>
+          <a:p>
+            <a:endParaRPr lang="en-US"/>
+          </a:p>
+        </p:txBody>
       </p:sp>
       <p:sp>
         <p:nvSpPr>
@@ -16270,7 +16234,7 @@
           <a:bodyPr wrap="square" lIns="0" tIns="0" rIns="0" bIns="0" rtlCol="0" anchor="ctr"/>
           <a:lstStyle/>
           <a:p>
-            <a:pPr indent="0" marL="0">
+            <a:pPr marL="0" indent="0">
               <a:buNone/>
             </a:pPr>
             <a:r>
@@ -16309,7 +16273,7 @@
           <a:bodyPr wrap="square" lIns="0" tIns="0" rIns="0" bIns="0" rtlCol="0" anchor="ctr"/>
           <a:lstStyle/>
           <a:p>
-            <a:pPr indent="0" marL="0">
+            <a:pPr marL="0" indent="0">
               <a:buNone/>
             </a:pPr>
             <a:r>
@@ -16348,7 +16312,7 @@
           <a:bodyPr wrap="square" lIns="0" tIns="0" rIns="0" bIns="0" rtlCol="0" anchor="ctr"/>
           <a:lstStyle/>
           <a:p>
-            <a:pPr indent="0" marL="0">
+            <a:pPr marL="0" indent="0">
               <a:buNone/>
             </a:pPr>
             <a:r>
@@ -16392,6 +16356,13 @@
             <a:prstDash val="solid"/>
           </a:ln>
         </p:spPr>
+        <p:txBody>
+          <a:bodyPr/>
+          <a:lstStyle/>
+          <a:p>
+            <a:endParaRPr lang="en-US"/>
+          </a:p>
+        </p:txBody>
       </p:sp>
       <p:sp>
         <p:nvSpPr>
@@ -16414,7 +16385,7 @@
           <a:bodyPr wrap="square" lIns="0" tIns="0" rIns="0" bIns="0" rtlCol="0" anchor="ctr"/>
           <a:lstStyle/>
           <a:p>
-            <a:pPr indent="0" marL="0">
+            <a:pPr marL="0" indent="0">
               <a:buNone/>
             </a:pPr>
             <a:r>
@@ -16453,7 +16424,7 @@
           <a:bodyPr wrap="square" lIns="0" tIns="0" rIns="0" bIns="0" rtlCol="0" anchor="ctr"/>
           <a:lstStyle/>
           <a:p>
-            <a:pPr indent="0" marL="0">
+            <a:pPr marL="0" indent="0">
               <a:buNone/>
             </a:pPr>
             <a:r>
@@ -16492,7 +16463,7 @@
           <a:bodyPr wrap="square" lIns="0" tIns="0" rIns="0" bIns="0" rtlCol="0" anchor="ctr"/>
           <a:lstStyle/>
           <a:p>
-            <a:pPr indent="0" marL="0">
+            <a:pPr marL="0" indent="0">
               <a:buNone/>
             </a:pPr>
             <a:r>
@@ -16536,6 +16507,13 @@
             <a:prstDash val="solid"/>
           </a:ln>
         </p:spPr>
+        <p:txBody>
+          <a:bodyPr/>
+          <a:lstStyle/>
+          <a:p>
+            <a:endParaRPr lang="en-US"/>
+          </a:p>
+        </p:txBody>
       </p:sp>
       <p:sp>
         <p:nvSpPr>
@@ -16558,7 +16536,7 @@
           <a:bodyPr wrap="square" lIns="0" tIns="0" rIns="0" bIns="0" rtlCol="0" anchor="ctr"/>
           <a:lstStyle/>
           <a:p>
-            <a:pPr indent="0" marL="0">
+            <a:pPr marL="0" indent="0">
               <a:buNone/>
             </a:pPr>
             <a:r>
@@ -16597,7 +16575,7 @@
           <a:bodyPr wrap="square" lIns="0" tIns="0" rIns="0" bIns="0" rtlCol="0" anchor="ctr"/>
           <a:lstStyle/>
           <a:p>
-            <a:pPr indent="0" marL="0">
+            <a:pPr marL="0" indent="0">
               <a:buNone/>
             </a:pPr>
             <a:r>
@@ -16636,7 +16614,7 @@
           <a:bodyPr wrap="square" lIns="0" tIns="0" rIns="0" bIns="0" rtlCol="0" anchor="ctr"/>
           <a:lstStyle/>
           <a:p>
-            <a:pPr indent="0" marL="0">
+            <a:pPr marL="0" indent="0">
               <a:buNone/>
             </a:pPr>
             <a:r>
@@ -16680,6 +16658,13 @@
             <a:prstDash val="solid"/>
           </a:ln>
         </p:spPr>
+        <p:txBody>
+          <a:bodyPr/>
+          <a:lstStyle/>
+          <a:p>
+            <a:endParaRPr lang="en-US"/>
+          </a:p>
+        </p:txBody>
       </p:sp>
       <p:sp>
         <p:nvSpPr>
@@ -16702,7 +16687,7 @@
           <a:bodyPr wrap="square" lIns="0" tIns="0" rIns="0" bIns="0" rtlCol="0" anchor="ctr"/>
           <a:lstStyle/>
           <a:p>
-            <a:pPr indent="0" marL="0">
+            <a:pPr marL="0" indent="0">
               <a:buNone/>
             </a:pPr>
             <a:r>
@@ -16741,7 +16726,7 @@
           <a:bodyPr wrap="square" lIns="0" tIns="0" rIns="0" bIns="0" rtlCol="0" anchor="ctr"/>
           <a:lstStyle/>
           <a:p>
-            <a:pPr indent="0" marL="0">
+            <a:pPr marL="0" indent="0">
               <a:buNone/>
             </a:pPr>
             <a:r>
@@ -16780,7 +16765,7 @@
           <a:bodyPr wrap="square" lIns="0" tIns="0" rIns="0" bIns="0" rtlCol="0" anchor="ctr"/>
           <a:lstStyle/>
           <a:p>
-            <a:pPr indent="0" marL="0">
+            <a:pPr marL="0" indent="0">
               <a:buNone/>
             </a:pPr>
             <a:r>
@@ -16824,6 +16809,13 @@
             <a:prstDash val="solid"/>
           </a:ln>
         </p:spPr>
+        <p:txBody>
+          <a:bodyPr/>
+          <a:lstStyle/>
+          <a:p>
+            <a:endParaRPr lang="en-US"/>
+          </a:p>
+        </p:txBody>
       </p:sp>
       <p:sp>
         <p:nvSpPr>
@@ -16846,7 +16838,7 @@
           <a:bodyPr wrap="square" lIns="0" tIns="0" rIns="0" bIns="0" rtlCol="0" anchor="ctr"/>
           <a:lstStyle/>
           <a:p>
-            <a:pPr indent="0" marL="0">
+            <a:pPr marL="0" indent="0">
               <a:buNone/>
             </a:pPr>
             <a:r>
@@ -16885,7 +16877,7 @@
           <a:bodyPr wrap="square" lIns="0" tIns="0" rIns="0" bIns="0" rtlCol="0" anchor="ctr"/>
           <a:lstStyle/>
           <a:p>
-            <a:pPr indent="0" marL="0">
+            <a:pPr marL="0" indent="0">
               <a:buNone/>
             </a:pPr>
             <a:r>
@@ -16924,7 +16916,7 @@
           <a:bodyPr wrap="square" lIns="0" tIns="0" rIns="0" bIns="0" rtlCol="0" anchor="ctr"/>
           <a:lstStyle/>
           <a:p>
-            <a:pPr indent="0" marL="0">
+            <a:pPr marL="0" indent="0">
               <a:buNone/>
             </a:pPr>
             <a:r>
@@ -16963,7 +16955,7 @@
           <a:bodyPr wrap="square" lIns="0" tIns="0" rIns="0" bIns="0" rtlCol="0" anchor="ctr"/>
           <a:lstStyle/>
           <a:p>
-            <a:pPr indent="0" marL="0">
+            <a:pPr marL="0" indent="0">
               <a:buNone/>
             </a:pPr>
             <a:r>
@@ -17002,7 +16994,7 @@
           <a:bodyPr wrap="square" lIns="0" tIns="0" rIns="0" bIns="0" rtlCol="0" anchor="ctr"/>
           <a:lstStyle/>
           <a:p>
-            <a:pPr indent="0" marL="0">
+            <a:pPr marL="0" indent="0">
               <a:buNone/>
             </a:pPr>
             <a:r>
@@ -17041,7 +17033,7 @@
           <a:bodyPr wrap="square" lIns="0" tIns="0" rIns="0" bIns="0" rtlCol="0" anchor="ctr"/>
           <a:lstStyle/>
           <a:p>
-            <a:pPr algn="r" indent="0" marL="0">
+            <a:pPr marL="0" indent="0" algn="r">
               <a:buNone/>
             </a:pPr>
             <a:r>
@@ -17075,6 +17067,7 @@
         <a:solidFill>
           <a:srgbClr val="FFFFFF"/>
         </a:solidFill>
+        <a:effectLst/>
       </p:bgPr>
     </p:bg>
     <p:spTree>
@@ -17112,11 +17105,11 @@
           <a:bodyPr wrap="square" lIns="0" tIns="0" rIns="0" bIns="0" rtlCol="0" anchor="ctr"/>
           <a:lstStyle/>
           <a:p>
-            <a:pPr indent="0" marL="0">
-              <a:buNone/>
-            </a:pPr>
-            <a:r>
-              <a:rPr lang="en-US" sz="1100" b="1" spc="100" kern="0" dirty="0">
+            <a:pPr marL="0" indent="0">
+              <a:buNone/>
+            </a:pPr>
+            <a:r>
+              <a:rPr lang="en-US" sz="1100" b="1" kern="0" spc="100" dirty="0">
                 <a:solidFill>
                   <a:srgbClr val="A98B3C"/>
                 </a:solidFill>
@@ -17151,7 +17144,7 @@
           <a:bodyPr wrap="square" lIns="0" tIns="0" rIns="0" bIns="0" rtlCol="0" anchor="ctr"/>
           <a:lstStyle/>
           <a:p>
-            <a:pPr indent="0" marL="0">
+            <a:pPr marL="0" indent="0">
               <a:buNone/>
             </a:pPr>
             <a:r>
@@ -17195,6 +17188,13 @@
             <a:prstDash val="solid"/>
           </a:ln>
         </p:spPr>
+        <p:txBody>
+          <a:bodyPr/>
+          <a:lstStyle/>
+          <a:p>
+            <a:endParaRPr lang="en-US"/>
+          </a:p>
+        </p:txBody>
       </p:sp>
       <p:sp>
         <p:nvSpPr>
@@ -17220,17 +17220,24 @@
             <a:prstDash val="solid"/>
           </a:ln>
         </p:spPr>
+        <p:txBody>
+          <a:bodyPr/>
+          <a:lstStyle/>
+          <a:p>
+            <a:endParaRPr lang="en-US"/>
+          </a:p>
+        </p:txBody>
       </p:sp>
       <p:pic>
         <p:nvPicPr>
-          <p:cNvPr id="6" name="Image 0" descr="preencoded.png">    </p:cNvPr>
+          <p:cNvPr id="6" name="Image 0" descr="preencoded.png"/>
           <p:cNvPicPr>
             <a:picLocks noChangeAspect="1"/>
           </p:cNvPicPr>
           <p:nvPr/>
         </p:nvPicPr>
         <p:blipFill>
-          <a:blip r:embed="rId1"/>
+          <a:blip r:embed="rId3"/>
           <a:stretch>
             <a:fillRect/>
           </a:stretch>
@@ -17266,7 +17273,7 @@
           <a:bodyPr wrap="square" lIns="0" tIns="0" rIns="0" bIns="0" rtlCol="0" anchor="ctr"/>
           <a:lstStyle/>
           <a:p>
-            <a:pPr indent="0" marL="0">
+            <a:pPr marL="0" indent="0">
               <a:buNone/>
             </a:pPr>
             <a:r>
@@ -17305,7 +17312,7 @@
           <a:bodyPr wrap="square" lIns="0" tIns="0" rIns="0" bIns="0" rtlCol="0" anchor="t"/>
           <a:lstStyle/>
           <a:p>
-            <a:pPr indent="0" marL="0">
+            <a:pPr marL="0" indent="0">
               <a:buNone/>
             </a:pPr>
             <a:r>
@@ -17349,6 +17356,13 @@
             <a:prstDash val="solid"/>
           </a:ln>
         </p:spPr>
+        <p:txBody>
+          <a:bodyPr/>
+          <a:lstStyle/>
+          <a:p>
+            <a:endParaRPr lang="en-US"/>
+          </a:p>
+        </p:txBody>
       </p:sp>
       <p:sp>
         <p:nvSpPr>
@@ -17374,17 +17388,24 @@
             <a:prstDash val="solid"/>
           </a:ln>
         </p:spPr>
+        <p:txBody>
+          <a:bodyPr/>
+          <a:lstStyle/>
+          <a:p>
+            <a:endParaRPr lang="en-US"/>
+          </a:p>
+        </p:txBody>
       </p:sp>
       <p:pic>
         <p:nvPicPr>
-          <p:cNvPr id="11" name="Image 1" descr="preencoded.png">    </p:cNvPr>
+          <p:cNvPr id="11" name="Image 1" descr="preencoded.png"/>
           <p:cNvPicPr>
             <a:picLocks noChangeAspect="1"/>
           </p:cNvPicPr>
           <p:nvPr/>
         </p:nvPicPr>
         <p:blipFill>
-          <a:blip r:embed="rId2"/>
+          <a:blip r:embed="rId4"/>
           <a:stretch>
             <a:fillRect/>
           </a:stretch>
@@ -17420,7 +17441,7 @@
           <a:bodyPr wrap="square" lIns="0" tIns="0" rIns="0" bIns="0" rtlCol="0" anchor="ctr"/>
           <a:lstStyle/>
           <a:p>
-            <a:pPr indent="0" marL="0">
+            <a:pPr marL="0" indent="0">
               <a:buNone/>
             </a:pPr>
             <a:r>
@@ -17459,7 +17480,7 @@
           <a:bodyPr wrap="square" lIns="0" tIns="0" rIns="0" bIns="0" rtlCol="0" anchor="t"/>
           <a:lstStyle/>
           <a:p>
-            <a:pPr indent="0" marL="0">
+            <a:pPr marL="0" indent="0">
               <a:buNone/>
             </a:pPr>
             <a:r>
@@ -17503,6 +17524,13 @@
             <a:prstDash val="solid"/>
           </a:ln>
         </p:spPr>
+        <p:txBody>
+          <a:bodyPr/>
+          <a:lstStyle/>
+          <a:p>
+            <a:endParaRPr lang="en-US"/>
+          </a:p>
+        </p:txBody>
       </p:sp>
       <p:sp>
         <p:nvSpPr>
@@ -17528,17 +17556,24 @@
             <a:prstDash val="solid"/>
           </a:ln>
         </p:spPr>
+        <p:txBody>
+          <a:bodyPr/>
+          <a:lstStyle/>
+          <a:p>
+            <a:endParaRPr lang="en-US"/>
+          </a:p>
+        </p:txBody>
       </p:sp>
       <p:pic>
         <p:nvPicPr>
-          <p:cNvPr id="16" name="Image 2" descr="preencoded.png">    </p:cNvPr>
+          <p:cNvPr id="16" name="Image 2" descr="preencoded.png"/>
           <p:cNvPicPr>
             <a:picLocks noChangeAspect="1"/>
           </p:cNvPicPr>
           <p:nvPr/>
         </p:nvPicPr>
         <p:blipFill>
-          <a:blip r:embed="rId3"/>
+          <a:blip r:embed="rId5"/>
           <a:stretch>
             <a:fillRect/>
           </a:stretch>
@@ -17574,7 +17609,7 @@
           <a:bodyPr wrap="square" lIns="0" tIns="0" rIns="0" bIns="0" rtlCol="0" anchor="ctr"/>
           <a:lstStyle/>
           <a:p>
-            <a:pPr indent="0" marL="0">
+            <a:pPr marL="0" indent="0">
               <a:buNone/>
             </a:pPr>
             <a:r>
@@ -17613,7 +17648,7 @@
           <a:bodyPr wrap="square" lIns="0" tIns="0" rIns="0" bIns="0" rtlCol="0" anchor="t"/>
           <a:lstStyle/>
           <a:p>
-            <a:pPr indent="0" marL="0">
+            <a:pPr marL="0" indent="0">
               <a:buNone/>
             </a:pPr>
             <a:r>
@@ -17657,6 +17692,13 @@
             <a:prstDash val="solid"/>
           </a:ln>
         </p:spPr>
+        <p:txBody>
+          <a:bodyPr/>
+          <a:lstStyle/>
+          <a:p>
+            <a:endParaRPr lang="en-US"/>
+          </a:p>
+        </p:txBody>
       </p:sp>
       <p:sp>
         <p:nvSpPr>
@@ -17682,17 +17724,24 @@
             <a:prstDash val="solid"/>
           </a:ln>
         </p:spPr>
+        <p:txBody>
+          <a:bodyPr/>
+          <a:lstStyle/>
+          <a:p>
+            <a:endParaRPr lang="en-US"/>
+          </a:p>
+        </p:txBody>
       </p:sp>
       <p:pic>
         <p:nvPicPr>
-          <p:cNvPr id="21" name="Image 3" descr="preencoded.png">    </p:cNvPr>
+          <p:cNvPr id="21" name="Image 3" descr="preencoded.png"/>
           <p:cNvPicPr>
             <a:picLocks noChangeAspect="1"/>
           </p:cNvPicPr>
           <p:nvPr/>
         </p:nvPicPr>
         <p:blipFill>
-          <a:blip r:embed="rId4"/>
+          <a:blip r:embed="rId6"/>
           <a:stretch>
             <a:fillRect/>
           </a:stretch>
@@ -17728,7 +17777,7 @@
           <a:bodyPr wrap="square" lIns="0" tIns="0" rIns="0" bIns="0" rtlCol="0" anchor="ctr"/>
           <a:lstStyle/>
           <a:p>
-            <a:pPr indent="0" marL="0">
+            <a:pPr marL="0" indent="0">
               <a:buNone/>
             </a:pPr>
             <a:r>
@@ -17767,7 +17816,7 @@
           <a:bodyPr wrap="square" lIns="0" tIns="0" rIns="0" bIns="0" rtlCol="0" anchor="t"/>
           <a:lstStyle/>
           <a:p>
-            <a:pPr indent="0" marL="0">
+            <a:pPr marL="0" indent="0">
               <a:buNone/>
             </a:pPr>
             <a:r>
@@ -17806,7 +17855,7 @@
           <a:bodyPr wrap="square" lIns="0" tIns="0" rIns="0" bIns="0" rtlCol="0" anchor="ctr"/>
           <a:lstStyle/>
           <a:p>
-            <a:pPr indent="0" marL="0">
+            <a:pPr marL="0" indent="0">
               <a:buNone/>
             </a:pPr>
             <a:r>
@@ -17845,7 +17894,7 @@
           <a:bodyPr wrap="square" lIns="0" tIns="0" rIns="0" bIns="0" rtlCol="0" anchor="ctr"/>
           <a:lstStyle/>
           <a:p>
-            <a:pPr algn="r" indent="0" marL="0">
+            <a:pPr marL="0" indent="0" algn="r">
               <a:buNone/>
             </a:pPr>
             <a:r>
@@ -17879,6 +17928,7 @@
         <a:solidFill>
           <a:srgbClr val="2B2E36"/>
         </a:solidFill>
+        <a:effectLst/>
       </p:bgPr>
     </p:bg>
     <p:spTree>
@@ -17916,11 +17966,11 @@
           <a:bodyPr wrap="square" lIns="0" tIns="0" rIns="0" bIns="0" rtlCol="0" anchor="t"/>
           <a:lstStyle/>
           <a:p>
-            <a:pPr indent="0" marL="0">
-              <a:buNone/>
-            </a:pPr>
-            <a:r>
-              <a:rPr lang="en-US" sz="1200" b="1" spc="100" kern="0" dirty="0">
+            <a:pPr marL="0" indent="0">
+              <a:buNone/>
+            </a:pPr>
+            <a:r>
+              <a:rPr lang="en-US" sz="1200" b="1" kern="0" spc="100" dirty="0">
                 <a:solidFill>
                   <a:srgbClr val="DCC37A"/>
                 </a:solidFill>
@@ -17955,7 +18005,7 @@
           <a:bodyPr wrap="square" lIns="0" tIns="0" rIns="0" bIns="0" rtlCol="0" anchor="ctr"/>
           <a:lstStyle/>
           <a:p>
-            <a:pPr indent="0" marL="0">
+            <a:pPr marL="0" indent="0">
               <a:buNone/>
             </a:pPr>
             <a:r>
@@ -17999,6 +18049,13 @@
             <a:prstDash val="solid"/>
           </a:ln>
         </p:spPr>
+        <p:txBody>
+          <a:bodyPr/>
+          <a:lstStyle/>
+          <a:p>
+            <a:endParaRPr lang="en-US"/>
+          </a:p>
+        </p:txBody>
       </p:sp>
       <p:sp>
         <p:nvSpPr>
@@ -18026,6 +18083,13 @@
             <a:prstDash val="solid"/>
           </a:ln>
         </p:spPr>
+        <p:txBody>
+          <a:bodyPr/>
+          <a:lstStyle/>
+          <a:p>
+            <a:endParaRPr lang="en-US"/>
+          </a:p>
+        </p:txBody>
       </p:sp>
       <p:sp>
         <p:nvSpPr>
@@ -18048,11 +18112,11 @@
           <a:bodyPr wrap="square" lIns="0" tIns="0" rIns="0" bIns="0" rtlCol="0" anchor="t"/>
           <a:lstStyle/>
           <a:p>
-            <a:pPr indent="0" marL="0">
-              <a:buNone/>
-            </a:pPr>
-            <a:r>
-              <a:rPr lang="en-US" sz="1100" b="1" spc="100" kern="0" dirty="0">
+            <a:pPr marL="0" indent="0">
+              <a:buNone/>
+            </a:pPr>
+            <a:r>
+              <a:rPr lang="en-US" sz="1100" b="1" kern="0" spc="100" dirty="0">
                 <a:solidFill>
                   <a:srgbClr val="9CBFD6"/>
                 </a:solidFill>
@@ -18193,11 +18257,11 @@
           <a:bodyPr wrap="square" lIns="0" tIns="0" rIns="0" bIns="0" rtlCol="0" anchor="t"/>
           <a:lstStyle/>
           <a:p>
-            <a:pPr indent="0" marL="0">
-              <a:buNone/>
-            </a:pPr>
-            <a:r>
-              <a:rPr lang="en-US" sz="1100" b="1" spc="100" kern="0" dirty="0">
+            <a:pPr marL="0" indent="0">
+              <a:buNone/>
+            </a:pPr>
+            <a:r>
+              <a:rPr lang="en-US" sz="1100" b="1" kern="0" spc="100" dirty="0">
                 <a:solidFill>
                   <a:srgbClr val="DCC37A"/>
                 </a:solidFill>
@@ -18317,7 +18381,7 @@
           <a:bodyPr wrap="square" lIns="0" tIns="0" rIns="0" bIns="0" rtlCol="0" anchor="t"/>
           <a:lstStyle/>
           <a:p>
-            <a:pPr indent="0" marL="0">
+            <a:pPr marL="0" indent="0">
               <a:buNone/>
             </a:pPr>
             <a:r>
@@ -18332,45 +18396,6 @@
               <a:t>The Mineralogy Extension is heading for ratification: your feedback on the compound specimen model is welcome.</a:t>
             </a:r>
             <a:endParaRPr lang="en-US" sz="1300" dirty="0"/>
-          </a:p>
-        </p:txBody>
-      </p:sp>
-      <p:sp>
-        <p:nvSpPr>
-          <p:cNvPr id="11" name="Text 9"/>
-          <p:cNvSpPr txBox="1"/>
-          <p:nvPr/>
-        </p:nvSpPr>
-        <p:spPr>
-          <a:xfrm>
-            <a:off x="548640" y="5440680"/>
-            <a:ext cx="10972800" cy="457200"/>
-          </a:xfrm>
-          <a:prstGeom prst="rect">
-            <a:avLst/>
-          </a:prstGeom>
-          <a:noFill/>
-          <a:ln/>
-        </p:spPr>
-        <p:txBody>
-          <a:bodyPr wrap="square" lIns="0" tIns="0" rIns="0" bIns="0" rtlCol="0" anchor="ctr"/>
-          <a:lstStyle/>
-          <a:p>
-            <a:pPr indent="0" marL="0">
-              <a:buNone/>
-            </a:pPr>
-            <a:r>
-              <a:rPr lang="en-US" sz="2000" i="1" dirty="0">
-                <a:solidFill>
-                  <a:srgbClr val="9CBFD6"/>
-                </a:solidFill>
-                <a:latin typeface="Cambria" pitchFamily="34" charset="0"/>
-                <a:ea typeface="Cambria" pitchFamily="34" charset="-122"/>
-                <a:cs typeface="Cambria" pitchFamily="34" charset="-120"/>
-              </a:rPr>
-              <a:t>Thank you for flipping the script with me.</a:t>
-            </a:r>
-            <a:endParaRPr lang="en-US" sz="2000" dirty="0"/>
           </a:p>
         </p:txBody>
       </p:sp>
@@ -18395,7 +18420,7 @@
           <a:bodyPr wrap="square" lIns="0" tIns="0" rIns="0" bIns="0" rtlCol="0" anchor="ctr"/>
           <a:lstStyle/>
           <a:p>
-            <a:pPr indent="0" marL="0">
+            <a:pPr marL="0" indent="0">
               <a:buNone/>
             </a:pPr>
             <a:r>
@@ -18434,7 +18459,7 @@
           <a:bodyPr wrap="square" lIns="0" tIns="0" rIns="0" bIns="0" rtlCol="0" anchor="ctr"/>
           <a:lstStyle/>
           <a:p>
-            <a:pPr algn="r" indent="0" marL="0">
+            <a:pPr marL="0" indent="0" algn="r">
               <a:buNone/>
             </a:pPr>
             <a:r>
@@ -18468,6 +18493,7 @@
         <a:solidFill>
           <a:srgbClr val="2B2E36"/>
         </a:solidFill>
+        <a:effectLst/>
       </p:bgPr>
     </p:bg>
     <p:spTree>
@@ -18486,14 +18512,14 @@
       </p:grpSpPr>
       <p:pic>
         <p:nvPicPr>
-          <p:cNvPr id="2" name="Image 0" descr="/home/claude/oslo_logo.png">    </p:cNvPr>
+          <p:cNvPr id="2" name="Image 0" descr="/home/claude/oslo_logo.png"/>
           <p:cNvPicPr>
             <a:picLocks noChangeAspect="1"/>
           </p:cNvPicPr>
           <p:nvPr/>
         </p:nvPicPr>
         <p:blipFill>
-          <a:blip r:embed="rId1"/>
+          <a:blip r:embed="rId3"/>
           <a:stretch>
             <a:fillRect/>
           </a:stretch>
@@ -18529,7 +18555,7 @@
           <a:bodyPr wrap="square" lIns="0" tIns="0" rIns="0" bIns="0" rtlCol="0" anchor="ctr"/>
           <a:lstStyle/>
           <a:p>
-            <a:pPr indent="0" marL="0">
+            <a:pPr marL="0" indent="0">
               <a:buNone/>
             </a:pPr>
             <a:r>
@@ -18544,45 +18570,6 @@
               <a:t>Thank you</a:t>
             </a:r>
             <a:endParaRPr lang="en-US" sz="4800" dirty="0"/>
-          </a:p>
-        </p:txBody>
-      </p:sp>
-      <p:sp>
-        <p:nvSpPr>
-          <p:cNvPr id="4" name="Text 1"/>
-          <p:cNvSpPr txBox="1"/>
-          <p:nvPr/>
-        </p:nvSpPr>
-        <p:spPr>
-          <a:xfrm>
-            <a:off x="548640" y="2103120"/>
-            <a:ext cx="9144000" cy="640080"/>
-          </a:xfrm>
-          <a:prstGeom prst="rect">
-            <a:avLst/>
-          </a:prstGeom>
-          <a:noFill/>
-          <a:ln/>
-        </p:spPr>
-        <p:txBody>
-          <a:bodyPr wrap="square" lIns="0" tIns="0" rIns="0" bIns="0" rtlCol="0" anchor="ctr"/>
-          <a:lstStyle/>
-          <a:p>
-            <a:pPr indent="0" marL="0">
-              <a:buNone/>
-            </a:pPr>
-            <a:r>
-              <a:rPr lang="en-US" sz="2600" b="1" dirty="0">
-                <a:solidFill>
-                  <a:srgbClr val="9CBFD6"/>
-                </a:solidFill>
-                <a:latin typeface="Cambria" pitchFamily="34" charset="0"/>
-                <a:ea typeface="Cambria" pitchFamily="34" charset="-122"/>
-                <a:cs typeface="Cambria" pitchFamily="34" charset="-120"/>
-              </a:rPr>
-              <a:t>Keep going with the repository after today.</a:t>
-            </a:r>
-            <a:endParaRPr lang="en-US" sz="2600" dirty="0"/>
           </a:p>
         </p:txBody>
       </p:sp>
@@ -18610,17 +18597,24 @@
             <a:prstDash val="solid"/>
           </a:ln>
         </p:spPr>
+        <p:txBody>
+          <a:bodyPr/>
+          <a:lstStyle/>
+          <a:p>
+            <a:endParaRPr lang="en-US"/>
+          </a:p>
+        </p:txBody>
       </p:sp>
       <p:pic>
         <p:nvPicPr>
-          <p:cNvPr id="6" name="Image 1" descr="preencoded.png">    </p:cNvPr>
+          <p:cNvPr id="6" name="Image 1" descr="preencoded.png"/>
           <p:cNvPicPr>
             <a:picLocks noChangeAspect="1"/>
           </p:cNvPicPr>
           <p:nvPr/>
         </p:nvPicPr>
         <p:blipFill>
-          <a:blip r:embed="rId2"/>
+          <a:blip r:embed="rId4"/>
           <a:stretch>
             <a:fillRect/>
           </a:stretch>
@@ -18656,7 +18650,7 @@
           <a:bodyPr wrap="square" lIns="0" tIns="0" rIns="0" bIns="0" rtlCol="0" anchor="t"/>
           <a:lstStyle/>
           <a:p>
-            <a:pPr indent="0" marL="0">
+            <a:pPr marL="0" indent="0">
               <a:buNone/>
             </a:pPr>
             <a:r>
@@ -18695,7 +18689,7 @@
           <a:bodyPr wrap="square" lIns="0" tIns="0" rIns="0" bIns="0" rtlCol="0" anchor="t"/>
           <a:lstStyle/>
           <a:p>
-            <a:pPr indent="0" marL="0">
+            <a:pPr marL="0" indent="0">
               <a:buNone/>
             </a:pPr>
             <a:r>
@@ -18737,17 +18731,24 @@
             <a:prstDash val="solid"/>
           </a:ln>
         </p:spPr>
+        <p:txBody>
+          <a:bodyPr/>
+          <a:lstStyle/>
+          <a:p>
+            <a:endParaRPr lang="en-US"/>
+          </a:p>
+        </p:txBody>
       </p:sp>
       <p:pic>
         <p:nvPicPr>
-          <p:cNvPr id="10" name="Image 2" descr="preencoded.png">    </p:cNvPr>
+          <p:cNvPr id="10" name="Image 2" descr="preencoded.png"/>
           <p:cNvPicPr>
             <a:picLocks noChangeAspect="1"/>
           </p:cNvPicPr>
           <p:nvPr/>
         </p:nvPicPr>
         <p:blipFill>
-          <a:blip r:embed="rId3"/>
+          <a:blip r:embed="rId5"/>
           <a:stretch>
             <a:fillRect/>
           </a:stretch>
@@ -18783,7 +18784,7 @@
           <a:bodyPr wrap="square" lIns="0" tIns="0" rIns="0" bIns="0" rtlCol="0" anchor="t"/>
           <a:lstStyle/>
           <a:p>
-            <a:pPr indent="0" marL="0">
+            <a:pPr marL="0" indent="0">
               <a:buNone/>
             </a:pPr>
             <a:r>
@@ -18822,7 +18823,7 @@
           <a:bodyPr wrap="square" lIns="0" tIns="0" rIns="0" bIns="0" rtlCol="0" anchor="t"/>
           <a:lstStyle/>
           <a:p>
-            <a:pPr indent="0" marL="0">
+            <a:pPr marL="0" indent="0">
               <a:buNone/>
             </a:pPr>
             <a:r>
@@ -18864,17 +18865,24 @@
             <a:prstDash val="solid"/>
           </a:ln>
         </p:spPr>
+        <p:txBody>
+          <a:bodyPr/>
+          <a:lstStyle/>
+          <a:p>
+            <a:endParaRPr lang="en-US"/>
+          </a:p>
+        </p:txBody>
       </p:sp>
       <p:pic>
         <p:nvPicPr>
-          <p:cNvPr id="14" name="Image 3" descr="preencoded.png">    </p:cNvPr>
+          <p:cNvPr id="14" name="Image 3" descr="preencoded.png"/>
           <p:cNvPicPr>
             <a:picLocks noChangeAspect="1"/>
           </p:cNvPicPr>
           <p:nvPr/>
         </p:nvPicPr>
         <p:blipFill>
-          <a:blip r:embed="rId4"/>
+          <a:blip r:embed="rId6"/>
           <a:stretch>
             <a:fillRect/>
           </a:stretch>
@@ -18910,7 +18918,7 @@
           <a:bodyPr wrap="square" lIns="0" tIns="0" rIns="0" bIns="0" rtlCol="0" anchor="t"/>
           <a:lstStyle/>
           <a:p>
-            <a:pPr indent="0" marL="0">
+            <a:pPr marL="0" indent="0">
               <a:buNone/>
             </a:pPr>
             <a:r>
@@ -18949,7 +18957,7 @@
           <a:bodyPr wrap="square" lIns="0" tIns="0" rIns="0" bIns="0" rtlCol="0" anchor="t"/>
           <a:lstStyle/>
           <a:p>
-            <a:pPr indent="0" marL="0">
+            <a:pPr marL="0" indent="0">
               <a:buNone/>
             </a:pPr>
             <a:r>
@@ -18988,7 +18996,7 @@
           <a:bodyPr wrap="square" lIns="0" tIns="0" rIns="0" bIns="0" rtlCol="0" anchor="t"/>
           <a:lstStyle/>
           <a:p>
-            <a:pPr indent="0" marL="0">
+            <a:pPr marL="0" indent="0">
               <a:buNone/>
             </a:pPr>
             <a:r>
@@ -19022,6 +19030,7 @@
         <a:solidFill>
           <a:srgbClr val="FFFFFF"/>
         </a:solidFill>
+        <a:effectLst/>
       </p:bgPr>
     </p:bg>
     <p:spTree>
@@ -19059,11 +19068,11 @@
           <a:bodyPr wrap="square" lIns="0" tIns="0" rIns="0" bIns="0" rtlCol="0" anchor="ctr"/>
           <a:lstStyle/>
           <a:p>
-            <a:pPr indent="0" marL="0">
-              <a:buNone/>
-            </a:pPr>
-            <a:r>
-              <a:rPr lang="en-US" sz="1100" b="1" spc="100" kern="0" dirty="0">
+            <a:pPr marL="0" indent="0">
+              <a:buNone/>
+            </a:pPr>
+            <a:r>
+              <a:rPr lang="en-US" sz="1100" b="1" kern="0" spc="100" dirty="0">
                 <a:solidFill>
                   <a:srgbClr val="A98B3C"/>
                 </a:solidFill>
@@ -19098,7 +19107,7 @@
           <a:bodyPr wrap="square" lIns="0" tIns="0" rIns="0" bIns="0" rtlCol="0" anchor="ctr"/>
           <a:lstStyle/>
           <a:p>
-            <a:pPr indent="0" marL="0">
+            <a:pPr marL="0" indent="0">
               <a:buNone/>
             </a:pPr>
             <a:r>
@@ -19137,7 +19146,7 @@
           <a:bodyPr wrap="square" lIns="0" tIns="0" rIns="0" bIns="0" rtlCol="0" anchor="ctr"/>
           <a:lstStyle/>
           <a:p>
-            <a:pPr indent="0" marL="0">
+            <a:pPr marL="0" indent="0">
               <a:buNone/>
             </a:pPr>
             <a:r>
@@ -19181,6 +19190,13 @@
             <a:prstDash val="solid"/>
           </a:ln>
         </p:spPr>
+        <p:txBody>
+          <a:bodyPr/>
+          <a:lstStyle/>
+          <a:p>
+            <a:endParaRPr lang="en-US"/>
+          </a:p>
+        </p:txBody>
       </p:sp>
       <p:sp>
         <p:nvSpPr>
@@ -19203,7 +19219,7 @@
           <a:bodyPr wrap="square" lIns="0" tIns="0" rIns="0" bIns="0" rtlCol="0" anchor="t"/>
           <a:lstStyle/>
           <a:p>
-            <a:pPr indent="0" marL="0">
+            <a:pPr marL="0" indent="0">
               <a:buNone/>
             </a:pPr>
             <a:r>
@@ -19245,17 +19261,24 @@
             <a:prstDash val="solid"/>
           </a:ln>
         </p:spPr>
+        <p:txBody>
+          <a:bodyPr/>
+          <a:lstStyle/>
+          <a:p>
+            <a:endParaRPr lang="en-US"/>
+          </a:p>
+        </p:txBody>
       </p:sp>
       <p:pic>
         <p:nvPicPr>
-          <p:cNvPr id="8" name="Image 0" descr="preencoded.png">    </p:cNvPr>
+          <p:cNvPr id="8" name="Image 0" descr="preencoded.png"/>
           <p:cNvPicPr>
             <a:picLocks noChangeAspect="1"/>
           </p:cNvPicPr>
           <p:nvPr/>
         </p:nvPicPr>
         <p:blipFill>
-          <a:blip r:embed="rId1"/>
+          <a:blip r:embed="rId3"/>
           <a:stretch>
             <a:fillRect/>
           </a:stretch>
@@ -19291,7 +19314,7 @@
           <a:bodyPr wrap="square" lIns="0" tIns="0" rIns="0" bIns="0" rtlCol="0" anchor="ctr"/>
           <a:lstStyle/>
           <a:p>
-            <a:pPr indent="0" marL="0">
+            <a:pPr marL="0" indent="0">
               <a:buNone/>
             </a:pPr>
             <a:r>
@@ -19330,7 +19353,7 @@
           <a:bodyPr wrap="square" lIns="0" tIns="0" rIns="0" bIns="0" rtlCol="0" anchor="t"/>
           <a:lstStyle/>
           <a:p>
-            <a:pPr indent="0" marL="0">
+            <a:pPr marL="0" indent="0">
               <a:lnSpc>
                 <a:spcPct val="110000"/>
               </a:lnSpc>
@@ -19347,53 +19370,47 @@
               </a:rPr>
               <a:t>Lucide icon set, lucide.dev. </a:t>
             </a:r>
-            <a:pPr indent="0" marL="0">
+            <a:r>
+              <a:rPr lang="en-US" sz="1250" dirty="0">
+                <a:solidFill>
+                  <a:srgbClr val="50555F"/>
+                </a:solidFill>
+                <a:latin typeface="Calibri" pitchFamily="34" charset="0"/>
+                <a:ea typeface="Calibri" pitchFamily="34" charset="-122"/>
+                <a:cs typeface="Calibri" pitchFamily="34" charset="-120"/>
+              </a:rPr>
+              <a:t>ISC License, © Lucide Contributors. Portions derived from Feather (MIT License, © Cole Bemis). Rendered through the react-icons package (v5.6.0, MIT License) and recoloured for this deck.</a:t>
+            </a:r>
+            <a:endParaRPr lang="en-US" sz="1250" dirty="0"/>
+          </a:p>
+          <a:p>
+            <a:pPr marL="0" indent="0">
               <a:lnSpc>
                 <a:spcPct val="110000"/>
               </a:lnSpc>
               <a:buNone/>
             </a:pPr>
             <a:r>
-              <a:rPr lang="en-US" sz="1250" dirty="0">
-                <a:solidFill>
-                  <a:srgbClr val="50555F"/>
-                </a:solidFill>
-                <a:latin typeface="Calibri" pitchFamily="34" charset="0"/>
-                <a:ea typeface="Calibri" pitchFamily="34" charset="-122"/>
-                <a:cs typeface="Calibri" pitchFamily="34" charset="-120"/>
-              </a:rPr>
-              <a:t>ISC License, © Lucide Contributors. Portions derived from Feather (MIT License, © Cole Bemis). Rendered through the react-icons package (v5.6.0, MIT License) and recoloured for this deck.</a:t>
+              <a:rPr lang="en-US" sz="600" dirty="0">
+                <a:solidFill>
+                  <a:srgbClr val="000000"/>
+                </a:solidFill>
+                <a:latin typeface="Calibri" pitchFamily="34" charset="0"/>
+                <a:ea typeface="Calibri" pitchFamily="34" charset="-122"/>
+                <a:cs typeface="Calibri" pitchFamily="34" charset="-120"/>
+              </a:rPr>
+              <a:t> </a:t>
             </a:r>
             <a:endParaRPr lang="en-US" sz="1250" dirty="0"/>
           </a:p>
           <a:p>
-            <a:pPr indent="0" marL="0">
+            <a:pPr marL="0" indent="0">
               <a:lnSpc>
                 <a:spcPct val="110000"/>
               </a:lnSpc>
               <a:buNone/>
             </a:pPr>
             <a:r>
-              <a:rPr lang="en-US" sz="600" dirty="0">
-                <a:solidFill>
-                  <a:srgbClr val="000000"/>
-                </a:solidFill>
-                <a:latin typeface="Calibri" pitchFamily="34" charset="0"/>
-                <a:ea typeface="Calibri" pitchFamily="34" charset="-122"/>
-                <a:cs typeface="Calibri" pitchFamily="34" charset="-120"/>
-              </a:rPr>
-              <a:t> </a:t>
-            </a:r>
-            <a:endParaRPr lang="en-US" sz="1250" dirty="0"/>
-          </a:p>
-          <a:p>
-            <a:pPr indent="0" marL="0">
-              <a:lnSpc>
-                <a:spcPct val="110000"/>
-              </a:lnSpc>
-              <a:buNone/>
-            </a:pPr>
-            <a:r>
               <a:rPr lang="en-US" sz="1250" b="1" dirty="0">
                 <a:solidFill>
                   <a:srgbClr val="2B2E36"/>
@@ -19404,12 +19421,6 @@
               </a:rPr>
               <a:t>Icons used: </a:t>
             </a:r>
-            <a:pPr indent="0" marL="0">
-              <a:lnSpc>
-                <a:spcPct val="110000"/>
-              </a:lnSpc>
-              <a:buNone/>
-            </a:pPr>
             <a:r>
               <a:rPr lang="en-US" sz="1250" dirty="0">
                 <a:solidFill>
@@ -19449,17 +19460,24 @@
             <a:prstDash val="solid"/>
           </a:ln>
         </p:spPr>
+        <p:txBody>
+          <a:bodyPr/>
+          <a:lstStyle/>
+          <a:p>
+            <a:endParaRPr lang="en-US"/>
+          </a:p>
+        </p:txBody>
       </p:sp>
       <p:pic>
         <p:nvPicPr>
-          <p:cNvPr id="12" name="Image 1" descr="preencoded.png">    </p:cNvPr>
+          <p:cNvPr id="12" name="Image 1" descr="preencoded.png"/>
           <p:cNvPicPr>
             <a:picLocks noChangeAspect="1"/>
           </p:cNvPicPr>
           <p:nvPr/>
         </p:nvPicPr>
         <p:blipFill>
-          <a:blip r:embed="rId2"/>
+          <a:blip r:embed="rId4"/>
           <a:stretch>
             <a:fillRect/>
           </a:stretch>
@@ -19495,7 +19513,7 @@
           <a:bodyPr wrap="square" lIns="0" tIns="0" rIns="0" bIns="0" rtlCol="0" anchor="t"/>
           <a:lstStyle/>
           <a:p>
-            <a:pPr indent="0" marL="0">
+            <a:pPr marL="0" indent="0">
               <a:buNone/>
             </a:pPr>
             <a:r>
@@ -19534,7 +19552,7 @@
           <a:bodyPr wrap="square" lIns="0" tIns="0" rIns="0" bIns="0" rtlCol="0" anchor="t"/>
           <a:lstStyle/>
           <a:p>
-            <a:pPr indent="0" marL="0">
+            <a:pPr marL="0" indent="0">
               <a:buNone/>
             </a:pPr>
             <a:r>
@@ -19576,17 +19594,24 @@
             <a:prstDash val="solid"/>
           </a:ln>
         </p:spPr>
+        <p:txBody>
+          <a:bodyPr/>
+          <a:lstStyle/>
+          <a:p>
+            <a:endParaRPr lang="en-US"/>
+          </a:p>
+        </p:txBody>
       </p:sp>
       <p:pic>
         <p:nvPicPr>
-          <p:cNvPr id="16" name="Image 2" descr="preencoded.png">    </p:cNvPr>
+          <p:cNvPr id="16" name="Image 2" descr="preencoded.png"/>
           <p:cNvPicPr>
             <a:picLocks noChangeAspect="1"/>
           </p:cNvPicPr>
           <p:nvPr/>
         </p:nvPicPr>
         <p:blipFill>
-          <a:blip r:embed="rId3"/>
+          <a:blip r:embed="rId5"/>
           <a:stretch>
             <a:fillRect/>
           </a:stretch>
@@ -19622,7 +19647,7 @@
           <a:bodyPr wrap="square" lIns="0" tIns="0" rIns="0" bIns="0" rtlCol="0" anchor="t"/>
           <a:lstStyle/>
           <a:p>
-            <a:pPr indent="0" marL="0">
+            <a:pPr marL="0" indent="0">
               <a:buNone/>
             </a:pPr>
             <a:r>
@@ -19661,7 +19686,7 @@
           <a:bodyPr wrap="square" lIns="0" tIns="0" rIns="0" bIns="0" rtlCol="0" anchor="t"/>
           <a:lstStyle/>
           <a:p>
-            <a:pPr indent="0" marL="0">
+            <a:pPr marL="0" indent="0">
               <a:buNone/>
             </a:pPr>
             <a:r>
@@ -19703,17 +19728,24 @@
             <a:prstDash val="solid"/>
           </a:ln>
         </p:spPr>
+        <p:txBody>
+          <a:bodyPr/>
+          <a:lstStyle/>
+          <a:p>
+            <a:endParaRPr lang="en-US"/>
+          </a:p>
+        </p:txBody>
       </p:sp>
       <p:pic>
         <p:nvPicPr>
-          <p:cNvPr id="20" name="Image 3" descr="preencoded.png">    </p:cNvPr>
+          <p:cNvPr id="20" name="Image 3" descr="preencoded.png"/>
           <p:cNvPicPr>
             <a:picLocks noChangeAspect="1"/>
           </p:cNvPicPr>
           <p:nvPr/>
         </p:nvPicPr>
         <p:blipFill>
-          <a:blip r:embed="rId4"/>
+          <a:blip r:embed="rId6"/>
           <a:stretch>
             <a:fillRect/>
           </a:stretch>
@@ -19749,7 +19781,7 @@
           <a:bodyPr wrap="square" lIns="0" tIns="0" rIns="0" bIns="0" rtlCol="0" anchor="t"/>
           <a:lstStyle/>
           <a:p>
-            <a:pPr indent="0" marL="0">
+            <a:pPr marL="0" indent="0">
               <a:buNone/>
             </a:pPr>
             <a:r>
@@ -19788,7 +19820,7 @@
           <a:bodyPr wrap="square" lIns="0" tIns="0" rIns="0" bIns="0" rtlCol="0" anchor="t"/>
           <a:lstStyle/>
           <a:p>
-            <a:pPr indent="0" marL="0">
+            <a:pPr marL="0" indent="0">
               <a:buNone/>
             </a:pPr>
             <a:r>
@@ -19830,17 +19862,24 @@
             <a:prstDash val="solid"/>
           </a:ln>
         </p:spPr>
+        <p:txBody>
+          <a:bodyPr/>
+          <a:lstStyle/>
+          <a:p>
+            <a:endParaRPr lang="en-US"/>
+          </a:p>
+        </p:txBody>
       </p:sp>
       <p:pic>
         <p:nvPicPr>
-          <p:cNvPr id="24" name="Image 4" descr="preencoded.png">    </p:cNvPr>
+          <p:cNvPr id="24" name="Image 4" descr="preencoded.png"/>
           <p:cNvPicPr>
             <a:picLocks noChangeAspect="1"/>
           </p:cNvPicPr>
           <p:nvPr/>
         </p:nvPicPr>
         <p:blipFill>
-          <a:blip r:embed="rId5"/>
+          <a:blip r:embed="rId7"/>
           <a:stretch>
             <a:fillRect/>
           </a:stretch>
@@ -19876,7 +19915,7 @@
           <a:bodyPr wrap="square" lIns="0" tIns="0" rIns="0" bIns="0" rtlCol="0" anchor="t"/>
           <a:lstStyle/>
           <a:p>
-            <a:pPr indent="0" marL="0">
+            <a:pPr marL="0" indent="0">
               <a:buNone/>
             </a:pPr>
             <a:r>
@@ -19915,7 +19954,7 @@
           <a:bodyPr wrap="square" lIns="0" tIns="0" rIns="0" bIns="0" rtlCol="0" anchor="t"/>
           <a:lstStyle/>
           <a:p>
-            <a:pPr indent="0" marL="0">
+            <a:pPr marL="0" indent="0">
               <a:buNone/>
             </a:pPr>
             <a:r>
@@ -19954,7 +19993,7 @@
           <a:bodyPr wrap="square" lIns="0" tIns="0" rIns="0" bIns="0" rtlCol="0" anchor="ctr"/>
           <a:lstStyle/>
           <a:p>
-            <a:pPr indent="0" marL="0">
+            <a:pPr marL="0" indent="0">
               <a:buNone/>
             </a:pPr>
             <a:r>
@@ -19993,7 +20032,7 @@
           <a:bodyPr wrap="square" lIns="0" tIns="0" rIns="0" bIns="0" rtlCol="0" anchor="ctr"/>
           <a:lstStyle/>
           <a:p>
-            <a:pPr algn="r" indent="0" marL="0">
+            <a:pPr marL="0" indent="0" algn="r">
               <a:buNone/>
             </a:pPr>
             <a:r>
@@ -20027,6 +20066,7 @@
         <a:solidFill>
           <a:srgbClr val="FFFFFF"/>
         </a:solidFill>
+        <a:effectLst/>
       </p:bgPr>
     </p:bg>
     <p:spTree>
@@ -20064,11 +20104,11 @@
           <a:bodyPr wrap="square" lIns="0" tIns="0" rIns="0" bIns="0" rtlCol="0" anchor="ctr"/>
           <a:lstStyle/>
           <a:p>
-            <a:pPr indent="0" marL="0">
-              <a:buNone/>
-            </a:pPr>
-            <a:r>
-              <a:rPr lang="en-US" sz="1100" b="1" spc="100" kern="0" dirty="0">
+            <a:pPr marL="0" indent="0">
+              <a:buNone/>
+            </a:pPr>
+            <a:r>
+              <a:rPr lang="en-US" sz="1100" b="1" kern="0" spc="100" dirty="0">
                 <a:solidFill>
                   <a:srgbClr val="A98B3C"/>
                 </a:solidFill>
@@ -20103,7 +20143,7 @@
           <a:bodyPr wrap="square" lIns="0" tIns="0" rIns="0" bIns="0" rtlCol="0" anchor="ctr"/>
           <a:lstStyle/>
           <a:p>
-            <a:pPr indent="0" marL="0">
+            <a:pPr marL="0" indent="0">
               <a:buNone/>
             </a:pPr>
             <a:r>
@@ -20142,7 +20182,7 @@
           <a:bodyPr wrap="square" lIns="0" tIns="0" rIns="0" bIns="0" rtlCol="0" anchor="ctr"/>
           <a:lstStyle/>
           <a:p>
-            <a:pPr indent="0" marL="0">
+            <a:pPr marL="0" indent="0">
               <a:buNone/>
             </a:pPr>
             <a:r>
@@ -20186,6 +20226,13 @@
             <a:prstDash val="solid"/>
           </a:ln>
         </p:spPr>
+        <p:txBody>
+          <a:bodyPr/>
+          <a:lstStyle/>
+          <a:p>
+            <a:endParaRPr lang="en-US"/>
+          </a:p>
+        </p:txBody>
       </p:sp>
       <p:sp>
         <p:nvSpPr>
@@ -20208,11 +20255,11 @@
           <a:bodyPr wrap="square" lIns="0" tIns="0" rIns="0" bIns="0" rtlCol="0" anchor="t"/>
           <a:lstStyle/>
           <a:p>
-            <a:pPr indent="0" marL="0">
-              <a:buNone/>
-            </a:pPr>
-            <a:r>
-              <a:rPr lang="en-US" sz="1100" b="1" spc="100" kern="0" dirty="0">
+            <a:pPr marL="0" indent="0">
+              <a:buNone/>
+            </a:pPr>
+            <a:r>
+              <a:rPr lang="en-US" sz="1100" b="1" kern="0" spc="100" dirty="0">
                 <a:solidFill>
                   <a:srgbClr val="5F8FAF"/>
                 </a:solidFill>
@@ -20374,7 +20421,7 @@
           <a:bodyPr wrap="square" lIns="0" tIns="0" rIns="0" bIns="0" rtlCol="0" anchor="t"/>
           <a:lstStyle/>
           <a:p>
-            <a:pPr indent="0" marL="0">
+            <a:pPr marL="0" indent="0">
               <a:buNone/>
             </a:pPr>
             <a:r>
@@ -20416,17 +20463,24 @@
             <a:prstDash val="solid"/>
           </a:ln>
         </p:spPr>
+        <p:txBody>
+          <a:bodyPr/>
+          <a:lstStyle/>
+          <a:p>
+            <a:endParaRPr lang="en-US"/>
+          </a:p>
+        </p:txBody>
       </p:sp>
       <p:pic>
         <p:nvPicPr>
-          <p:cNvPr id="10" name="Image 0" descr="preencoded.png">    </p:cNvPr>
+          <p:cNvPr id="10" name="Image 0" descr="preencoded.png"/>
           <p:cNvPicPr>
             <a:picLocks noChangeAspect="1"/>
           </p:cNvPicPr>
           <p:nvPr/>
         </p:nvPicPr>
         <p:blipFill>
-          <a:blip r:embed="rId1"/>
+          <a:blip r:embed="rId3"/>
           <a:stretch>
             <a:fillRect/>
           </a:stretch>
@@ -20462,7 +20516,7 @@
           <a:bodyPr wrap="square" lIns="0" tIns="0" rIns="0" bIns="0" rtlCol="0" anchor="t"/>
           <a:lstStyle/>
           <a:p>
-            <a:pPr indent="0" marL="0">
+            <a:pPr marL="0" indent="0">
               <a:buNone/>
             </a:pPr>
             <a:r>
@@ -20501,7 +20555,7 @@
           <a:bodyPr wrap="square" lIns="0" tIns="0" rIns="0" bIns="0" rtlCol="0" anchor="t"/>
           <a:lstStyle/>
           <a:p>
-            <a:pPr indent="0" marL="0">
+            <a:pPr marL="0" indent="0">
               <a:buNone/>
             </a:pPr>
             <a:r>
@@ -20543,17 +20597,24 @@
             <a:prstDash val="solid"/>
           </a:ln>
         </p:spPr>
+        <p:txBody>
+          <a:bodyPr/>
+          <a:lstStyle/>
+          <a:p>
+            <a:endParaRPr lang="en-US"/>
+          </a:p>
+        </p:txBody>
       </p:sp>
       <p:pic>
         <p:nvPicPr>
-          <p:cNvPr id="14" name="Image 1" descr="preencoded.png">    </p:cNvPr>
+          <p:cNvPr id="14" name="Image 1" descr="preencoded.png"/>
           <p:cNvPicPr>
             <a:picLocks noChangeAspect="1"/>
           </p:cNvPicPr>
           <p:nvPr/>
         </p:nvPicPr>
         <p:blipFill>
-          <a:blip r:embed="rId2"/>
+          <a:blip r:embed="rId4"/>
           <a:stretch>
             <a:fillRect/>
           </a:stretch>
@@ -20589,7 +20650,7 @@
           <a:bodyPr wrap="square" lIns="0" tIns="0" rIns="0" bIns="0" rtlCol="0" anchor="t"/>
           <a:lstStyle/>
           <a:p>
-            <a:pPr indent="0" marL="0">
+            <a:pPr marL="0" indent="0">
               <a:buNone/>
             </a:pPr>
             <a:r>
@@ -20628,7 +20689,7 @@
           <a:bodyPr wrap="square" lIns="0" tIns="0" rIns="0" bIns="0" rtlCol="0" anchor="t"/>
           <a:lstStyle/>
           <a:p>
-            <a:pPr indent="0" marL="0">
+            <a:pPr marL="0" indent="0">
               <a:buNone/>
             </a:pPr>
             <a:r>
@@ -20670,17 +20731,24 @@
             <a:prstDash val="solid"/>
           </a:ln>
         </p:spPr>
+        <p:txBody>
+          <a:bodyPr/>
+          <a:lstStyle/>
+          <a:p>
+            <a:endParaRPr lang="en-US"/>
+          </a:p>
+        </p:txBody>
       </p:sp>
       <p:pic>
         <p:nvPicPr>
-          <p:cNvPr id="18" name="Image 2" descr="preencoded.png">    </p:cNvPr>
+          <p:cNvPr id="18" name="Image 2" descr="preencoded.png"/>
           <p:cNvPicPr>
             <a:picLocks noChangeAspect="1"/>
           </p:cNvPicPr>
           <p:nvPr/>
         </p:nvPicPr>
         <p:blipFill>
-          <a:blip r:embed="rId3"/>
+          <a:blip r:embed="rId5"/>
           <a:stretch>
             <a:fillRect/>
           </a:stretch>
@@ -20716,7 +20784,7 @@
           <a:bodyPr wrap="square" lIns="0" tIns="0" rIns="0" bIns="0" rtlCol="0" anchor="t"/>
           <a:lstStyle/>
           <a:p>
-            <a:pPr indent="0" marL="0">
+            <a:pPr marL="0" indent="0">
               <a:buNone/>
             </a:pPr>
             <a:r>
@@ -20755,7 +20823,7 @@
           <a:bodyPr wrap="square" lIns="0" tIns="0" rIns="0" bIns="0" rtlCol="0" anchor="t"/>
           <a:lstStyle/>
           <a:p>
-            <a:pPr indent="0" marL="0">
+            <a:pPr marL="0" indent="0">
               <a:buNone/>
             </a:pPr>
             <a:r>
@@ -20794,7 +20862,7 @@
           <a:bodyPr wrap="square" lIns="0" tIns="0" rIns="0" bIns="0" rtlCol="0" anchor="ctr"/>
           <a:lstStyle/>
           <a:p>
-            <a:pPr indent="0" marL="0">
+            <a:pPr marL="0" indent="0">
               <a:buNone/>
             </a:pPr>
             <a:r>
@@ -20833,7 +20901,7 @@
           <a:bodyPr wrap="square" lIns="0" tIns="0" rIns="0" bIns="0" rtlCol="0" anchor="ctr"/>
           <a:lstStyle/>
           <a:p>
-            <a:pPr indent="0" marL="0">
+            <a:pPr marL="0" indent="0">
               <a:buNone/>
             </a:pPr>
             <a:r>
@@ -20872,7 +20940,7 @@
           <a:bodyPr wrap="square" lIns="0" tIns="0" rIns="0" bIns="0" rtlCol="0" anchor="ctr"/>
           <a:lstStyle/>
           <a:p>
-            <a:pPr algn="r" indent="0" marL="0">
+            <a:pPr marL="0" indent="0" algn="r">
               <a:buNone/>
             </a:pPr>
             <a:r>
@@ -20906,6 +20974,7 @@
         <a:solidFill>
           <a:srgbClr val="2B2E36"/>
         </a:solidFill>
+        <a:effectLst/>
       </p:bgPr>
     </p:bg>
     <p:spTree>
@@ -20943,11 +21012,11 @@
           <a:bodyPr wrap="square" lIns="0" tIns="0" rIns="0" bIns="0" rtlCol="0" anchor="t"/>
           <a:lstStyle/>
           <a:p>
-            <a:pPr indent="0" marL="0">
-              <a:buNone/>
-            </a:pPr>
-            <a:r>
-              <a:rPr lang="en-US" sz="1200" b="1" spc="100" kern="0" dirty="0">
+            <a:pPr marL="0" indent="0">
+              <a:buNone/>
+            </a:pPr>
+            <a:r>
+              <a:rPr lang="en-US" sz="1200" b="1" kern="0" spc="100" dirty="0">
                 <a:solidFill>
                   <a:srgbClr val="DCC37A"/>
                 </a:solidFill>
@@ -20982,7 +21051,7 @@
           <a:bodyPr wrap="square" lIns="0" tIns="0" rIns="0" bIns="0" rtlCol="0" anchor="ctr"/>
           <a:lstStyle/>
           <a:p>
-            <a:pPr indent="0" marL="0">
+            <a:pPr marL="0" indent="0">
               <a:buNone/>
             </a:pPr>
             <a:r>
@@ -21021,7 +21090,7 @@
           <a:bodyPr wrap="square" lIns="0" tIns="0" rIns="0" bIns="0" rtlCol="0" anchor="ctr"/>
           <a:lstStyle/>
           <a:p>
-            <a:pPr indent="0" marL="0">
+            <a:pPr marL="0" indent="0">
               <a:buNone/>
             </a:pPr>
             <a:r>
@@ -21060,7 +21129,7 @@
           <a:bodyPr wrap="square" lIns="0" tIns="0" rIns="0" bIns="0" rtlCol="0" anchor="t"/>
           <a:lstStyle/>
           <a:p>
-            <a:pPr indent="0" marL="0">
+            <a:pPr marL="0" indent="0">
               <a:lnSpc>
                 <a:spcPct val="115000"/>
               </a:lnSpc>
@@ -21107,6 +21176,13 @@
             <a:prstDash val="solid"/>
           </a:ln>
         </p:spPr>
+        <p:txBody>
+          <a:bodyPr/>
+          <a:lstStyle/>
+          <a:p>
+            <a:endParaRPr lang="en-US"/>
+          </a:p>
+        </p:txBody>
       </p:sp>
       <p:sp>
         <p:nvSpPr>
@@ -21132,17 +21208,24 @@
             <a:prstDash val="solid"/>
           </a:ln>
         </p:spPr>
+        <p:txBody>
+          <a:bodyPr/>
+          <a:lstStyle/>
+          <a:p>
+            <a:endParaRPr lang="en-US"/>
+          </a:p>
+        </p:txBody>
       </p:sp>
       <p:pic>
         <p:nvPicPr>
-          <p:cNvPr id="8" name="Image 0" descr="preencoded.png">    </p:cNvPr>
+          <p:cNvPr id="8" name="Image 0" descr="preencoded.png"/>
           <p:cNvPicPr>
             <a:picLocks noChangeAspect="1"/>
           </p:cNvPicPr>
           <p:nvPr/>
         </p:nvPicPr>
         <p:blipFill>
-          <a:blip r:embed="rId1"/>
+          <a:blip r:embed="rId3"/>
           <a:stretch>
             <a:fillRect/>
           </a:stretch>
@@ -21178,7 +21261,7 @@
           <a:bodyPr wrap="square" lIns="0" tIns="0" rIns="0" bIns="0" rtlCol="0" anchor="t"/>
           <a:lstStyle/>
           <a:p>
-            <a:pPr indent="0" marL="0">
+            <a:pPr marL="0" indent="0">
               <a:buNone/>
             </a:pPr>
             <a:r>
@@ -21217,7 +21300,7 @@
           <a:bodyPr wrap="square" lIns="0" tIns="0" rIns="0" bIns="0" rtlCol="0" anchor="t"/>
           <a:lstStyle/>
           <a:p>
-            <a:pPr indent="0" marL="0">
+            <a:pPr marL="0" indent="0">
               <a:buNone/>
             </a:pPr>
             <a:r>
@@ -21261,6 +21344,13 @@
             <a:prstDash val="solid"/>
           </a:ln>
         </p:spPr>
+        <p:txBody>
+          <a:bodyPr/>
+          <a:lstStyle/>
+          <a:p>
+            <a:endParaRPr lang="en-US"/>
+          </a:p>
+        </p:txBody>
       </p:sp>
       <p:sp>
         <p:nvSpPr>
@@ -21286,17 +21376,24 @@
             <a:prstDash val="solid"/>
           </a:ln>
         </p:spPr>
+        <p:txBody>
+          <a:bodyPr/>
+          <a:lstStyle/>
+          <a:p>
+            <a:endParaRPr lang="en-US"/>
+          </a:p>
+        </p:txBody>
       </p:sp>
       <p:pic>
         <p:nvPicPr>
-          <p:cNvPr id="13" name="Image 1" descr="preencoded.png">    </p:cNvPr>
+          <p:cNvPr id="13" name="Image 1" descr="preencoded.png"/>
           <p:cNvPicPr>
             <a:picLocks noChangeAspect="1"/>
           </p:cNvPicPr>
           <p:nvPr/>
         </p:nvPicPr>
         <p:blipFill>
-          <a:blip r:embed="rId2"/>
+          <a:blip r:embed="rId4"/>
           <a:stretch>
             <a:fillRect/>
           </a:stretch>
@@ -21332,7 +21429,7 @@
           <a:bodyPr wrap="square" lIns="0" tIns="0" rIns="0" bIns="0" rtlCol="0" anchor="t"/>
           <a:lstStyle/>
           <a:p>
-            <a:pPr indent="0" marL="0">
+            <a:pPr marL="0" indent="0">
               <a:buNone/>
             </a:pPr>
             <a:r>
@@ -21371,7 +21468,7 @@
           <a:bodyPr wrap="square" lIns="0" tIns="0" rIns="0" bIns="0" rtlCol="0" anchor="t"/>
           <a:lstStyle/>
           <a:p>
-            <a:pPr indent="0" marL="0">
+            <a:pPr marL="0" indent="0">
               <a:buNone/>
             </a:pPr>
             <a:r>
@@ -21415,6 +21512,13 @@
             <a:prstDash val="solid"/>
           </a:ln>
         </p:spPr>
+        <p:txBody>
+          <a:bodyPr/>
+          <a:lstStyle/>
+          <a:p>
+            <a:endParaRPr lang="en-US"/>
+          </a:p>
+        </p:txBody>
       </p:sp>
       <p:sp>
         <p:nvSpPr>
@@ -21440,17 +21544,24 @@
             <a:prstDash val="solid"/>
           </a:ln>
         </p:spPr>
+        <p:txBody>
+          <a:bodyPr/>
+          <a:lstStyle/>
+          <a:p>
+            <a:endParaRPr lang="en-US"/>
+          </a:p>
+        </p:txBody>
       </p:sp>
       <p:pic>
         <p:nvPicPr>
-          <p:cNvPr id="18" name="Image 2" descr="preencoded.png">    </p:cNvPr>
+          <p:cNvPr id="18" name="Image 2" descr="preencoded.png"/>
           <p:cNvPicPr>
             <a:picLocks noChangeAspect="1"/>
           </p:cNvPicPr>
           <p:nvPr/>
         </p:nvPicPr>
         <p:blipFill>
-          <a:blip r:embed="rId3"/>
+          <a:blip r:embed="rId5"/>
           <a:stretch>
             <a:fillRect/>
           </a:stretch>
@@ -21486,7 +21597,7 @@
           <a:bodyPr wrap="square" lIns="0" tIns="0" rIns="0" bIns="0" rtlCol="0" anchor="t"/>
           <a:lstStyle/>
           <a:p>
-            <a:pPr indent="0" marL="0">
+            <a:pPr marL="0" indent="0">
               <a:buNone/>
             </a:pPr>
             <a:r>
@@ -21525,7 +21636,7 @@
           <a:bodyPr wrap="square" lIns="0" tIns="0" rIns="0" bIns="0" rtlCol="0" anchor="t"/>
           <a:lstStyle/>
           <a:p>
-            <a:pPr indent="0" marL="0">
+            <a:pPr marL="0" indent="0">
               <a:buNone/>
             </a:pPr>
             <a:r>
@@ -21564,7 +21675,7 @@
           <a:bodyPr wrap="square" lIns="0" tIns="0" rIns="0" bIns="0" rtlCol="0" anchor="ctr"/>
           <a:lstStyle/>
           <a:p>
-            <a:pPr indent="0" marL="0">
+            <a:pPr marL="0" indent="0">
               <a:buNone/>
             </a:pPr>
             <a:r>
@@ -21603,7 +21714,7 @@
           <a:bodyPr wrap="square" lIns="0" tIns="0" rIns="0" bIns="0" rtlCol="0" anchor="ctr"/>
           <a:lstStyle/>
           <a:p>
-            <a:pPr algn="r" indent="0" marL="0">
+            <a:pPr marL="0" indent="0" algn="r">
               <a:buNone/>
             </a:pPr>
             <a:r>
@@ -21637,6 +21748,7 @@
         <a:solidFill>
           <a:srgbClr val="FFFFFF"/>
         </a:solidFill>
+        <a:effectLst/>
       </p:bgPr>
     </p:bg>
     <p:spTree>
@@ -21674,11 +21786,11 @@
           <a:bodyPr wrap="square" lIns="0" tIns="0" rIns="0" bIns="0" rtlCol="0" anchor="ctr"/>
           <a:lstStyle/>
           <a:p>
-            <a:pPr indent="0" marL="0">
-              <a:buNone/>
-            </a:pPr>
-            <a:r>
-              <a:rPr lang="en-US" sz="1100" b="1" spc="100" kern="0" dirty="0">
+            <a:pPr marL="0" indent="0">
+              <a:buNone/>
+            </a:pPr>
+            <a:r>
+              <a:rPr lang="en-US" sz="1100" b="1" kern="0" spc="100" dirty="0">
                 <a:solidFill>
                   <a:srgbClr val="A98B3C"/>
                 </a:solidFill>
@@ -21713,7 +21825,7 @@
           <a:bodyPr wrap="square" lIns="0" tIns="0" rIns="0" bIns="0" rtlCol="0" anchor="ctr"/>
           <a:lstStyle/>
           <a:p>
-            <a:pPr indent="0" marL="0">
+            <a:pPr marL="0" indent="0">
               <a:buNone/>
             </a:pPr>
             <a:r>
@@ -21752,7 +21864,7 @@
           <a:bodyPr wrap="square" lIns="0" tIns="0" rIns="0" bIns="0" rtlCol="0" anchor="ctr"/>
           <a:lstStyle/>
           <a:p>
-            <a:pPr indent="0" marL="0">
+            <a:pPr marL="0" indent="0">
               <a:buNone/>
             </a:pPr>
             <a:r>
@@ -21796,6 +21908,13 @@
             <a:prstDash val="solid"/>
           </a:ln>
         </p:spPr>
+        <p:txBody>
+          <a:bodyPr/>
+          <a:lstStyle/>
+          <a:p>
+            <a:endParaRPr lang="en-US"/>
+          </a:p>
+        </p:txBody>
       </p:sp>
       <p:sp>
         <p:nvSpPr>
@@ -21821,17 +21940,24 @@
             <a:prstDash val="solid"/>
           </a:ln>
         </p:spPr>
+        <p:txBody>
+          <a:bodyPr/>
+          <a:lstStyle/>
+          <a:p>
+            <a:endParaRPr lang="en-US"/>
+          </a:p>
+        </p:txBody>
       </p:sp>
       <p:pic>
         <p:nvPicPr>
-          <p:cNvPr id="7" name="Image 0" descr="preencoded.png">    </p:cNvPr>
+          <p:cNvPr id="7" name="Image 0" descr="preencoded.png"/>
           <p:cNvPicPr>
             <a:picLocks noChangeAspect="1"/>
           </p:cNvPicPr>
           <p:nvPr/>
         </p:nvPicPr>
         <p:blipFill>
-          <a:blip r:embed="rId1"/>
+          <a:blip r:embed="rId3"/>
           <a:stretch>
             <a:fillRect/>
           </a:stretch>
@@ -21867,7 +21993,7 @@
           <a:bodyPr wrap="square" lIns="0" tIns="0" rIns="0" bIns="0" rtlCol="0" anchor="ctr"/>
           <a:lstStyle/>
           <a:p>
-            <a:pPr indent="0" marL="0">
+            <a:pPr marL="0" indent="0">
               <a:buNone/>
             </a:pPr>
             <a:r>
@@ -21911,6 +22037,13 @@
             <a:prstDash val="solid"/>
           </a:ln>
         </p:spPr>
+        <p:txBody>
+          <a:bodyPr/>
+          <a:lstStyle/>
+          <a:p>
+            <a:endParaRPr lang="en-US"/>
+          </a:p>
+        </p:txBody>
       </p:sp>
       <p:sp>
         <p:nvSpPr>
@@ -21936,17 +22069,24 @@
             <a:prstDash val="solid"/>
           </a:ln>
         </p:spPr>
+        <p:txBody>
+          <a:bodyPr/>
+          <a:lstStyle/>
+          <a:p>
+            <a:endParaRPr lang="en-US"/>
+          </a:p>
+        </p:txBody>
       </p:sp>
       <p:pic>
         <p:nvPicPr>
-          <p:cNvPr id="11" name="Image 1" descr="preencoded.png">    </p:cNvPr>
+          <p:cNvPr id="11" name="Image 1" descr="preencoded.png"/>
           <p:cNvPicPr>
             <a:picLocks noChangeAspect="1"/>
           </p:cNvPicPr>
           <p:nvPr/>
         </p:nvPicPr>
         <p:blipFill>
-          <a:blip r:embed="rId2"/>
+          <a:blip r:embed="rId4"/>
           <a:stretch>
             <a:fillRect/>
           </a:stretch>
@@ -21982,7 +22122,7 @@
           <a:bodyPr wrap="square" lIns="0" tIns="0" rIns="0" bIns="0" rtlCol="0" anchor="ctr"/>
           <a:lstStyle/>
           <a:p>
-            <a:pPr indent="0" marL="0">
+            <a:pPr marL="0" indent="0">
               <a:buNone/>
             </a:pPr>
             <a:r>
@@ -22026,6 +22166,13 @@
             <a:prstDash val="solid"/>
           </a:ln>
         </p:spPr>
+        <p:txBody>
+          <a:bodyPr/>
+          <a:lstStyle/>
+          <a:p>
+            <a:endParaRPr lang="en-US"/>
+          </a:p>
+        </p:txBody>
       </p:sp>
       <p:sp>
         <p:nvSpPr>
@@ -22051,17 +22198,24 @@
             <a:prstDash val="solid"/>
           </a:ln>
         </p:spPr>
+        <p:txBody>
+          <a:bodyPr/>
+          <a:lstStyle/>
+          <a:p>
+            <a:endParaRPr lang="en-US"/>
+          </a:p>
+        </p:txBody>
       </p:sp>
       <p:pic>
         <p:nvPicPr>
-          <p:cNvPr id="15" name="Image 2" descr="preencoded.png">    </p:cNvPr>
+          <p:cNvPr id="15" name="Image 2" descr="preencoded.png"/>
           <p:cNvPicPr>
             <a:picLocks noChangeAspect="1"/>
           </p:cNvPicPr>
           <p:nvPr/>
         </p:nvPicPr>
         <p:blipFill>
-          <a:blip r:embed="rId3"/>
+          <a:blip r:embed="rId5"/>
           <a:stretch>
             <a:fillRect/>
           </a:stretch>
@@ -22097,7 +22251,7 @@
           <a:bodyPr wrap="square" lIns="0" tIns="0" rIns="0" bIns="0" rtlCol="0" anchor="ctr"/>
           <a:lstStyle/>
           <a:p>
-            <a:pPr indent="0" marL="0">
+            <a:pPr marL="0" indent="0">
               <a:buNone/>
             </a:pPr>
             <a:r>
@@ -22136,7 +22290,7 @@
           <a:bodyPr wrap="square" lIns="0" tIns="0" rIns="0" bIns="0" rtlCol="0" anchor="ctr"/>
           <a:lstStyle/>
           <a:p>
-            <a:pPr indent="0" marL="0">
+            <a:pPr marL="0" indent="0">
               <a:buNone/>
             </a:pPr>
             <a:r>
@@ -22175,7 +22329,7 @@
           <a:bodyPr wrap="square" lIns="0" tIns="0" rIns="0" bIns="0" rtlCol="0" anchor="t"/>
           <a:lstStyle/>
           <a:p>
-            <a:pPr indent="0" marL="0">
+            <a:pPr marL="0" indent="0">
               <a:buNone/>
             </a:pPr>
             <a:r>
@@ -22214,7 +22368,7 @@
           <a:bodyPr wrap="square" lIns="0" tIns="0" rIns="0" bIns="0" rtlCol="0" anchor="t"/>
           <a:lstStyle/>
           <a:p>
-            <a:pPr indent="0" marL="0">
+            <a:pPr marL="0" indent="0">
               <a:buNone/>
             </a:pPr>
             <a:r>
@@ -22253,7 +22407,7 @@
           <a:bodyPr wrap="square" lIns="0" tIns="0" rIns="0" bIns="0" rtlCol="0" anchor="t"/>
           <a:lstStyle/>
           <a:p>
-            <a:pPr indent="0" marL="0">
+            <a:pPr marL="0" indent="0">
               <a:buNone/>
             </a:pPr>
             <a:r>
@@ -22292,7 +22446,7 @@
           <a:bodyPr wrap="square" lIns="0" tIns="0" rIns="0" bIns="0" rtlCol="0" anchor="t"/>
           <a:lstStyle/>
           <a:p>
-            <a:pPr indent="0" marL="0">
+            <a:pPr marL="0" indent="0">
               <a:buNone/>
             </a:pPr>
             <a:r>
@@ -22331,7 +22485,7 @@
           <a:bodyPr wrap="square" lIns="0" tIns="0" rIns="0" bIns="0" rtlCol="0" anchor="t"/>
           <a:lstStyle/>
           <a:p>
-            <a:pPr indent="0" marL="0">
+            <a:pPr marL="0" indent="0">
               <a:buNone/>
             </a:pPr>
             <a:r>
@@ -22370,7 +22524,7 @@
           <a:bodyPr wrap="square" lIns="0" tIns="0" rIns="0" bIns="0" rtlCol="0" anchor="t"/>
           <a:lstStyle/>
           <a:p>
-            <a:pPr indent="0" marL="0">
+            <a:pPr marL="0" indent="0">
               <a:buNone/>
             </a:pPr>
             <a:r>
@@ -22409,7 +22563,7 @@
           <a:bodyPr wrap="square" lIns="0" tIns="0" rIns="0" bIns="0" rtlCol="0" anchor="ctr"/>
           <a:lstStyle/>
           <a:p>
-            <a:pPr indent="0" marL="0">
+            <a:pPr marL="0" indent="0">
               <a:buNone/>
             </a:pPr>
             <a:r>
@@ -22448,7 +22602,7 @@
           <a:bodyPr wrap="square" lIns="0" tIns="0" rIns="0" bIns="0" rtlCol="0" anchor="ctr"/>
           <a:lstStyle/>
           <a:p>
-            <a:pPr algn="r" indent="0" marL="0">
+            <a:pPr marL="0" indent="0" algn="r">
               <a:buNone/>
             </a:pPr>
             <a:r>
@@ -22482,6 +22636,7 @@
         <a:solidFill>
           <a:srgbClr val="FFFFFF"/>
         </a:solidFill>
+        <a:effectLst/>
       </p:bgPr>
     </p:bg>
     <p:spTree>
@@ -22519,11 +22674,11 @@
           <a:bodyPr wrap="square" lIns="0" tIns="0" rIns="0" bIns="0" rtlCol="0" anchor="ctr"/>
           <a:lstStyle/>
           <a:p>
-            <a:pPr indent="0" marL="0">
-              <a:buNone/>
-            </a:pPr>
-            <a:r>
-              <a:rPr lang="en-US" sz="1100" b="1" spc="100" kern="0" dirty="0">
+            <a:pPr marL="0" indent="0">
+              <a:buNone/>
+            </a:pPr>
+            <a:r>
+              <a:rPr lang="en-US" sz="1100" b="1" kern="0" spc="100" dirty="0">
                 <a:solidFill>
                   <a:srgbClr val="A98B3C"/>
                 </a:solidFill>
@@ -22558,7 +22713,7 @@
           <a:bodyPr wrap="square" lIns="0" tIns="0" rIns="0" bIns="0" rtlCol="0" anchor="ctr"/>
           <a:lstStyle/>
           <a:p>
-            <a:pPr indent="0" marL="0">
+            <a:pPr marL="0" indent="0">
               <a:buNone/>
             </a:pPr>
             <a:r>
@@ -22597,7 +22752,7 @@
           <a:bodyPr wrap="square" lIns="0" tIns="0" rIns="0" bIns="0" rtlCol="0" anchor="ctr"/>
           <a:lstStyle/>
           <a:p>
-            <a:pPr indent="0" marL="0">
+            <a:pPr marL="0" indent="0">
               <a:buNone/>
             </a:pPr>
             <a:r>
@@ -22641,6 +22796,13 @@
             <a:prstDash val="solid"/>
           </a:ln>
         </p:spPr>
+        <p:txBody>
+          <a:bodyPr/>
+          <a:lstStyle/>
+          <a:p>
+            <a:endParaRPr lang="en-US"/>
+          </a:p>
+        </p:txBody>
       </p:sp>
       <p:sp>
         <p:nvSpPr>
@@ -22663,11 +22825,11 @@
           <a:bodyPr wrap="square" lIns="0" tIns="0" rIns="0" bIns="0" rtlCol="0" anchor="t"/>
           <a:lstStyle/>
           <a:p>
-            <a:pPr indent="0" marL="0">
-              <a:buNone/>
-            </a:pPr>
-            <a:r>
-              <a:rPr lang="en-US" sz="1100" b="1" spc="100" kern="0" dirty="0">
+            <a:pPr marL="0" indent="0">
+              <a:buNone/>
+            </a:pPr>
+            <a:r>
+              <a:rPr lang="en-US" sz="1100" b="1" kern="0" spc="100" dirty="0">
                 <a:solidFill>
                   <a:srgbClr val="A98B3C"/>
                 </a:solidFill>
@@ -22702,7 +22864,7 @@
           <a:bodyPr wrap="square" lIns="0" tIns="0" rIns="0" bIns="0" rtlCol="0" anchor="t"/>
           <a:lstStyle/>
           <a:p>
-            <a:pPr indent="0" marL="0">
+            <a:pPr marL="0" indent="0">
               <a:buNone/>
             </a:pPr>
             <a:r>
@@ -22744,17 +22906,24 @@
             <a:prstDash val="solid"/>
           </a:ln>
         </p:spPr>
+        <p:txBody>
+          <a:bodyPr/>
+          <a:lstStyle/>
+          <a:p>
+            <a:endParaRPr lang="en-US"/>
+          </a:p>
+        </p:txBody>
       </p:sp>
       <p:pic>
         <p:nvPicPr>
-          <p:cNvPr id="9" name="Image 0" descr="preencoded.png">    </p:cNvPr>
+          <p:cNvPr id="9" name="Image 0" descr="preencoded.png"/>
           <p:cNvPicPr>
             <a:picLocks noChangeAspect="1"/>
           </p:cNvPicPr>
           <p:nvPr/>
         </p:nvPicPr>
         <p:blipFill>
-          <a:blip r:embed="rId1"/>
+          <a:blip r:embed="rId3"/>
           <a:stretch>
             <a:fillRect/>
           </a:stretch>
@@ -22790,7 +22959,7 @@
           <a:bodyPr wrap="square" lIns="0" tIns="0" rIns="0" bIns="0" rtlCol="0" anchor="ctr"/>
           <a:lstStyle/>
           <a:p>
-            <a:pPr indent="0" marL="0">
+            <a:pPr marL="0" indent="0">
               <a:buNone/>
             </a:pPr>
             <a:r>
@@ -22829,7 +22998,7 @@
           <a:bodyPr wrap="square" lIns="0" tIns="0" rIns="0" bIns="0" rtlCol="0" anchor="ctr"/>
           <a:lstStyle/>
           <a:p>
-            <a:pPr indent="0" marL="0">
+            <a:pPr marL="0" indent="0">
               <a:buNone/>
             </a:pPr>
             <a:r>
@@ -22871,17 +23040,24 @@
             <a:prstDash val="solid"/>
           </a:ln>
         </p:spPr>
+        <p:txBody>
+          <a:bodyPr/>
+          <a:lstStyle/>
+          <a:p>
+            <a:endParaRPr lang="en-US"/>
+          </a:p>
+        </p:txBody>
       </p:sp>
       <p:pic>
         <p:nvPicPr>
-          <p:cNvPr id="13" name="Image 1" descr="preencoded.png">    </p:cNvPr>
+          <p:cNvPr id="13" name="Image 1" descr="preencoded.png"/>
           <p:cNvPicPr>
             <a:picLocks noChangeAspect="1"/>
           </p:cNvPicPr>
           <p:nvPr/>
         </p:nvPicPr>
         <p:blipFill>
-          <a:blip r:embed="rId2"/>
+          <a:blip r:embed="rId3"/>
           <a:stretch>
             <a:fillRect/>
           </a:stretch>
@@ -22917,7 +23093,7 @@
           <a:bodyPr wrap="square" lIns="0" tIns="0" rIns="0" bIns="0" rtlCol="0" anchor="ctr"/>
           <a:lstStyle/>
           <a:p>
-            <a:pPr indent="0" marL="0">
+            <a:pPr marL="0" indent="0">
               <a:buNone/>
             </a:pPr>
             <a:r>
@@ -22956,7 +23132,7 @@
           <a:bodyPr wrap="square" lIns="0" tIns="0" rIns="0" bIns="0" rtlCol="0" anchor="ctr"/>
           <a:lstStyle/>
           <a:p>
-            <a:pPr indent="0" marL="0">
+            <a:pPr marL="0" indent="0">
               <a:buNone/>
             </a:pPr>
             <a:r>
@@ -22998,10 +23174,17 @@
             <a:prstDash val="solid"/>
           </a:ln>
         </p:spPr>
+        <p:txBody>
+          <a:bodyPr/>
+          <a:lstStyle/>
+          <a:p>
+            <a:endParaRPr lang="en-US"/>
+          </a:p>
+        </p:txBody>
       </p:sp>
       <p:pic>
         <p:nvPicPr>
-          <p:cNvPr id="17" name="Image 2" descr="preencoded.png">    </p:cNvPr>
+          <p:cNvPr id="17" name="Image 2" descr="preencoded.png"/>
           <p:cNvPicPr>
             <a:picLocks noChangeAspect="1"/>
           </p:cNvPicPr>
@@ -23044,7 +23227,7 @@
           <a:bodyPr wrap="square" lIns="0" tIns="0" rIns="0" bIns="0" rtlCol="0" anchor="ctr"/>
           <a:lstStyle/>
           <a:p>
-            <a:pPr indent="0" marL="0">
+            <a:pPr marL="0" indent="0">
               <a:buNone/>
             </a:pPr>
             <a:r>
@@ -23083,7 +23266,7 @@
           <a:bodyPr wrap="square" lIns="0" tIns="0" rIns="0" bIns="0" rtlCol="0" anchor="ctr"/>
           <a:lstStyle/>
           <a:p>
-            <a:pPr indent="0" marL="0">
+            <a:pPr marL="0" indent="0">
               <a:buNone/>
             </a:pPr>
             <a:r>
@@ -23125,17 +23308,24 @@
             <a:prstDash val="solid"/>
           </a:ln>
         </p:spPr>
+        <p:txBody>
+          <a:bodyPr/>
+          <a:lstStyle/>
+          <a:p>
+            <a:endParaRPr lang="en-US"/>
+          </a:p>
+        </p:txBody>
       </p:sp>
       <p:pic>
         <p:nvPicPr>
-          <p:cNvPr id="21" name="Image 3" descr="preencoded.png">    </p:cNvPr>
+          <p:cNvPr id="21" name="Image 3" descr="preencoded.png"/>
           <p:cNvPicPr>
             <a:picLocks noChangeAspect="1"/>
           </p:cNvPicPr>
           <p:nvPr/>
         </p:nvPicPr>
         <p:blipFill>
-          <a:blip r:embed="rId4"/>
+          <a:blip r:embed="rId3"/>
           <a:stretch>
             <a:fillRect/>
           </a:stretch>
@@ -23171,7 +23361,7 @@
           <a:bodyPr wrap="square" lIns="0" tIns="0" rIns="0" bIns="0" rtlCol="0" anchor="ctr"/>
           <a:lstStyle/>
           <a:p>
-            <a:pPr indent="0" marL="0">
+            <a:pPr marL="0" indent="0">
               <a:buNone/>
             </a:pPr>
             <a:r>
@@ -23210,7 +23400,7 @@
           <a:bodyPr wrap="square" lIns="0" tIns="0" rIns="0" bIns="0" rtlCol="0" anchor="ctr"/>
           <a:lstStyle/>
           <a:p>
-            <a:pPr indent="0" marL="0">
+            <a:pPr marL="0" indent="0">
               <a:buNone/>
             </a:pPr>
             <a:r>
@@ -23252,17 +23442,24 @@
             <a:prstDash val="solid"/>
           </a:ln>
         </p:spPr>
+        <p:txBody>
+          <a:bodyPr/>
+          <a:lstStyle/>
+          <a:p>
+            <a:endParaRPr lang="en-US"/>
+          </a:p>
+        </p:txBody>
       </p:sp>
       <p:pic>
         <p:nvPicPr>
-          <p:cNvPr id="25" name="Image 4" descr="preencoded.png">    </p:cNvPr>
+          <p:cNvPr id="25" name="Image 4" descr="preencoded.png"/>
           <p:cNvPicPr>
             <a:picLocks noChangeAspect="1"/>
           </p:cNvPicPr>
           <p:nvPr/>
         </p:nvPicPr>
         <p:blipFill>
-          <a:blip r:embed="rId5"/>
+          <a:blip r:embed="rId4"/>
           <a:stretch>
             <a:fillRect/>
           </a:stretch>
@@ -23298,7 +23495,7 @@
           <a:bodyPr wrap="square" lIns="0" tIns="0" rIns="0" bIns="0" rtlCol="0" anchor="ctr"/>
           <a:lstStyle/>
           <a:p>
-            <a:pPr indent="0" marL="0">
+            <a:pPr marL="0" indent="0">
               <a:buNone/>
             </a:pPr>
             <a:r>
@@ -23337,7 +23534,7 @@
           <a:bodyPr wrap="square" lIns="0" tIns="0" rIns="0" bIns="0" rtlCol="0" anchor="ctr"/>
           <a:lstStyle/>
           <a:p>
-            <a:pPr indent="0" marL="0">
+            <a:pPr marL="0" indent="0">
               <a:buNone/>
             </a:pPr>
             <a:r>
@@ -23376,7 +23573,7 @@
           <a:bodyPr wrap="square" lIns="0" tIns="0" rIns="0" bIns="0" rtlCol="0" anchor="t"/>
           <a:lstStyle/>
           <a:p>
-            <a:pPr indent="0" marL="0">
+            <a:pPr marL="0" indent="0">
               <a:buNone/>
             </a:pPr>
             <a:r>
@@ -23415,7 +23612,7 @@
           <a:bodyPr wrap="square" lIns="0" tIns="0" rIns="0" bIns="0" rtlCol="0" anchor="t"/>
           <a:lstStyle/>
           <a:p>
-            <a:pPr indent="0" marL="0">
+            <a:pPr marL="0" indent="0">
               <a:lnSpc>
                 <a:spcPct val="115000"/>
               </a:lnSpc>
@@ -23457,7 +23654,7 @@
           <a:bodyPr wrap="square" lIns="0" tIns="0" rIns="0" bIns="0" rtlCol="0" anchor="ctr"/>
           <a:lstStyle/>
           <a:p>
-            <a:pPr indent="0" marL="0">
+            <a:pPr marL="0" indent="0">
               <a:buNone/>
             </a:pPr>
             <a:r>
@@ -23496,7 +23693,7 @@
           <a:bodyPr wrap="square" lIns="0" tIns="0" rIns="0" bIns="0" rtlCol="0" anchor="ctr"/>
           <a:lstStyle/>
           <a:p>
-            <a:pPr algn="r" indent="0" marL="0">
+            <a:pPr marL="0" indent="0" algn="r">
               <a:buNone/>
             </a:pPr>
             <a:r>
@@ -23530,6 +23727,7 @@
         <a:solidFill>
           <a:srgbClr val="FFFFFF"/>
         </a:solidFill>
+        <a:effectLst/>
       </p:bgPr>
     </p:bg>
     <p:spTree>
@@ -23567,7 +23765,7 @@
           <a:bodyPr wrap="square" lIns="0" tIns="0" rIns="0" bIns="0" rtlCol="0" anchor="ctr"/>
           <a:lstStyle/>
           <a:p>
-            <a:pPr indent="0" marL="0">
+            <a:pPr marL="0" indent="0">
               <a:buNone/>
             </a:pPr>
             <a:r>
@@ -23606,7 +23804,7 @@
           <a:bodyPr wrap="square" lIns="0" tIns="0" rIns="0" bIns="0" rtlCol="0" anchor="ctr"/>
           <a:lstStyle/>
           <a:p>
-            <a:pPr indent="0" marL="0">
+            <a:pPr marL="0" indent="0">
               <a:buNone/>
             </a:pPr>
             <a:r>
@@ -23646,6 +23844,13 @@
             <a:prstDash val="solid"/>
           </a:ln>
         </p:spPr>
+        <p:txBody>
+          <a:bodyPr/>
+          <a:lstStyle/>
+          <a:p>
+            <a:endParaRPr lang="en-US"/>
+          </a:p>
+        </p:txBody>
       </p:sp>
       <p:sp>
         <p:nvSpPr>
@@ -23669,6 +23874,13 @@
             <a:prstDash val="solid"/>
           </a:ln>
         </p:spPr>
+        <p:txBody>
+          <a:bodyPr/>
+          <a:lstStyle/>
+          <a:p>
+            <a:endParaRPr lang="en-US"/>
+          </a:p>
+        </p:txBody>
       </p:sp>
       <p:sp>
         <p:nvSpPr>
@@ -23691,7 +23903,7 @@
           <a:bodyPr wrap="square" lIns="0" tIns="0" rIns="0" bIns="0" rtlCol="0" anchor="t"/>
           <a:lstStyle/>
           <a:p>
-            <a:pPr algn="ctr" indent="0" marL="0">
+            <a:pPr marL="0" indent="0" algn="ctr">
               <a:buNone/>
             </a:pPr>
             <a:r>
@@ -23731,6 +23943,13 @@
             <a:prstDash val="solid"/>
           </a:ln>
         </p:spPr>
+        <p:txBody>
+          <a:bodyPr/>
+          <a:lstStyle/>
+          <a:p>
+            <a:endParaRPr lang="en-US"/>
+          </a:p>
+        </p:txBody>
       </p:sp>
       <p:sp>
         <p:nvSpPr>
@@ -23753,7 +23972,7 @@
           <a:bodyPr wrap="square" lIns="0" tIns="0" rIns="0" bIns="0" rtlCol="0" anchor="t"/>
           <a:lstStyle/>
           <a:p>
-            <a:pPr algn="ctr" indent="0" marL="0">
+            <a:pPr marL="0" indent="0" algn="ctr">
               <a:buNone/>
             </a:pPr>
             <a:r>
@@ -23793,6 +24012,13 @@
             <a:prstDash val="solid"/>
           </a:ln>
         </p:spPr>
+        <p:txBody>
+          <a:bodyPr/>
+          <a:lstStyle/>
+          <a:p>
+            <a:endParaRPr lang="en-US"/>
+          </a:p>
+        </p:txBody>
       </p:sp>
       <p:sp>
         <p:nvSpPr>
@@ -23815,7 +24041,7 @@
           <a:bodyPr wrap="square" lIns="0" tIns="0" rIns="0" bIns="0" rtlCol="0" anchor="t"/>
           <a:lstStyle/>
           <a:p>
-            <a:pPr algn="ctr" indent="0" marL="0">
+            <a:pPr marL="0" indent="0" algn="ctr">
               <a:buNone/>
             </a:pPr>
             <a:r>
@@ -23855,6 +24081,13 @@
             <a:prstDash val="solid"/>
           </a:ln>
         </p:spPr>
+        <p:txBody>
+          <a:bodyPr/>
+          <a:lstStyle/>
+          <a:p>
+            <a:endParaRPr lang="en-US"/>
+          </a:p>
+        </p:txBody>
       </p:sp>
       <p:sp>
         <p:nvSpPr>
@@ -23877,7 +24110,7 @@
           <a:bodyPr wrap="square" lIns="0" tIns="0" rIns="0" bIns="0" rtlCol="0" anchor="t"/>
           <a:lstStyle/>
           <a:p>
-            <a:pPr algn="ctr" indent="0" marL="0">
+            <a:pPr marL="0" indent="0" algn="ctr">
               <a:buNone/>
             </a:pPr>
             <a:r>
@@ -23917,6 +24150,13 @@
             <a:prstDash val="solid"/>
           </a:ln>
         </p:spPr>
+        <p:txBody>
+          <a:bodyPr/>
+          <a:lstStyle/>
+          <a:p>
+            <a:endParaRPr lang="en-US"/>
+          </a:p>
+        </p:txBody>
       </p:sp>
       <p:sp>
         <p:nvSpPr>
@@ -23942,6 +24182,13 @@
             <a:prstDash val="solid"/>
           </a:ln>
         </p:spPr>
+        <p:txBody>
+          <a:bodyPr/>
+          <a:lstStyle/>
+          <a:p>
+            <a:endParaRPr lang="en-US"/>
+          </a:p>
+        </p:txBody>
       </p:sp>
       <p:sp>
         <p:nvSpPr>
@@ -23964,7 +24211,7 @@
           <a:bodyPr wrap="square" lIns="0" tIns="0" rIns="0" bIns="0" rtlCol="0" anchor="t"/>
           <a:lstStyle/>
           <a:p>
-            <a:pPr algn="l" indent="0" marL="0">
+            <a:pPr marL="0" indent="0" algn="l">
               <a:buNone/>
             </a:pPr>
             <a:r>
@@ -24004,6 +24251,13 @@
             <a:prstDash val="solid"/>
           </a:ln>
         </p:spPr>
+        <p:txBody>
+          <a:bodyPr/>
+          <a:lstStyle/>
+          <a:p>
+            <a:endParaRPr lang="en-US"/>
+          </a:p>
+        </p:txBody>
       </p:sp>
       <p:sp>
         <p:nvSpPr>
@@ -24029,6 +24283,13 @@
             <a:prstDash val="solid"/>
           </a:ln>
         </p:spPr>
+        <p:txBody>
+          <a:bodyPr/>
+          <a:lstStyle/>
+          <a:p>
+            <a:endParaRPr lang="en-US"/>
+          </a:p>
+        </p:txBody>
       </p:sp>
       <p:sp>
         <p:nvSpPr>
@@ -24051,7 +24312,7 @@
           <a:bodyPr wrap="square" lIns="0" tIns="0" rIns="0" bIns="0" rtlCol="0" anchor="t"/>
           <a:lstStyle/>
           <a:p>
-            <a:pPr algn="l" indent="0" marL="0">
+            <a:pPr marL="0" indent="0" algn="l">
               <a:buNone/>
             </a:pPr>
             <a:r>
@@ -24091,6 +24352,13 @@
             <a:prstDash val="solid"/>
           </a:ln>
         </p:spPr>
+        <p:txBody>
+          <a:bodyPr/>
+          <a:lstStyle/>
+          <a:p>
+            <a:endParaRPr lang="en-US"/>
+          </a:p>
+        </p:txBody>
       </p:sp>
       <p:sp>
         <p:nvSpPr>
@@ -24116,6 +24384,13 @@
             <a:prstDash val="solid"/>
           </a:ln>
         </p:spPr>
+        <p:txBody>
+          <a:bodyPr/>
+          <a:lstStyle/>
+          <a:p>
+            <a:endParaRPr lang="en-US"/>
+          </a:p>
+        </p:txBody>
       </p:sp>
       <p:sp>
         <p:nvSpPr>
@@ -24138,7 +24413,7 @@
           <a:bodyPr wrap="square" lIns="0" tIns="0" rIns="0" bIns="0" rtlCol="0" anchor="t"/>
           <a:lstStyle/>
           <a:p>
-            <a:pPr algn="l" indent="0" marL="0">
+            <a:pPr marL="0" indent="0" algn="l">
               <a:buNone/>
             </a:pPr>
             <a:r>
@@ -24178,6 +24453,13 @@
             <a:prstDash val="solid"/>
           </a:ln>
         </p:spPr>
+        <p:txBody>
+          <a:bodyPr/>
+          <a:lstStyle/>
+          <a:p>
+            <a:endParaRPr lang="en-US"/>
+          </a:p>
+        </p:txBody>
       </p:sp>
       <p:sp>
         <p:nvSpPr>
@@ -24203,6 +24485,13 @@
             <a:prstDash val="solid"/>
           </a:ln>
         </p:spPr>
+        <p:txBody>
+          <a:bodyPr/>
+          <a:lstStyle/>
+          <a:p>
+            <a:endParaRPr lang="en-US"/>
+          </a:p>
+        </p:txBody>
       </p:sp>
       <p:sp>
         <p:nvSpPr>
@@ -24225,7 +24514,7 @@
           <a:bodyPr wrap="square" lIns="0" tIns="0" rIns="0" bIns="0" rtlCol="0" anchor="t"/>
           <a:lstStyle/>
           <a:p>
-            <a:pPr algn="l" indent="0" marL="0">
+            <a:pPr marL="0" indent="0" algn="l">
               <a:buNone/>
             </a:pPr>
             <a:r>
@@ -24265,6 +24554,13 @@
             <a:prstDash val="solid"/>
           </a:ln>
         </p:spPr>
+        <p:txBody>
+          <a:bodyPr/>
+          <a:lstStyle/>
+          <a:p>
+            <a:endParaRPr lang="en-US"/>
+          </a:p>
+        </p:txBody>
       </p:sp>
       <p:sp>
         <p:nvSpPr>
@@ -24290,6 +24586,13 @@
             <a:prstDash val="solid"/>
           </a:ln>
         </p:spPr>
+        <p:txBody>
+          <a:bodyPr/>
+          <a:lstStyle/>
+          <a:p>
+            <a:endParaRPr lang="en-US"/>
+          </a:p>
+        </p:txBody>
       </p:sp>
       <p:sp>
         <p:nvSpPr>
@@ -24312,7 +24615,7 @@
           <a:bodyPr wrap="square" lIns="0" tIns="0" rIns="0" bIns="0" rtlCol="0" anchor="t"/>
           <a:lstStyle/>
           <a:p>
-            <a:pPr algn="l" indent="0" marL="0">
+            <a:pPr marL="0" indent="0" algn="l">
               <a:buNone/>
             </a:pPr>
             <a:r>
@@ -24352,6 +24655,13 @@
             <a:prstDash val="solid"/>
           </a:ln>
         </p:spPr>
+        <p:txBody>
+          <a:bodyPr/>
+          <a:lstStyle/>
+          <a:p>
+            <a:endParaRPr lang="en-US"/>
+          </a:p>
+        </p:txBody>
       </p:sp>
       <p:sp>
         <p:nvSpPr>
@@ -24377,6 +24687,13 @@
             <a:prstDash val="solid"/>
           </a:ln>
         </p:spPr>
+        <p:txBody>
+          <a:bodyPr/>
+          <a:lstStyle/>
+          <a:p>
+            <a:endParaRPr lang="en-US"/>
+          </a:p>
+        </p:txBody>
       </p:sp>
       <p:sp>
         <p:nvSpPr>
@@ -24399,7 +24716,7 @@
           <a:bodyPr wrap="square" lIns="0" tIns="0" rIns="0" bIns="0" rtlCol="0" anchor="t"/>
           <a:lstStyle/>
           <a:p>
-            <a:pPr algn="l" indent="0" marL="0">
+            <a:pPr marL="0" indent="0" algn="l">
               <a:buNone/>
             </a:pPr>
             <a:r>
@@ -24439,6 +24756,13 @@
             <a:prstDash val="solid"/>
           </a:ln>
         </p:spPr>
+        <p:txBody>
+          <a:bodyPr/>
+          <a:lstStyle/>
+          <a:p>
+            <a:endParaRPr lang="en-US"/>
+          </a:p>
+        </p:txBody>
       </p:sp>
       <p:sp>
         <p:nvSpPr>
@@ -24464,6 +24788,13 @@
             <a:prstDash val="solid"/>
           </a:ln>
         </p:spPr>
+        <p:txBody>
+          <a:bodyPr/>
+          <a:lstStyle/>
+          <a:p>
+            <a:endParaRPr lang="en-US"/>
+          </a:p>
+        </p:txBody>
       </p:sp>
       <p:sp>
         <p:nvSpPr>
@@ -24486,7 +24817,7 @@
           <a:bodyPr wrap="square" lIns="0" tIns="0" rIns="0" bIns="0" rtlCol="0" anchor="t"/>
           <a:lstStyle/>
           <a:p>
-            <a:pPr algn="l" indent="0" marL="0">
+            <a:pPr marL="0" indent="0" algn="l">
               <a:buNone/>
             </a:pPr>
             <a:r>
@@ -24526,6 +24857,13 @@
             <a:prstDash val="solid"/>
           </a:ln>
         </p:spPr>
+        <p:txBody>
+          <a:bodyPr/>
+          <a:lstStyle/>
+          <a:p>
+            <a:endParaRPr lang="en-US"/>
+          </a:p>
+        </p:txBody>
       </p:sp>
       <p:sp>
         <p:nvSpPr>
@@ -24551,6 +24889,13 @@
             <a:prstDash val="solid"/>
           </a:ln>
         </p:spPr>
+        <p:txBody>
+          <a:bodyPr/>
+          <a:lstStyle/>
+          <a:p>
+            <a:endParaRPr lang="en-US"/>
+          </a:p>
+        </p:txBody>
       </p:sp>
       <p:sp>
         <p:nvSpPr>
@@ -24573,7 +24918,7 @@
           <a:bodyPr wrap="square" lIns="0" tIns="0" rIns="0" bIns="0" rtlCol="0" anchor="t"/>
           <a:lstStyle/>
           <a:p>
-            <a:pPr algn="l" indent="0" marL="0">
+            <a:pPr marL="0" indent="0" algn="l">
               <a:buNone/>
             </a:pPr>
             <a:r>
@@ -24613,6 +24958,13 @@
             <a:prstDash val="solid"/>
           </a:ln>
         </p:spPr>
+        <p:txBody>
+          <a:bodyPr/>
+          <a:lstStyle/>
+          <a:p>
+            <a:endParaRPr lang="en-US"/>
+          </a:p>
+        </p:txBody>
       </p:sp>
       <p:sp>
         <p:nvSpPr>
@@ -24638,6 +24990,13 @@
             <a:prstDash val="solid"/>
           </a:ln>
         </p:spPr>
+        <p:txBody>
+          <a:bodyPr/>
+          <a:lstStyle/>
+          <a:p>
+            <a:endParaRPr lang="en-US"/>
+          </a:p>
+        </p:txBody>
       </p:sp>
       <p:sp>
         <p:nvSpPr>
@@ -24660,7 +25019,7 @@
           <a:bodyPr wrap="square" lIns="0" tIns="0" rIns="0" bIns="0" rtlCol="0" anchor="t"/>
           <a:lstStyle/>
           <a:p>
-            <a:pPr algn="l" indent="0" marL="0">
+            <a:pPr marL="0" indent="0" algn="l">
               <a:buNone/>
             </a:pPr>
             <a:r>
@@ -24700,6 +25059,13 @@
             <a:prstDash val="solid"/>
           </a:ln>
         </p:spPr>
+        <p:txBody>
+          <a:bodyPr/>
+          <a:lstStyle/>
+          <a:p>
+            <a:endParaRPr lang="en-US"/>
+          </a:p>
+        </p:txBody>
       </p:sp>
       <p:sp>
         <p:nvSpPr>
@@ -24725,6 +25091,13 @@
             <a:prstDash val="solid"/>
           </a:ln>
         </p:spPr>
+        <p:txBody>
+          <a:bodyPr/>
+          <a:lstStyle/>
+          <a:p>
+            <a:endParaRPr lang="en-US"/>
+          </a:p>
+        </p:txBody>
       </p:sp>
       <p:sp>
         <p:nvSpPr>
@@ -24747,7 +25120,7 @@
           <a:bodyPr wrap="square" lIns="0" tIns="0" rIns="0" bIns="0" rtlCol="0" anchor="t"/>
           <a:lstStyle/>
           <a:p>
-            <a:pPr algn="l" indent="0" marL="0">
+            <a:pPr marL="0" indent="0" algn="l">
               <a:buNone/>
             </a:pPr>
             <a:r>
@@ -24787,6 +25160,13 @@
             <a:prstDash val="solid"/>
           </a:ln>
         </p:spPr>
+        <p:txBody>
+          <a:bodyPr/>
+          <a:lstStyle/>
+          <a:p>
+            <a:endParaRPr lang="en-US"/>
+          </a:p>
+        </p:txBody>
       </p:sp>
       <p:sp>
         <p:nvSpPr>
@@ -24812,6 +25192,13 @@
             <a:prstDash val="solid"/>
           </a:ln>
         </p:spPr>
+        <p:txBody>
+          <a:bodyPr/>
+          <a:lstStyle/>
+          <a:p>
+            <a:endParaRPr lang="en-US"/>
+          </a:p>
+        </p:txBody>
       </p:sp>
       <p:sp>
         <p:nvSpPr>
@@ -24834,7 +25221,7 @@
           <a:bodyPr wrap="square" lIns="0" tIns="0" rIns="0" bIns="0" rtlCol="0" anchor="t"/>
           <a:lstStyle/>
           <a:p>
-            <a:pPr algn="l" indent="0" marL="0">
+            <a:pPr marL="0" indent="0" algn="l">
               <a:buNone/>
             </a:pPr>
             <a:r>
@@ -24874,6 +25261,13 @@
             <a:prstDash val="solid"/>
           </a:ln>
         </p:spPr>
+        <p:txBody>
+          <a:bodyPr/>
+          <a:lstStyle/>
+          <a:p>
+            <a:endParaRPr lang="en-US"/>
+          </a:p>
+        </p:txBody>
       </p:sp>
       <p:sp>
         <p:nvSpPr>
@@ -24899,6 +25293,13 @@
             <a:prstDash val="solid"/>
           </a:ln>
         </p:spPr>
+        <p:txBody>
+          <a:bodyPr/>
+          <a:lstStyle/>
+          <a:p>
+            <a:endParaRPr lang="en-US"/>
+          </a:p>
+        </p:txBody>
       </p:sp>
       <p:sp>
         <p:nvSpPr>
@@ -24921,7 +25322,7 @@
           <a:bodyPr wrap="square" lIns="0" tIns="0" rIns="0" bIns="0" rtlCol="0" anchor="t"/>
           <a:lstStyle/>
           <a:p>
-            <a:pPr algn="l" indent="0" marL="0">
+            <a:pPr marL="0" indent="0" algn="l">
               <a:buNone/>
             </a:pPr>
             <a:r>
@@ -24961,6 +25362,13 @@
             <a:prstDash val="solid"/>
           </a:ln>
         </p:spPr>
+        <p:txBody>
+          <a:bodyPr/>
+          <a:lstStyle/>
+          <a:p>
+            <a:endParaRPr lang="en-US"/>
+          </a:p>
+        </p:txBody>
       </p:sp>
       <p:sp>
         <p:nvSpPr>
@@ -24986,6 +25394,13 @@
             <a:prstDash val="solid"/>
           </a:ln>
         </p:spPr>
+        <p:txBody>
+          <a:bodyPr/>
+          <a:lstStyle/>
+          <a:p>
+            <a:endParaRPr lang="en-US"/>
+          </a:p>
+        </p:txBody>
       </p:sp>
       <p:sp>
         <p:nvSpPr>
@@ -25008,7 +25423,7 @@
           <a:bodyPr wrap="square" lIns="0" tIns="0" rIns="0" bIns="0" rtlCol="0" anchor="t"/>
           <a:lstStyle/>
           <a:p>
-            <a:pPr algn="l" indent="0" marL="0">
+            <a:pPr marL="0" indent="0" algn="l">
               <a:buNone/>
             </a:pPr>
             <a:r>
@@ -25050,6 +25465,13 @@
             <a:prstDash val="solid"/>
           </a:ln>
         </p:spPr>
+        <p:txBody>
+          <a:bodyPr/>
+          <a:lstStyle/>
+          <a:p>
+            <a:endParaRPr lang="en-US"/>
+          </a:p>
+        </p:txBody>
       </p:sp>
       <p:sp>
         <p:nvSpPr>
@@ -25072,7 +25494,7 @@
           <a:bodyPr wrap="square" lIns="0" tIns="0" rIns="0" bIns="0" rtlCol="0" anchor="t"/>
           <a:lstStyle/>
           <a:p>
-            <a:pPr indent="0" marL="0">
+            <a:pPr marL="0" indent="0">
               <a:buNone/>
             </a:pPr>
             <a:r>
@@ -25114,6 +25536,13 @@
             <a:prstDash val="solid"/>
           </a:ln>
         </p:spPr>
+        <p:txBody>
+          <a:bodyPr/>
+          <a:lstStyle/>
+          <a:p>
+            <a:endParaRPr lang="en-US"/>
+          </a:p>
+        </p:txBody>
       </p:sp>
       <p:sp>
         <p:nvSpPr>
@@ -25136,7 +25565,7 @@
           <a:bodyPr wrap="square" lIns="0" tIns="0" rIns="0" bIns="0" rtlCol="0" anchor="t"/>
           <a:lstStyle/>
           <a:p>
-            <a:pPr indent="0" marL="0">
+            <a:pPr marL="0" indent="0">
               <a:buNone/>
             </a:pPr>
             <a:r>
@@ -25175,7 +25604,7 @@
           <a:bodyPr wrap="square" lIns="0" tIns="0" rIns="0" bIns="0" rtlCol="0" anchor="t"/>
           <a:lstStyle/>
           <a:p>
-            <a:pPr indent="0" marL="0">
+            <a:pPr marL="0" indent="0">
               <a:buNone/>
             </a:pPr>
             <a:r>
@@ -25214,7 +25643,7 @@
           <a:bodyPr wrap="square" lIns="0" tIns="0" rIns="0" bIns="0" rtlCol="0" anchor="ctr"/>
           <a:lstStyle/>
           <a:p>
-            <a:pPr indent="0" marL="0">
+            <a:pPr marL="0" indent="0">
               <a:buNone/>
             </a:pPr>
             <a:r>
@@ -25253,7 +25682,7 @@
           <a:bodyPr wrap="square" lIns="0" tIns="0" rIns="0" bIns="0" rtlCol="0" anchor="ctr"/>
           <a:lstStyle/>
           <a:p>
-            <a:pPr algn="r" indent="0" marL="0">
+            <a:pPr marL="0" indent="0" algn="r">
               <a:buNone/>
             </a:pPr>
             <a:r>
@@ -25287,6 +25716,7 @@
         <a:solidFill>
           <a:srgbClr val="2B2E36"/>
         </a:solidFill>
+        <a:effectLst/>
       </p:bgPr>
     </p:bg>
     <p:spTree>
@@ -25324,7 +25754,7 @@
           <a:bodyPr wrap="square" lIns="0" tIns="0" rIns="0" bIns="0" rtlCol="0" anchor="ctr"/>
           <a:lstStyle/>
           <a:p>
-            <a:pPr indent="0" marL="0">
+            <a:pPr marL="0" indent="0">
               <a:buNone/>
             </a:pPr>
             <a:r>
@@ -25368,6 +25798,13 @@
             <a:prstDash val="solid"/>
           </a:ln>
         </p:spPr>
+        <p:txBody>
+          <a:bodyPr/>
+          <a:lstStyle/>
+          <a:p>
+            <a:endParaRPr lang="en-US"/>
+          </a:p>
+        </p:txBody>
       </p:sp>
       <p:sp>
         <p:nvSpPr>
@@ -25393,17 +25830,24 @@
             <a:prstDash val="solid"/>
           </a:ln>
         </p:spPr>
+        <p:txBody>
+          <a:bodyPr/>
+          <a:lstStyle/>
+          <a:p>
+            <a:endParaRPr lang="en-US"/>
+          </a:p>
+        </p:txBody>
       </p:sp>
       <p:pic>
         <p:nvPicPr>
-          <p:cNvPr id="5" name="Image 0" descr="preencoded.png">    </p:cNvPr>
+          <p:cNvPr id="5" name="Image 0" descr="preencoded.png"/>
           <p:cNvPicPr>
             <a:picLocks noChangeAspect="1"/>
           </p:cNvPicPr>
           <p:nvPr/>
         </p:nvPicPr>
         <p:blipFill>
-          <a:blip r:embed="rId1"/>
+          <a:blip r:embed="rId3"/>
           <a:stretch>
             <a:fillRect/>
           </a:stretch>
@@ -25439,7 +25883,7 @@
           <a:bodyPr wrap="square" lIns="0" tIns="0" rIns="0" bIns="0" rtlCol="0" anchor="t"/>
           <a:lstStyle/>
           <a:p>
-            <a:pPr indent="0" marL="0">
+            <a:pPr marL="0" indent="0">
               <a:buNone/>
             </a:pPr>
             <a:r>
@@ -25478,7 +25922,7 @@
           <a:bodyPr wrap="square" lIns="0" tIns="0" rIns="0" bIns="0" rtlCol="0" anchor="t"/>
           <a:lstStyle/>
           <a:p>
-            <a:pPr indent="0" marL="0">
+            <a:pPr marL="0" indent="0">
               <a:buNone/>
             </a:pPr>
             <a:r>
@@ -25522,6 +25966,13 @@
             <a:prstDash val="solid"/>
           </a:ln>
         </p:spPr>
+        <p:txBody>
+          <a:bodyPr/>
+          <a:lstStyle/>
+          <a:p>
+            <a:endParaRPr lang="en-US"/>
+          </a:p>
+        </p:txBody>
       </p:sp>
       <p:sp>
         <p:nvSpPr>
@@ -25547,17 +25998,24 @@
             <a:prstDash val="solid"/>
           </a:ln>
         </p:spPr>
+        <p:txBody>
+          <a:bodyPr/>
+          <a:lstStyle/>
+          <a:p>
+            <a:endParaRPr lang="en-US"/>
+          </a:p>
+        </p:txBody>
       </p:sp>
       <p:pic>
         <p:nvPicPr>
-          <p:cNvPr id="10" name="Image 1" descr="preencoded.png">    </p:cNvPr>
+          <p:cNvPr id="10" name="Image 1" descr="preencoded.png"/>
           <p:cNvPicPr>
             <a:picLocks noChangeAspect="1"/>
           </p:cNvPicPr>
           <p:nvPr/>
         </p:nvPicPr>
         <p:blipFill>
-          <a:blip r:embed="rId2"/>
+          <a:blip r:embed="rId4"/>
           <a:stretch>
             <a:fillRect/>
           </a:stretch>
@@ -25593,7 +26051,7 @@
           <a:bodyPr wrap="square" lIns="0" tIns="0" rIns="0" bIns="0" rtlCol="0" anchor="t"/>
           <a:lstStyle/>
           <a:p>
-            <a:pPr indent="0" marL="0">
+            <a:pPr marL="0" indent="0">
               <a:buNone/>
             </a:pPr>
             <a:r>
@@ -25632,7 +26090,7 @@
           <a:bodyPr wrap="square" lIns="0" tIns="0" rIns="0" bIns="0" rtlCol="0" anchor="t"/>
           <a:lstStyle/>
           <a:p>
-            <a:pPr indent="0" marL="0">
+            <a:pPr marL="0" indent="0">
               <a:buNone/>
             </a:pPr>
             <a:r>
@@ -25676,6 +26134,13 @@
             <a:prstDash val="solid"/>
           </a:ln>
         </p:spPr>
+        <p:txBody>
+          <a:bodyPr/>
+          <a:lstStyle/>
+          <a:p>
+            <a:endParaRPr lang="en-US"/>
+          </a:p>
+        </p:txBody>
       </p:sp>
       <p:sp>
         <p:nvSpPr>
@@ -25701,17 +26166,24 @@
             <a:prstDash val="solid"/>
           </a:ln>
         </p:spPr>
+        <p:txBody>
+          <a:bodyPr/>
+          <a:lstStyle/>
+          <a:p>
+            <a:endParaRPr lang="en-US"/>
+          </a:p>
+        </p:txBody>
       </p:sp>
       <p:pic>
         <p:nvPicPr>
-          <p:cNvPr id="15" name="Image 2" descr="preencoded.png">    </p:cNvPr>
+          <p:cNvPr id="15" name="Image 2" descr="preencoded.png"/>
           <p:cNvPicPr>
             <a:picLocks noChangeAspect="1"/>
           </p:cNvPicPr>
           <p:nvPr/>
         </p:nvPicPr>
         <p:blipFill>
-          <a:blip r:embed="rId3"/>
+          <a:blip r:embed="rId5"/>
           <a:stretch>
             <a:fillRect/>
           </a:stretch>
@@ -25747,7 +26219,7 @@
           <a:bodyPr wrap="square" lIns="0" tIns="0" rIns="0" bIns="0" rtlCol="0" anchor="t"/>
           <a:lstStyle/>
           <a:p>
-            <a:pPr indent="0" marL="0">
+            <a:pPr marL="0" indent="0">
               <a:buNone/>
             </a:pPr>
             <a:r>
@@ -25786,7 +26258,7 @@
           <a:bodyPr wrap="square" lIns="0" tIns="0" rIns="0" bIns="0" rtlCol="0" anchor="t"/>
           <a:lstStyle/>
           <a:p>
-            <a:pPr indent="0" marL="0">
+            <a:pPr marL="0" indent="0">
               <a:buNone/>
             </a:pPr>
             <a:r>
@@ -25825,7 +26297,7 @@
           <a:bodyPr wrap="square" lIns="0" tIns="0" rIns="0" bIns="0" rtlCol="0" anchor="ctr"/>
           <a:lstStyle/>
           <a:p>
-            <a:pPr indent="0" marL="0">
+            <a:pPr marL="0" indent="0">
               <a:buNone/>
             </a:pPr>
             <a:r>
@@ -25864,7 +26336,7 @@
           <a:bodyPr wrap="square" lIns="0" tIns="0" rIns="0" bIns="0" rtlCol="0" anchor="ctr"/>
           <a:lstStyle/>
           <a:p>
-            <a:pPr indent="0" marL="0">
+            <a:pPr marL="0" indent="0">
               <a:buNone/>
             </a:pPr>
             <a:r>
@@ -25903,7 +26375,7 @@
           <a:bodyPr wrap="square" lIns="0" tIns="0" rIns="0" bIns="0" rtlCol="0" anchor="ctr"/>
           <a:lstStyle/>
           <a:p>
-            <a:pPr algn="r" indent="0" marL="0">
+            <a:pPr marL="0" indent="0" algn="r">
               <a:buNone/>
             </a:pPr>
             <a:r>
@@ -25937,6 +26409,7 @@
         <a:solidFill>
           <a:srgbClr val="FFFFFF"/>
         </a:solidFill>
+        <a:effectLst/>
       </p:bgPr>
     </p:bg>
     <p:spTree>
@@ -25974,11 +26447,11 @@
           <a:bodyPr wrap="square" lIns="0" tIns="0" rIns="0" bIns="0" rtlCol="0" anchor="ctr"/>
           <a:lstStyle/>
           <a:p>
-            <a:pPr indent="0" marL="0">
-              <a:buNone/>
-            </a:pPr>
-            <a:r>
-              <a:rPr lang="en-US" sz="1100" b="1" spc="100" kern="0" dirty="0">
+            <a:pPr marL="0" indent="0">
+              <a:buNone/>
+            </a:pPr>
+            <a:r>
+              <a:rPr lang="en-US" sz="1100" b="1" kern="0" spc="100" dirty="0">
                 <a:solidFill>
                   <a:srgbClr val="A98B3C"/>
                 </a:solidFill>
@@ -26013,7 +26486,7 @@
           <a:bodyPr wrap="square" lIns="0" tIns="0" rIns="0" bIns="0" rtlCol="0" anchor="ctr"/>
           <a:lstStyle/>
           <a:p>
-            <a:pPr indent="0" marL="0">
+            <a:pPr marL="0" indent="0">
               <a:buNone/>
             </a:pPr>
             <a:r>
@@ -26052,7 +26525,7 @@
           <a:bodyPr wrap="square" lIns="0" tIns="0" rIns="0" bIns="0" rtlCol="0" anchor="ctr"/>
           <a:lstStyle/>
           <a:p>
-            <a:pPr indent="0" marL="0">
+            <a:pPr marL="0" indent="0">
               <a:buNone/>
             </a:pPr>
             <a:r>
@@ -26096,6 +26569,13 @@
             <a:prstDash val="solid"/>
           </a:ln>
         </p:spPr>
+        <p:txBody>
+          <a:bodyPr/>
+          <a:lstStyle/>
+          <a:p>
+            <a:endParaRPr lang="en-US"/>
+          </a:p>
+        </p:txBody>
       </p:sp>
       <p:sp>
         <p:nvSpPr>
@@ -26121,17 +26601,24 @@
             <a:prstDash val="solid"/>
           </a:ln>
         </p:spPr>
+        <p:txBody>
+          <a:bodyPr/>
+          <a:lstStyle/>
+          <a:p>
+            <a:endParaRPr lang="en-US"/>
+          </a:p>
+        </p:txBody>
       </p:sp>
       <p:pic>
         <p:nvPicPr>
-          <p:cNvPr id="7" name="Image 0" descr="preencoded.png">    </p:cNvPr>
+          <p:cNvPr id="7" name="Image 0" descr="preencoded.png"/>
           <p:cNvPicPr>
             <a:picLocks noChangeAspect="1"/>
           </p:cNvPicPr>
           <p:nvPr/>
         </p:nvPicPr>
         <p:blipFill>
-          <a:blip r:embed="rId1"/>
+          <a:blip r:embed="rId3"/>
           <a:stretch>
             <a:fillRect/>
           </a:stretch>
@@ -26167,7 +26654,7 @@
           <a:bodyPr wrap="square" lIns="0" tIns="0" rIns="0" bIns="0" rtlCol="0" anchor="t"/>
           <a:lstStyle/>
           <a:p>
-            <a:pPr indent="0" marL="0">
+            <a:pPr marL="0" indent="0">
               <a:buNone/>
             </a:pPr>
             <a:r>
@@ -26206,7 +26693,7 @@
           <a:bodyPr wrap="square" lIns="0" tIns="0" rIns="0" bIns="0" rtlCol="0" anchor="t"/>
           <a:lstStyle/>
           <a:p>
-            <a:pPr indent="0" marL="0">
+            <a:pPr marL="0" indent="0">
               <a:buNone/>
             </a:pPr>
             <a:r>
@@ -26248,17 +26735,24 @@
             <a:prstDash val="solid"/>
           </a:ln>
         </p:spPr>
+        <p:txBody>
+          <a:bodyPr/>
+          <a:lstStyle/>
+          <a:p>
+            <a:endParaRPr lang="en-US"/>
+          </a:p>
+        </p:txBody>
       </p:sp>
       <p:pic>
         <p:nvPicPr>
-          <p:cNvPr id="11" name="Image 1" descr="preencoded.png">    </p:cNvPr>
+          <p:cNvPr id="11" name="Image 1" descr="preencoded.png"/>
           <p:cNvPicPr>
             <a:picLocks noChangeAspect="1"/>
           </p:cNvPicPr>
           <p:nvPr/>
         </p:nvPicPr>
         <p:blipFill>
-          <a:blip r:embed="rId2"/>
+          <a:blip r:embed="rId4"/>
           <a:stretch>
             <a:fillRect/>
           </a:stretch>
@@ -26294,7 +26788,7 @@
           <a:bodyPr wrap="square" lIns="0" tIns="0" rIns="0" bIns="0" rtlCol="0" anchor="t"/>
           <a:lstStyle/>
           <a:p>
-            <a:pPr indent="0" marL="0">
+            <a:pPr marL="0" indent="0">
               <a:buNone/>
             </a:pPr>
             <a:r>
@@ -26333,7 +26827,7 @@
           <a:bodyPr wrap="square" lIns="0" tIns="0" rIns="0" bIns="0" rtlCol="0" anchor="t"/>
           <a:lstStyle/>
           <a:p>
-            <a:pPr indent="0" marL="0">
+            <a:pPr marL="0" indent="0">
               <a:buNone/>
             </a:pPr>
             <a:r>
@@ -26353,14 +26847,14 @@
       </p:sp>
       <p:pic>
         <p:nvPicPr>
-          <p:cNvPr id="14" name="Image 2" descr="preencoded.png">    </p:cNvPr>
+          <p:cNvPr id="14" name="Image 2" descr="preencoded.png"/>
           <p:cNvPicPr>
             <a:picLocks noChangeAspect="1"/>
           </p:cNvPicPr>
           <p:nvPr/>
         </p:nvPicPr>
         <p:blipFill>
-          <a:blip r:embed="rId3"/>
+          <a:blip r:embed="rId5"/>
           <a:stretch>
             <a:fillRect/>
           </a:stretch>
@@ -26399,17 +26893,24 @@
             <a:prstDash val="solid"/>
           </a:ln>
         </p:spPr>
+        <p:txBody>
+          <a:bodyPr/>
+          <a:lstStyle/>
+          <a:p>
+            <a:endParaRPr lang="en-US"/>
+          </a:p>
+        </p:txBody>
       </p:sp>
       <p:pic>
         <p:nvPicPr>
-          <p:cNvPr id="16" name="Image 3" descr="preencoded.png">    </p:cNvPr>
+          <p:cNvPr id="16" name="Image 3" descr="preencoded.png"/>
           <p:cNvPicPr>
             <a:picLocks noChangeAspect="1"/>
           </p:cNvPicPr>
           <p:nvPr/>
         </p:nvPicPr>
         <p:blipFill>
-          <a:blip r:embed="rId4"/>
+          <a:blip r:embed="rId6"/>
           <a:stretch>
             <a:fillRect/>
           </a:stretch>
@@ -26445,7 +26946,7 @@
           <a:bodyPr wrap="square" lIns="0" tIns="0" rIns="0" bIns="0" rtlCol="0" anchor="t"/>
           <a:lstStyle/>
           <a:p>
-            <a:pPr indent="0" marL="0">
+            <a:pPr marL="0" indent="0">
               <a:buNone/>
             </a:pPr>
             <a:r>
@@ -26484,7 +26985,7 @@
           <a:bodyPr wrap="square" lIns="0" tIns="0" rIns="0" bIns="0" rtlCol="0" anchor="t"/>
           <a:lstStyle/>
           <a:p>
-            <a:pPr indent="0" marL="0">
+            <a:pPr marL="0" indent="0">
               <a:buNone/>
             </a:pPr>
             <a:r>
@@ -26504,7 +27005,7 @@
       </p:sp>
       <p:pic>
         <p:nvPicPr>
-          <p:cNvPr id="19" name="Image 4" descr="preencoded.png">    </p:cNvPr>
+          <p:cNvPr id="19" name="Image 4" descr="preencoded.png"/>
           <p:cNvPicPr>
             <a:picLocks noChangeAspect="1"/>
           </p:cNvPicPr>
@@ -26550,17 +27051,24 @@
             <a:prstDash val="solid"/>
           </a:ln>
         </p:spPr>
+        <p:txBody>
+          <a:bodyPr/>
+          <a:lstStyle/>
+          <a:p>
+            <a:endParaRPr lang="en-US"/>
+          </a:p>
+        </p:txBody>
       </p:sp>
       <p:pic>
         <p:nvPicPr>
-          <p:cNvPr id="21" name="Image 5" descr="preencoded.png">    </p:cNvPr>
+          <p:cNvPr id="21" name="Image 5" descr="preencoded.png"/>
           <p:cNvPicPr>
             <a:picLocks noChangeAspect="1"/>
           </p:cNvPicPr>
           <p:nvPr/>
         </p:nvPicPr>
         <p:blipFill>
-          <a:blip r:embed="rId6"/>
+          <a:blip r:embed="rId7"/>
           <a:stretch>
             <a:fillRect/>
           </a:stretch>
@@ -26596,7 +27104,7 @@
           <a:bodyPr wrap="square" lIns="0" tIns="0" rIns="0" bIns="0" rtlCol="0" anchor="t"/>
           <a:lstStyle/>
           <a:p>
-            <a:pPr indent="0" marL="0">
+            <a:pPr marL="0" indent="0">
               <a:buNone/>
             </a:pPr>
             <a:r>
@@ -26635,7 +27143,7 @@
           <a:bodyPr wrap="square" lIns="0" tIns="0" rIns="0" bIns="0" rtlCol="0" anchor="t"/>
           <a:lstStyle/>
           <a:p>
-            <a:pPr indent="0" marL="0">
+            <a:pPr marL="0" indent="0">
               <a:buNone/>
             </a:pPr>
             <a:r>
@@ -26674,7 +27182,7 @@
           <a:bodyPr wrap="square" lIns="0" tIns="0" rIns="0" bIns="0" rtlCol="0" anchor="ctr"/>
           <a:lstStyle/>
           <a:p>
-            <a:pPr indent="0" marL="0">
+            <a:pPr marL="0" indent="0">
               <a:buNone/>
             </a:pPr>
             <a:r>
@@ -26713,7 +27221,7 @@
           <a:bodyPr wrap="square" lIns="0" tIns="0" rIns="0" bIns="0" rtlCol="0" anchor="ctr"/>
           <a:lstStyle/>
           <a:p>
-            <a:pPr algn="r" indent="0" marL="0">
+            <a:pPr marL="0" indent="0" algn="r">
               <a:buNone/>
             </a:pPr>
             <a:r>
@@ -27032,4 +27540,319 @@
     </a:ext>
   </a:extLst>
 </a:theme>
+</file>
+
+<file path=ppt/theme/theme2.xml><?xml version="1.0" encoding="utf-8"?>
+<a:theme xmlns:a="http://schemas.openxmlformats.org/drawingml/2006/main" name="Office Theme">
+  <a:themeElements>
+    <a:clrScheme name="Office">
+      <a:dk1>
+        <a:sysClr val="windowText" lastClr="000000"/>
+      </a:dk1>
+      <a:lt1>
+        <a:sysClr val="window" lastClr="FFFFFF"/>
+      </a:lt1>
+      <a:dk2>
+        <a:srgbClr val="0E2841"/>
+      </a:dk2>
+      <a:lt2>
+        <a:srgbClr val="E8E8E8"/>
+      </a:lt2>
+      <a:accent1>
+        <a:srgbClr val="156082"/>
+      </a:accent1>
+      <a:accent2>
+        <a:srgbClr val="E97132"/>
+      </a:accent2>
+      <a:accent3>
+        <a:srgbClr val="196B24"/>
+      </a:accent3>
+      <a:accent4>
+        <a:srgbClr val="0F9ED5"/>
+      </a:accent4>
+      <a:accent5>
+        <a:srgbClr val="A02B93"/>
+      </a:accent5>
+      <a:accent6>
+        <a:srgbClr val="4EA72E"/>
+      </a:accent6>
+      <a:hlink>
+        <a:srgbClr val="467886"/>
+      </a:hlink>
+      <a:folHlink>
+        <a:srgbClr val="96607D"/>
+      </a:folHlink>
+    </a:clrScheme>
+    <a:fontScheme name="Office">
+      <a:majorFont>
+        <a:latin typeface="Aptos Display" panose="02110004020202020204"/>
+        <a:ea typeface=""/>
+        <a:cs typeface=""/>
+        <a:font script="Jpan" typeface="游ゴシック Light"/>
+        <a:font script="Hang" typeface="맑은 고딕"/>
+        <a:font script="Hans" typeface="等线 Light"/>
+        <a:font script="Hant" typeface="新細明體"/>
+        <a:font script="Arab" typeface="Times New Roman"/>
+        <a:font script="Hebr" typeface="Times New Roman"/>
+        <a:font script="Thai" typeface="Angsana New"/>
+        <a:font script="Ethi" typeface="Nyala"/>
+        <a:font script="Beng" typeface="Vrinda"/>
+        <a:font script="Gujr" typeface="Shruti"/>
+        <a:font script="Khmr" typeface="MoolBoran"/>
+        <a:font script="Knda" typeface="Tunga"/>
+        <a:font script="Guru" typeface="Raavi"/>
+        <a:font script="Cans" typeface="Euphemia"/>
+        <a:font script="Cher" typeface="Plantagenet Cherokee"/>
+        <a:font script="Yiii" typeface="Microsoft Yi Baiti"/>
+        <a:font script="Tibt" typeface="Microsoft Himalaya"/>
+        <a:font script="Thaa" typeface="MV Boli"/>
+        <a:font script="Deva" typeface="Mangal"/>
+        <a:font script="Telu" typeface="Gautami"/>
+        <a:font script="Taml" typeface="Latha"/>
+        <a:font script="Syrc" typeface="Estrangelo Edessa"/>
+        <a:font script="Orya" typeface="Kalinga"/>
+        <a:font script="Mlym" typeface="Kartika"/>
+        <a:font script="Laoo" typeface="DokChampa"/>
+        <a:font script="Sinh" typeface="Iskoola Pota"/>
+        <a:font script="Mong" typeface="Mongolian Baiti"/>
+        <a:font script="Viet" typeface="Times New Roman"/>
+        <a:font script="Uigh" typeface="Microsoft Uighur"/>
+        <a:font script="Geor" typeface="Sylfaen"/>
+        <a:font script="Armn" typeface="Arial"/>
+        <a:font script="Bugi" typeface="Leelawadee UI"/>
+        <a:font script="Bopo" typeface="Microsoft JhengHei"/>
+        <a:font script="Java" typeface="Javanese Text"/>
+        <a:font script="Lisu" typeface="Segoe UI"/>
+        <a:font script="Mymr" typeface="Myanmar Text"/>
+        <a:font script="Nkoo" typeface="Ebrima"/>
+        <a:font script="Olck" typeface="Nirmala UI"/>
+        <a:font script="Osma" typeface="Ebrima"/>
+        <a:font script="Phag" typeface="Phagspa"/>
+        <a:font script="Syrn" typeface="Estrangelo Edessa"/>
+        <a:font script="Syrj" typeface="Estrangelo Edessa"/>
+        <a:font script="Syre" typeface="Estrangelo Edessa"/>
+        <a:font script="Sora" typeface="Nirmala UI"/>
+        <a:font script="Tale" typeface="Microsoft Tai Le"/>
+        <a:font script="Talu" typeface="Microsoft New Tai Lue"/>
+        <a:font script="Tfng" typeface="Ebrima"/>
+      </a:majorFont>
+      <a:minorFont>
+        <a:latin typeface="Aptos" panose="02110004020202020204"/>
+        <a:ea typeface=""/>
+        <a:cs typeface=""/>
+        <a:font script="Jpan" typeface="游ゴシック"/>
+        <a:font script="Hang" typeface="맑은 고딕"/>
+        <a:font script="Hans" typeface="等线"/>
+        <a:font script="Hant" typeface="新細明體"/>
+        <a:font script="Arab" typeface="Arial"/>
+        <a:font script="Hebr" typeface="Arial"/>
+        <a:font script="Thai" typeface="Cordia New"/>
+        <a:font script="Ethi" typeface="Nyala"/>
+        <a:font script="Beng" typeface="Vrinda"/>
+        <a:font script="Gujr" typeface="Shruti"/>
+        <a:font script="Khmr" typeface="DaunPenh"/>
+        <a:font script="Knda" typeface="Tunga"/>
+        <a:font script="Guru" typeface="Raavi"/>
+        <a:font script="Cans" typeface="Euphemia"/>
+        <a:font script="Cher" typeface="Plantagenet Cherokee"/>
+        <a:font script="Yiii" typeface="Microsoft Yi Baiti"/>
+        <a:font script="Tibt" typeface="Microsoft Himalaya"/>
+        <a:font script="Thaa" typeface="MV Boli"/>
+        <a:font script="Deva" typeface="Mangal"/>
+        <a:font script="Telu" typeface="Gautami"/>
+        <a:font script="Taml" typeface="Latha"/>
+        <a:font script="Syrc" typeface="Estrangelo Edessa"/>
+        <a:font script="Orya" typeface="Kalinga"/>
+        <a:font script="Mlym" typeface="Kartika"/>
+        <a:font script="Laoo" typeface="DokChampa"/>
+        <a:font script="Sinh" typeface="Iskoola Pota"/>
+        <a:font script="Mong" typeface="Mongolian Baiti"/>
+        <a:font script="Viet" typeface="Arial"/>
+        <a:font script="Uigh" typeface="Microsoft Uighur"/>
+        <a:font script="Geor" typeface="Sylfaen"/>
+        <a:font script="Armn" typeface="Arial"/>
+        <a:font script="Bugi" typeface="Leelawadee UI"/>
+        <a:font script="Bopo" typeface="Microsoft JhengHei"/>
+        <a:font script="Java" typeface="Javanese Text"/>
+        <a:font script="Lisu" typeface="Segoe UI"/>
+        <a:font script="Mymr" typeface="Myanmar Text"/>
+        <a:font script="Nkoo" typeface="Ebrima"/>
+        <a:font script="Olck" typeface="Nirmala UI"/>
+        <a:font script="Osma" typeface="Ebrima"/>
+        <a:font script="Phag" typeface="Phagspa"/>
+        <a:font script="Syrn" typeface="Estrangelo Edessa"/>
+        <a:font script="Syrj" typeface="Estrangelo Edessa"/>
+        <a:font script="Syre" typeface="Estrangelo Edessa"/>
+        <a:font script="Sora" typeface="Nirmala UI"/>
+        <a:font script="Tale" typeface="Microsoft Tai Le"/>
+        <a:font script="Talu" typeface="Microsoft New Tai Lue"/>
+        <a:font script="Tfng" typeface="Ebrima"/>
+      </a:minorFont>
+    </a:fontScheme>
+    <a:fmtScheme name="Office">
+      <a:fillStyleLst>
+        <a:solidFill>
+          <a:schemeClr val="phClr"/>
+        </a:solidFill>
+        <a:gradFill rotWithShape="1">
+          <a:gsLst>
+            <a:gs pos="0">
+              <a:schemeClr val="phClr">
+                <a:lumMod val="110000"/>
+                <a:satMod val="105000"/>
+                <a:tint val="67000"/>
+              </a:schemeClr>
+            </a:gs>
+            <a:gs pos="50000">
+              <a:schemeClr val="phClr">
+                <a:lumMod val="105000"/>
+                <a:satMod val="103000"/>
+                <a:tint val="73000"/>
+              </a:schemeClr>
+            </a:gs>
+            <a:gs pos="100000">
+              <a:schemeClr val="phClr">
+                <a:lumMod val="105000"/>
+                <a:satMod val="109000"/>
+                <a:tint val="81000"/>
+              </a:schemeClr>
+            </a:gs>
+          </a:gsLst>
+          <a:lin ang="5400000" scaled="0"/>
+        </a:gradFill>
+        <a:gradFill rotWithShape="1">
+          <a:gsLst>
+            <a:gs pos="0">
+              <a:schemeClr val="phClr">
+                <a:satMod val="103000"/>
+                <a:lumMod val="102000"/>
+                <a:tint val="94000"/>
+              </a:schemeClr>
+            </a:gs>
+            <a:gs pos="50000">
+              <a:schemeClr val="phClr">
+                <a:satMod val="110000"/>
+                <a:lumMod val="100000"/>
+                <a:shade val="100000"/>
+              </a:schemeClr>
+            </a:gs>
+            <a:gs pos="100000">
+              <a:schemeClr val="phClr">
+                <a:lumMod val="99000"/>
+                <a:satMod val="120000"/>
+                <a:shade val="78000"/>
+              </a:schemeClr>
+            </a:gs>
+          </a:gsLst>
+          <a:lin ang="5400000" scaled="0"/>
+        </a:gradFill>
+      </a:fillStyleLst>
+      <a:lnStyleLst>
+        <a:ln w="12700" cap="flat" cmpd="sng" algn="ctr">
+          <a:solidFill>
+            <a:schemeClr val="phClr"/>
+          </a:solidFill>
+          <a:prstDash val="solid"/>
+          <a:miter lim="800000"/>
+        </a:ln>
+        <a:ln w="19050" cap="flat" cmpd="sng" algn="ctr">
+          <a:solidFill>
+            <a:schemeClr val="phClr"/>
+          </a:solidFill>
+          <a:prstDash val="solid"/>
+          <a:miter lim="800000"/>
+        </a:ln>
+        <a:ln w="25400" cap="flat" cmpd="sng" algn="ctr">
+          <a:solidFill>
+            <a:schemeClr val="phClr"/>
+          </a:solidFill>
+          <a:prstDash val="solid"/>
+          <a:miter lim="800000"/>
+        </a:ln>
+      </a:lnStyleLst>
+      <a:effectStyleLst>
+        <a:effectStyle>
+          <a:effectLst/>
+        </a:effectStyle>
+        <a:effectStyle>
+          <a:effectLst/>
+        </a:effectStyle>
+        <a:effectStyle>
+          <a:effectLst>
+            <a:outerShdw blurRad="57150" dist="19050" dir="5400000" algn="ctr" rotWithShape="0">
+              <a:srgbClr val="000000">
+                <a:alpha val="63000"/>
+              </a:srgbClr>
+            </a:outerShdw>
+          </a:effectLst>
+        </a:effectStyle>
+      </a:effectStyleLst>
+      <a:bgFillStyleLst>
+        <a:solidFill>
+          <a:schemeClr val="phClr"/>
+        </a:solidFill>
+        <a:solidFill>
+          <a:schemeClr val="phClr">
+            <a:tint val="95000"/>
+            <a:satMod val="170000"/>
+          </a:schemeClr>
+        </a:solidFill>
+        <a:gradFill rotWithShape="1">
+          <a:gsLst>
+            <a:gs pos="0">
+              <a:schemeClr val="phClr">
+                <a:tint val="93000"/>
+                <a:satMod val="150000"/>
+                <a:shade val="98000"/>
+                <a:lumMod val="102000"/>
+              </a:schemeClr>
+            </a:gs>
+            <a:gs pos="50000">
+              <a:schemeClr val="phClr">
+                <a:tint val="98000"/>
+                <a:satMod val="130000"/>
+                <a:shade val="90000"/>
+                <a:lumMod val="103000"/>
+              </a:schemeClr>
+            </a:gs>
+            <a:gs pos="100000">
+              <a:schemeClr val="phClr">
+                <a:shade val="63000"/>
+                <a:satMod val="120000"/>
+              </a:schemeClr>
+            </a:gs>
+          </a:gsLst>
+          <a:lin ang="5400000" scaled="0"/>
+        </a:gradFill>
+      </a:bgFillStyleLst>
+    </a:fmtScheme>
+  </a:themeElements>
+  <a:objectDefaults>
+    <a:lnDef>
+      <a:spPr/>
+      <a:bodyPr/>
+      <a:lstStyle/>
+      <a:style>
+        <a:lnRef idx="2">
+          <a:schemeClr val="accent1"/>
+        </a:lnRef>
+        <a:fillRef idx="0">
+          <a:schemeClr val="accent1"/>
+        </a:fillRef>
+        <a:effectRef idx="1">
+          <a:schemeClr val="accent1"/>
+        </a:effectRef>
+        <a:fontRef idx="minor">
+          <a:schemeClr val="tx1"/>
+        </a:fontRef>
+      </a:style>
+    </a:lnDef>
+  </a:objectDefaults>
+  <a:extraClrSchemeLst/>
+  <a:extLst>
+    <a:ext uri="{05A4C25C-085E-4340-85A3-A5531E510DB2}">
+      <thm15:themeFamily xmlns:thm15="http://schemas.microsoft.com/office/thememl/2012/main" name="Office Theme" id="{2E142A2C-CD16-42D6-873A-C26D2A0506FA}" vid="{1BDDFF52-6CD6-40A5-AB3C-68EB2F1E4D0A}"/>
+    </a:ext>
+  </a:extLst>
+</a:theme>
 </file>